--- a/deliverables/T03/slides.pptx
+++ b/deliverables/T03/slides.pptx
@@ -21,6 +21,23 @@
     <p:sldId id="269" r:id="rId21"/>
     <p:sldId id="270" r:id="rId22"/>
     <p:sldId id="271" r:id="rId23"/>
+    <p:sldId id="272" r:id="rId24"/>
+    <p:sldId id="273" r:id="rId25"/>
+    <p:sldId id="274" r:id="rId26"/>
+    <p:sldId id="275" r:id="rId27"/>
+    <p:sldId id="276" r:id="rId28"/>
+    <p:sldId id="277" r:id="rId29"/>
+    <p:sldId id="278" r:id="rId30"/>
+    <p:sldId id="279" r:id="rId31"/>
+    <p:sldId id="280" r:id="rId32"/>
+    <p:sldId id="281" r:id="rId33"/>
+    <p:sldId id="282" r:id="rId34"/>
+    <p:sldId id="283" r:id="rId35"/>
+    <p:sldId id="284" r:id="rId36"/>
+    <p:sldId id="285" r:id="rId37"/>
+    <p:sldId id="286" r:id="rId38"/>
+    <p:sldId id="287" r:id="rId39"/>
+    <p:sldId id="288" r:id="rId40"/>
   </p:sldIdLst>
   <p:sldSz cx="12191695" cy="6858000" type="screen4x3"/>
   <p:notesSz cx="6858000" cy="9144000"/>
@@ -517,57 +534,7 @@
           <a:lstStyle/>
           <a:p>
             <a:r>
-              <a:t>**Текст ученику**</a:t>
-            </a:r>
-          </a:p>
-          <a:p/>
-          <a:p>
-            <a:r>
-              <a:t>- Различаю атом, молекулу, ион.</a:t>
-            </a:r>
-          </a:p>
-          <a:p>
-            <a:r>
-              <a:t>- Вижу символ, индекс, коэффициент и заряд.</a:t>
-            </a:r>
-          </a:p>
-          <a:p>
-            <a:r>
-              <a:t>- Считаю атомы, включая запись со скобками.</a:t>
-            </a:r>
-          </a:p>
-          <a:p>
-            <a:r>
-              <a:t>- Перевожу кг/г/мг; нахожу процент; сохраняю отношение.</a:t>
-            </a:r>
-          </a:p>
-          <a:p>
-            <a:r>
-              <a:t>- Мой вопрос после конспекта: «…».</a:t>
-            </a:r>
-          </a:p>
-          <a:p/>
-          <a:p>
-            <a:r>
-              <a:t>**Заметки преподавателю**</a:t>
-            </a:r>
-          </a:p>
-          <a:p/>
-          <a:p>
-            <a:r>
-              <a:t>Урок 1, 0–5 минут. Прочитать не более двух вопросов из предварительной работы. Не запускать входную диагностику повторно. Обещать возврат к вопросам после практики; все обязательные понятия объяснить до самостоятельных задач.</a:t>
-            </a:r>
-          </a:p>
-          <a:p/>
-          <a:p>
-            <a:r>
-              <a:t>**Раскрытие ответа**</a:t>
-            </a:r>
-          </a:p>
-          <a:p/>
-          <a:p>
-            <a:r>
-              <a:t>Единственного ответа нет. Вопрос считается сформулированным, если ученик назвал конкретную запись или шаг, который не понял.</a:t>
+              <a:t>Обложка недели.</a:t>
             </a:r>
           </a:p>
         </p:txBody>
@@ -637,65 +604,24 @@
           <a:lstStyle/>
           <a:p>
             <a:r>
-              <a:t>**Текст ученику**</a:t>
+              <a:t>Урок 1, E2. Дать заполненную модель 3H₂O, затем показать маленький устный вопрос как проверку объяснения. Основная самостоятельная практика — после полного блока теории.</a:t>
             </a:r>
           </a:p>
           <a:p/>
           <a:p>
             <a:r>
-              <a:t>**1 кг = 1000 г; 1 г = 1000 мг.**</a:t>
+              <a:t>Ответ (следующий слайд):</a:t>
+            </a:r>
+          </a:p>
+          <a:p>
+            <a:r>
+              <a:t>В 2CO₂: C — 2 × 1 = 2; O — 2 × 2 = **4**; всего 6. Число 4 относится только к O, а 6 — ко всем атомам.</a:t>
             </a:r>
           </a:p>
           <a:p/>
           <a:p>
             <a:r>
-              <a:t>- кг → г: × 1000; г → мг: × 1000.</a:t>
-            </a:r>
-          </a:p>
-          <a:p>
-            <a:r>
-              <a:t>- г → кг: ÷ 1000; мг → г: ÷ 1000.</a:t>
-            </a:r>
-          </a:p>
-          <a:p>
-            <a:r>
-              <a:t>- кг → мг: × 1 000 000.</a:t>
-            </a:r>
-          </a:p>
-          <a:p/>
-          <a:p>
-            <a:r>
-              <a:t>Примеры: 0,40 кг = 400 г; 250 мг = 0,250 г. В меньших единицах числовое значение больше.</a:t>
-            </a:r>
-          </a:p>
-          <a:p/>
-          <a:p>
-            <a:r>
-              <a:t>Проверка: **0,25 кг = … г; 600 мг = … г; 1,2 г = … мг**.</a:t>
-            </a:r>
-          </a:p>
-          <a:p/>
-          <a:p>
-            <a:r>
-              <a:t>**Заметки преподавателю**</a:t>
-            </a:r>
-          </a:p>
-          <a:p/>
-          <a:p>
-            <a:r>
-              <a:t>Урок 1, E5; вопросы внизу — P1.4, к ним вернуться в 63–73 минуты. Сначала написать действие, затем двигать запятую. Запятая десятичная; 0,250 г и 0,25 г равны. Для сравнения масс сначала привести обе к одной единице.</a:t>
-            </a:r>
-          </a:p>
-          <a:p/>
-          <a:p>
-            <a:r>
-              <a:t>**Раскрытие ответа**</a:t>
-            </a:r>
-          </a:p>
-          <a:p/>
-          <a:p>
-            <a:r>
-              <a:t>0,25 × 1000 = **250 г**; 600/1000 = **0,6 г**; 1,2 × 1000 = **1200 мг**. Обратная проверка: 1200 мг / 1000 = 1,2 г.</a:t>
+              <a:t>Обратный шаг: если в молекулах H₂O всего 6 атомов H, коэффициент 6/2 = 3. Проверка по O: 3 × 1 = 3. Индексы готовой формулы сохраняются.</a:t>
             </a:r>
           </a:p>
         </p:txBody>
@@ -765,77 +691,19 @@
           <a:lstStyle/>
           <a:p>
             <a:r>
-              <a:t>**Текст ученику**</a:t>
+              <a:t>Показать после попытки учеников.</a:t>
             </a:r>
           </a:p>
           <a:p/>
           <a:p>
             <a:r>
-              <a:t>Сначала приведи часть и целое к одинаковым единицам.</a:t>
+              <a:t>В 2CO₂: C — 2 × 1 = 2; O — 2 × 2 = **4**; всего 6. Число 4 относится только к O, а 6 — ко всем атомам.</a:t>
             </a:r>
           </a:p>
           <a:p/>
           <a:p>
             <a:r>
-              <a:t>- Процент части: **часть / целое × 100%**.</a:t>
-            </a:r>
-          </a:p>
-          <a:p>
-            <a:r>
-              <a:t>- Часть по проценту: **целое × (p/100)**.</a:t>
-            </a:r>
-          </a:p>
-          <a:p>
-            <a:r>
-              <a:t>- Целое по известной части: **часть / (p/100)**.</a:t>
-            </a:r>
-          </a:p>
-          <a:p/>
-          <a:p>
-            <a:r>
-              <a:t>30 г от 200 г: 30/200 = 0,15 = **15%**.</a:t>
-            </a:r>
-          </a:p>
-          <a:p/>
-          <a:p>
-            <a:r>
-              <a:t>15% от 200 г: 200 × 0,15 = **30 г**.</a:t>
-            </a:r>
-          </a:p>
-          <a:p/>
-          <a:p>
-            <a:r>
-              <a:t>30 г — это 15% целого: 30/0,15 = **200 г**.</a:t>
-            </a:r>
-          </a:p>
-          <a:p/>
-          <a:p>
-            <a:r>
-              <a:t>Вопрос для практики: 12 г — какой процент от 80 г?</a:t>
-            </a:r>
-          </a:p>
-          <a:p/>
-          <a:p>
-            <a:r>
-              <a:t>**Заметки преподавателю**</a:t>
-            </a:r>
-          </a:p>
-          <a:p/>
-          <a:p>
-            <a:r>
-              <a:t>Урок 1, E6. Все три действия объяснить до практики. Каждый раз подписать «ищем часть/целое/процент». Не вводить вычисление массы по химической формуле: здесь доля выбранной части образца дана или вычисляется из данных условия.</a:t>
-            </a:r>
-          </a:p>
-          <a:p/>
-          <a:p>
-            <a:r>
-              <a:t>**Раскрытие ответа**</a:t>
-            </a:r>
-          </a:p>
-          <a:p/>
-          <a:p>
-            <a:r>
-              <a:t>12/80 × 100% = **15%**; проверка 80 × 0,15 = 12 г. Доля 0,15 и процент 15% выражают одну часть разными способами.</a:t>
+              <a:t>Обратный шаг: если в молекулах H₂O всего 6 атомов H, коэффициент 6/2 = 3. Проверка по O: 3 × 1 = 3. Индексы готовой формулы сохраняются.</a:t>
             </a:r>
           </a:p>
         </p:txBody>
@@ -905,76 +773,18 @@
           <a:lstStyle/>
           <a:p>
             <a:r>
-              <a:t>**Текст ученику**</a:t>
+              <a:t>Урок 1, E3. Сначала рамкой выделить (OH), затем показать стрелки множителя к O и H. Скобка не умножает Ca. Написать полную таблицу, а не только итог 10. Примеры с большей группой используют этот же алгоритм.</a:t>
             </a:r>
           </a:p>
           <a:p/>
           <a:p>
             <a:r>
-              <a:t>Если отношение по условию постоянно, обе величины меняются в одинаковое число раз.</a:t>
-            </a:r>
-          </a:p>
-          <a:p/>
-          <a:p>
-            <a:r>
-              <a:t>На 2 г компонента A приходится 5 г B. На 6 г A потребуется **5 × (6/2) = 15 г B**.</a:t>
-            </a:r>
-          </a:p>
-          <a:p/>
-          <a:p>
-            <a:r>
-              <a:t>Если A : B = 2 : 3, а вместе 20 г:</a:t>
-            </a:r>
-          </a:p>
-          <a:p/>
-          <a:p>
-            <a:r>
-              <a:t>1. Всего 2 + 3 = 5 равных частей.</a:t>
-            </a:r>
-          </a:p>
-          <a:p>
-            <a:r>
-              <a:t>2. Одна часть: 20/5 = 4 г.</a:t>
-            </a:r>
-          </a:p>
-          <a:p>
-            <a:r>
-              <a:t>3. A: 2 × 4 = 8 г; B: 3 × 4 = 12 г.</a:t>
-            </a:r>
-          </a:p>
-          <a:p>
-            <a:r>
-              <a:t>4. Проверка: 8 + 12 = 20; 8/12 = 2/3.</a:t>
-            </a:r>
-          </a:p>
-          <a:p/>
-          <a:p>
-            <a:r>
-              <a:t>A и B — обозначения компонентов из условия, не символы химических элементов.</a:t>
-            </a:r>
-          </a:p>
-          <a:p/>
-          <a:p>
-            <a:r>
-              <a:t>**Заметки преподавателю**</a:t>
-            </a:r>
-          </a:p>
-          <a:p/>
-          <a:p>
-            <a:r>
-              <a:t>Урок 1, E6. Различить отношение A к B и долю A от всего: 2/3 и 2/(2 + 3). Для слабой базы нарисовать пять одинаковых прямоугольников, два закрасить одним цветом, три другим. Рисунок лишь показывает равные массовые части.</a:t>
-            </a:r>
-          </a:p>
-          <a:p/>
-          <a:p>
-            <a:r>
-              <a:t>**Раскрытие ответа**</a:t>
-            </a:r>
-          </a:p>
-          <a:p/>
-          <a:p>
-            <a:r>
-              <a:t>На 4 г A берут 10 г B, значит на 12 г A нужно 30 г B. Для A : B = 3 : 5 и общей массы 320 г: 8 частей, по 40 г; A — 120 г, B — 200 г.</a:t>
+              <a:t>Ответ (следующий слайд):</a:t>
+            </a:r>
+          </a:p>
+          <a:p>
+            <a:r>
+              <a:t>Для переноса алгоритма: в Al₂(SO₄)₃ одна формульная единица содержит Al — 2, S — 3, O — 12. Число 3 после скобки умножает S и O; оно не меняет Al.</a:t>
             </a:r>
           </a:p>
         </p:txBody>
@@ -1044,83 +854,13 @@
           <a:lstStyle/>
           <a:p>
             <a:r>
-              <a:t>**Текст ученику**</a:t>
+              <a:t>Показать после попытки учеников.</a:t>
             </a:r>
           </a:p>
           <a:p/>
           <a:p>
             <a:r>
-              <a:t>1. **H; O₂; Na⁺; SO₄²⁻**: тип частицы; для иона заряд.</a:t>
-            </a:r>
-          </a:p>
-          <a:p>
-            <a:r>
-              <a:t>2. **3H₂O**: коэффициент, индексы, атомы H/O/всего.</a:t>
-            </a:r>
-          </a:p>
-          <a:p>
-            <a:r>
-              <a:t>3. **2Ca(OH)₂**: атомы Ca/O/H/всего; поясни скобки.</a:t>
-            </a:r>
-          </a:p>
-          <a:p>
-            <a:r>
-              <a:t>4. **2CO₂**: сколько атомов O? A) 2; B) 3; C) 4; D) 6.</a:t>
-            </a:r>
-          </a:p>
-          <a:p>
-            <a:r>
-              <a:t>5. Целое **0,20 кг**, часть **30 г**: какой процент? A) 0,15%; B) 15%; C) 150%; D) 15000%.</a:t>
-            </a:r>
-          </a:p>
-          <a:p/>
-          <a:p>
-            <a:r>
-              <a:t>Ответ без шага не показывает, как ты решил. Сначала своя попытка, затем общий разбор.</a:t>
-            </a:r>
-          </a:p>
-          <a:p/>
-          <a:p>
-            <a:r>
-              <a:t>**Заметки преподавателю**</a:t>
-            </a:r>
-          </a:p>
-          <a:p/>
-          <a:p>
-            <a:r>
-              <a:t>Урок 1: пункты 1–3 соответствуют P1.1–P1.3 в 53–63 минуты, 4–5 — P1.7–P1.8 в 73–80. Между ними математическая практика P1.4–P1.6, слайды 10–12. Не проводить все пять пунктов одним новым блоком. Самостоятельный ответ принимать до раскрытия ключа.</a:t>
-            </a:r>
-          </a:p>
-          <a:p/>
-          <a:p>
-            <a:r>
-              <a:t>**Раскрытие ответа**</a:t>
-            </a:r>
-          </a:p>
-          <a:p/>
-          <a:p>
-            <a:r>
-              <a:t>1. H — атом; O₂ — молекула; Na⁺ — ион +1; SO₄²⁻ — ион −2.</a:t>
-            </a:r>
-          </a:p>
-          <a:p>
-            <a:r>
-              <a:t>2. Коэффициент 3; индексы H — 2, O — 1; H — 6, O — 3, всего 9.</a:t>
-            </a:r>
-          </a:p>
-          <a:p>
-            <a:r>
-              <a:t>3. Ca — 2, O — 4, H — 4, всего 10; скобка умножает O и H.</a:t>
-            </a:r>
-          </a:p>
-          <a:p>
-            <a:r>
-              <a:t>4. **C, 4**: 2 × 2. D — число всех атомов, а спрашивают O.</a:t>
-            </a:r>
-          </a:p>
-          <a:p>
-            <a:r>
-              <a:t>5. **B, 15%**: 0,20 кг = 200 г; 30/200 × 100%.</a:t>
+              <a:t>Для переноса алгоритма: в Al₂(SO₄)₃ одна формульная единица содержит Al — 2, S — 3, O — 12. Число 3 после скобки умножает S и O; оно не меняет Al.</a:t>
             </a:r>
           </a:p>
         </p:txBody>
@@ -1190,73 +930,18 @@
           <a:lstStyle/>
           <a:p>
             <a:r>
-              <a:t>**Текст ученику**</a:t>
+              <a:t>Урок 1, E4. Единицу в записи Na⁺ обычно опускают. Суммарный заряд — простое сложение зарядов перечисленных ионов, в единицах элементарного заряда. Не выводить формулу вещества из этой условной группы. Не вводить механизм образования иона.</a:t>
             </a:r>
           </a:p>
           <a:p/>
           <a:p>
             <a:r>
-              <a:t>X1. H — атом или молекула?</a:t>
-            </a:r>
-          </a:p>
-          <a:p/>
-          <a:p>
-            <a:r>
-              <a:t>X2. O₂ — молекула или ион?</a:t>
-            </a:r>
-          </a:p>
-          <a:p/>
-          <a:p>
-            <a:r>
-              <a:t>X3. Ca²⁺ — какая частица и какой заряд?</a:t>
-            </a:r>
-          </a:p>
-          <a:p/>
-          <a:p>
-            <a:r>
-              <a:t>X4. Чем отличаются ₂ и 3 в 3H₂O?</a:t>
-            </a:r>
-          </a:p>
-          <a:p/>
-          <a:p>
-            <a:r>
-              <a:t>X5. 0,30 кг = … г. X6. 450 мг = … г.</a:t>
-            </a:r>
-          </a:p>
-          <a:p/>
-          <a:p>
-            <a:r>
-              <a:t>X7. 5 г — какой процент от 20 г?</a:t>
-            </a:r>
-          </a:p>
-          <a:p/>
-          <a:p>
-            <a:r>
-              <a:t>До урока 2: **G1–G3, 15 минут**, входят в недельное ДЗ. Запиши незавершённый шаг и вопрос.</a:t>
-            </a:r>
-          </a:p>
-          <a:p/>
-          <a:p>
-            <a:r>
-              <a:t>**Заметки преподавателю**</a:t>
-            </a:r>
-          </a:p>
-          <a:p/>
-          <a:p>
-            <a:r>
-              <a:t>Урок 1, 80–87: четыре минуты на ответы, три на ключ; X4–X7 с пояснением. 87–90: назначить ДЗ и вернуться к двум исходным вопросам. Не называть результат прогнозом ЕНТ и не выполнять полную диагностику.</a:t>
-            </a:r>
-          </a:p>
-          <a:p/>
-          <a:p>
-            <a:r>
-              <a:t>**Раскрытие ответа**</a:t>
-            </a:r>
-          </a:p>
-          <a:p/>
-          <a:p>
-            <a:r>
-              <a:t>X1 атом H; X2 молекула O₂; X3 один ион Ca, +2; X4 индекс 2 — атомы H в одной молекуле, коэффициент 3 — три молекулы; X5 300 г; X6 0,45 г; X7 25%. Максимум 7 баллов по плану урока 1.</a:t>
+              <a:t>Ответ (следующий слайд):</a:t>
+            </a:r>
+          </a:p>
+          <a:p>
+            <a:r>
+              <a:t>Два Na⁺ и один Cl⁻: 3 иона; суммарный заряд 2 × (+1) + 1 × (−1) = **+1**. В 3SO₄²⁻: S — 3, O — 12; суммарный заряд трёх ионов −6, но заряд каждого −2.</a:t>
             </a:r>
           </a:p>
         </p:txBody>
@@ -1326,61 +1011,13 @@
           <a:lstStyle/>
           <a:p>
             <a:r>
-              <a:t>**Текст ученику**</a:t>
+              <a:t>Показать после попытки учеников.</a:t>
             </a:r>
           </a:p>
           <a:p/>
           <a:p>
             <a:r>
-              <a:t>**R1.** Прочитай шесть записей: **H₂O; CO₂; Na⁺; Ca²⁺; 3H₂O; NaCl**. Что представлено? Сколько атомов каждого элемента? Для иона прочитай заряд, для NaCl назови единицу.</a:t>
-            </a:r>
-          </a:p>
-          <a:p/>
-          <a:p>
-            <a:r>
-              <a:t>**R2.** 0,12 кг = … г; 75 мг = … г; 20% от 50 г = … г. В одинаковых наборах на 3 г A приходится 6 г B: сколько B нужно на 9 г A?</a:t>
-            </a:r>
-          </a:p>
-          <a:p/>
-          <a:p>
-            <a:r>
-              <a:t>После 20-й минуты: сравним ход выполнения **G1–G3**, объясним две общие ошибки, заново решим один исправленный шаг.</a:t>
-            </a:r>
-          </a:p>
-          <a:p/>
-          <a:p>
-            <a:r>
-              <a:t>**Заметки преподавателю**</a:t>
-            </a:r>
-          </a:p>
-          <a:p/>
-          <a:p>
-            <a:r>
-              <a:t>Урок 2: 0–4 воспроизведение алгоритма по слайду 9; 4–12 R1; 12–20 R2. 20–35 разбор уже сданного ДЗ, точные условия и ключ G1–G3 в плане 2. Ученик с ошибкой объясняет новый ход, а не только копирует число. Все определения уже вводились на уроке 1.</a:t>
-            </a:r>
-          </a:p>
-          <a:p/>
-          <a:p>
-            <a:r>
-              <a:t>**Раскрытие ответа**</a:t>
-            </a:r>
-          </a:p>
-          <a:p/>
-          <a:p>
-            <a:r>
-              <a:t>R1: H₂O — одна молекула, H — 2, O — 1; CO₂ — одна молекула, C — 1, O — 2; Na⁺ — один ион Na, +1; Ca²⁺ — один ион Ca, +2; 3H₂O — три молекулы, H — 6, O — 3; NaCl — одна формульная единица, Na : Cl = 1 : 1.</a:t>
-            </a:r>
-          </a:p>
-          <a:p/>
-          <a:p>
-            <a:r>
-              <a:t>R2: 120 г; 0,075 г; 10 г; 18 г B. Для последнего пункта множитель 9/3 = 3.</a:t>
-            </a:r>
-          </a:p>
-          <a:p/>
-          <a:p>
-            <a:r>
-              <a:t>Ключ ДЗ для заметок: G1 He — атом, N₂ — молекула, Na⁺ — ион +1, O²⁻ — ион −2; G2 4NH₃: коэффициент 4; в одной молекуле N — 1, H — 3; во всех N — 4, H — 12, всего 16; G3 32 г, 0,48 г, 2500 мг, 0,6 г &gt; 550 мг.</a:t>
+              <a:t>Два Na⁺ и один Cl⁻: 3 иона; суммарный заряд 2 × (+1) + 1 × (−1) = **+1**. В 3SO₄²⁻: S — 3, O — 12; суммарный заряд трёх ионов −6, но заряд каждого −2.</a:t>
             </a:r>
           </a:p>
         </p:txBody>
@@ -1450,55 +1087,251 @@
           <a:lstStyle/>
           <a:p>
             <a:r>
-              <a:t>**Текст ученику**</a:t>
+              <a:t>Урок 1, E4. Не рисовать отдельные «молекулы соли». Для объяснения достаточно сказать, что формула передаёт соотношение частиц. Типы устройства веществ и их свойства — темы дальнейших недель. В задачах «сколько атомов элемента в записи» можно считать представленное количество Na и Cl, но название единицы должно оставаться верным.</a:t>
             </a:r>
           </a:p>
           <a:p/>
           <a:p>
             <a:r>
-              <a:t>**P2.7.** Где ровно 12 атомов O в представленных единицах? A) 3CO₂; B) 4H₂O; C) 2Ca(OH)₂; D) 3SO₄²⁻. Подтверди выбранный ответ и объясни один неверный.</a:t>
+              <a:t>Ответ (следующий слайд):</a:t>
+            </a:r>
+          </a:p>
+          <a:p>
+            <a:r>
+              <a:t>В 3NaCl представлены Na — 3 и Cl — 3; всего 6 одноатомных ионов. Три формульные единицы, а не три молекулы.</a:t>
+            </a:r>
+          </a:p>
+        </p:txBody>
+      </p:sp>
+      <p:sp>
+        <p:nvSpPr>
+          <p:cNvPr id="4" name="Slide Number Placeholder 3"/>
+          <p:cNvSpPr>
+            <a:spLocks noGrp="1"/>
+          </p:cNvSpPr>
+          <p:nvPr>
+            <p:ph type="sldNum" idx="5" sz="quarter"/>
+          </p:nvPr>
+        </p:nvSpPr>
+        <p:spPr/>
+      </p:sp>
+    </p:spTree>
+  </p:cSld>
+  <p:clrMapOvr>
+    <a:masterClrMapping/>
+  </p:clrMapOvr>
+</p:notes>
+</file>
+
+<file path=ppt/notesSlides/notesSlide17.xml><?xml version="1.0" encoding="utf-8"?>
+<p:notes xmlns:a="http://schemas.openxmlformats.org/drawingml/2006/main" xmlns:p="http://schemas.openxmlformats.org/presentationml/2006/main" xmlns:r="http://schemas.openxmlformats.org/officeDocument/2006/relationships">
+  <p:cSld>
+    <p:spTree>
+      <p:nvGrpSpPr>
+        <p:cNvPr id="1" name=""/>
+        <p:cNvGrpSpPr/>
+        <p:nvPr/>
+      </p:nvGrpSpPr>
+      <p:grpSpPr>
+        <a:xfrm>
+          <a:off x="0" y="0"/>
+          <a:ext cx="0" cy="0"/>
+          <a:chOff x="0" y="0"/>
+          <a:chExt cx="0" cy="0"/>
+        </a:xfrm>
+      </p:grpSpPr>
+      <p:sp>
+        <p:nvSpPr>
+          <p:cNvPr id="2" name="Slide Image Placeholder 1"/>
+          <p:cNvSpPr>
+            <a:spLocks noGrp="1"/>
+          </p:cNvSpPr>
+          <p:nvPr>
+            <p:ph type="sldImg" idx="2"/>
+          </p:nvPr>
+        </p:nvSpPr>
+        <p:spPr/>
+      </p:sp>
+      <p:sp>
+        <p:nvSpPr>
+          <p:cNvPr id="3" name="Notes Placeholder 2"/>
+          <p:cNvSpPr>
+            <a:spLocks noGrp="1"/>
+          </p:cNvSpPr>
+          <p:nvPr>
+            <p:ph type="body" idx="3" sz="quarter"/>
+          </p:nvPr>
+        </p:nvSpPr>
+        <p:spPr/>
+        <p:txBody>
+          <a:bodyPr/>
+          <a:lstStyle/>
+          <a:p>
+            <a:r>
+              <a:t>Показать после попытки учеников.</a:t>
             </a:r>
           </a:p>
           <a:p/>
           <a:p>
             <a:r>
-              <a:t>**P2.8.** Целое 0,50 кг, часть 25 г. Ученик написал 25/0,50 × 100% = 5000%. Найди первую ошибку, реши верно и проверь обратно.</a:t>
+              <a:t>В 3NaCl представлены Na — 3 и Cl — 3; всего 6 одноатомных ионов. Три формульные единицы, а не три молекулы.</a:t>
+            </a:r>
+          </a:p>
+        </p:txBody>
+      </p:sp>
+      <p:sp>
+        <p:nvSpPr>
+          <p:cNvPr id="4" name="Slide Number Placeholder 3"/>
+          <p:cNvSpPr>
+            <a:spLocks noGrp="1"/>
+          </p:cNvSpPr>
+          <p:nvPr>
+            <p:ph type="sldNum" idx="5" sz="quarter"/>
+          </p:nvPr>
+        </p:nvSpPr>
+        <p:spPr/>
+      </p:sp>
+    </p:spTree>
+  </p:cSld>
+  <p:clrMapOvr>
+    <a:masterClrMapping/>
+  </p:clrMapOvr>
+</p:notes>
+</file>
+
+<file path=ppt/notesSlides/notesSlide18.xml><?xml version="1.0" encoding="utf-8"?>
+<p:notes xmlns:a="http://schemas.openxmlformats.org/drawingml/2006/main" xmlns:p="http://schemas.openxmlformats.org/presentationml/2006/main" xmlns:r="http://schemas.openxmlformats.org/officeDocument/2006/relationships">
+  <p:cSld>
+    <p:spTree>
+      <p:nvGrpSpPr>
+        <p:cNvPr id="1" name=""/>
+        <p:cNvGrpSpPr/>
+        <p:nvPr/>
+      </p:nvGrpSpPr>
+      <p:grpSpPr>
+        <a:xfrm>
+          <a:off x="0" y="0"/>
+          <a:ext cx="0" cy="0"/>
+          <a:chOff x="0" y="0"/>
+          <a:chExt cx="0" cy="0"/>
+        </a:xfrm>
+      </p:grpSpPr>
+      <p:sp>
+        <p:nvSpPr>
+          <p:cNvPr id="2" name="Slide Image Placeholder 1"/>
+          <p:cNvSpPr>
+            <a:spLocks noGrp="1"/>
+          </p:cNvSpPr>
+          <p:nvPr>
+            <p:ph type="sldImg" idx="2"/>
+          </p:nvPr>
+        </p:nvSpPr>
+        <p:spPr/>
+      </p:sp>
+      <p:sp>
+        <p:nvSpPr>
+          <p:cNvPr id="3" name="Notes Placeholder 2"/>
+          <p:cNvSpPr>
+            <a:spLocks noGrp="1"/>
+          </p:cNvSpPr>
+          <p:nvPr>
+            <p:ph type="body" idx="3" sz="quarter"/>
+          </p:nvPr>
+        </p:nvSpPr>
+        <p:spPr/>
+        <p:txBody>
+          <a:bodyPr/>
+          <a:lstStyle/>
+          <a:p>
+            <a:r>
+              <a:t>Урок 1: закончить объяснение химической записи перед математикой. Слайд остаётся опорой на практике, затем используется для повторения урока 2. В первой попытке ученик проговаривает шаг; после освоения опору закрыть.</a:t>
             </a:r>
           </a:p>
           <a:p/>
           <a:p>
             <a:r>
-              <a:t>В конце: **Q1–Q6, 10 минут**, без ключа до сдачи.</a:t>
+              <a:t>Ответ (следующий слайд):</a:t>
+            </a:r>
+          </a:p>
+          <a:p>
+            <a:r>
+              <a:t>3H₂O: 3 — коэффициент, ₂ — индекс H. Ca²⁺: ²⁺ — заряд одного иона. 2Ca(OH)₂: первая 2 — коэффициент, последняя ₂ — множитель O и H внутри скобок. Заряд и индекс не меняем местами.</a:t>
+            </a:r>
+          </a:p>
+        </p:txBody>
+      </p:sp>
+      <p:sp>
+        <p:nvSpPr>
+          <p:cNvPr id="4" name="Slide Number Placeholder 3"/>
+          <p:cNvSpPr>
+            <a:spLocks noGrp="1"/>
+          </p:cNvSpPr>
+          <p:nvPr>
+            <p:ph type="sldNum" idx="5" sz="quarter"/>
+          </p:nvPr>
+        </p:nvSpPr>
+        <p:spPr/>
+      </p:sp>
+    </p:spTree>
+  </p:cSld>
+  <p:clrMapOvr>
+    <a:masterClrMapping/>
+  </p:clrMapOvr>
+</p:notes>
+</file>
+
+<file path=ppt/notesSlides/notesSlide19.xml><?xml version="1.0" encoding="utf-8"?>
+<p:notes xmlns:a="http://schemas.openxmlformats.org/drawingml/2006/main" xmlns:p="http://schemas.openxmlformats.org/presentationml/2006/main" xmlns:r="http://schemas.openxmlformats.org/officeDocument/2006/relationships">
+  <p:cSld>
+    <p:spTree>
+      <p:nvGrpSpPr>
+        <p:cNvPr id="1" name=""/>
+        <p:cNvGrpSpPr/>
+        <p:nvPr/>
+      </p:nvGrpSpPr>
+      <p:grpSpPr>
+        <a:xfrm>
+          <a:off x="0" y="0"/>
+          <a:ext cx="0" cy="0"/>
+          <a:chOff x="0" y="0"/>
+          <a:chExt cx="0" cy="0"/>
+        </a:xfrm>
+      </p:grpSpPr>
+      <p:sp>
+        <p:nvSpPr>
+          <p:cNvPr id="2" name="Slide Image Placeholder 1"/>
+          <p:cNvSpPr>
+            <a:spLocks noGrp="1"/>
+          </p:cNvSpPr>
+          <p:nvPr>
+            <p:ph type="sldImg" idx="2"/>
+          </p:nvPr>
+        </p:nvSpPr>
+        <p:spPr/>
+      </p:sp>
+      <p:sp>
+        <p:nvSpPr>
+          <p:cNvPr id="3" name="Notes Placeholder 2"/>
+          <p:cNvSpPr>
+            <a:spLocks noGrp="1"/>
+          </p:cNvSpPr>
+          <p:nvPr>
+            <p:ph type="body" idx="3" sz="quarter"/>
+          </p:nvPr>
+        </p:nvSpPr>
+        <p:spPr/>
+        <p:txBody>
+          <a:bodyPr/>
+          <a:lstStyle/>
+          <a:p>
+            <a:r>
+              <a:t>Показать после попытки учеников.</a:t>
             </a:r>
           </a:p>
           <a:p/>
           <a:p>
             <a:r>
-              <a:t>После урока: **G4–G8 + один вариант A/B/C, 50 минут**; исправления — 25 минут, повторение — 15 минут. Все самостоятельные части недели вместе — **150 минут**.</a:t>
-            </a:r>
-          </a:p>
-          <a:p/>
-          <a:p>
-            <a:r>
-              <a:t>**Заметки преподавателю**</a:t>
-            </a:r>
-          </a:p>
-          <a:p/>
-          <a:p>
-            <a:r>
-              <a:t>Урок 2, 35–65: совместные P2.1–P2.6 по полным условиям плана 2, на доске используем опоры слайдов 5–12; самостоятельная попытка P2.7–P2.8 — 65–78. 78–88 — quiz, 88–90 — назвать шаг проверки и назначить работу. Не прибавлять отдельные минуты на домашку или контроль. A — углубление, B — закрепление, C — поддержка, один вариант на ученика.</a:t>
-            </a:r>
-          </a:p>
-          <a:p/>
-          <a:p>
-            <a:r>
-              <a:t>**Раскрытие ответа**</a:t>
-            </a:r>
-          </a:p>
-          <a:p/>
-          <a:p>
-            <a:r>
-              <a:t>P2.7 — **D**: 3 × 4 = 12; A — 6, B — 4, C — 4 атома O. P2.8 — нужны одинаковые единицы: 0,50 кг = 500 г; 25/500 × 100% = **5%**; обратная проверка 500 × 0,05 = 25 г. Ключ Q1–Q6 раскрывать только после сдачи, из преподавательского раздела quiz.md.</a:t>
+              <a:t>3H₂O: 3 — коэффициент, ₂ — индекс H. Ca²⁺: ²⁺ — заряд одного иона. 2Ca(OH)₂: первая 2 — коэффициент, последняя ₂ — множитель O и H внутри скобок. Заряд и индекс не меняем местами.</a:t>
             </a:r>
           </a:p>
         </p:txBody>
@@ -1568,52 +1401,843 @@
           <a:lstStyle/>
           <a:p>
             <a:r>
-              <a:t>**Текст ученику**</a:t>
+              <a:t>Урок 1, 0–5 минут. Прочитать не более двух вопросов из предварительной работы. Не запускать входную диагностику повторно. Обещать возврат к вопросам после практики; все обязательные понятия объяснить до самостоятельных задач.</a:t>
             </a:r>
           </a:p>
           <a:p/>
           <a:p>
             <a:r>
-              <a:t>- Атом — частица химического элемента. Отдельный атом в наших записях нейтрален: **H**, **He**.</a:t>
-            </a:r>
-          </a:p>
-          <a:p>
-            <a:r>
-              <a:t>- Молекула — отдельная нейтральная частица из связанных атомов: **O₂**, **H₂O**.</a:t>
-            </a:r>
-          </a:p>
-          <a:p>
-            <a:r>
-              <a:t>- Ион — заряженный атом или группа атомов: **Na⁺**, **Cl⁻**, **SO₄²⁻**.</a:t>
-            </a:r>
-          </a:p>
-          <a:p>
-            <a:r>
-              <a:t>- Ион может содержать один атом или несколько. Число атомов и заряд — разные признаки.</a:t>
+              <a:t>Ответ (следующий слайд):</a:t>
+            </a:r>
+          </a:p>
+          <a:p>
+            <a:r>
+              <a:t>Единственного ответа нет. Вопрос считается сформулированным, если ученик назвал конкретную запись или шаг, который не понял.</a:t>
+            </a:r>
+          </a:p>
+        </p:txBody>
+      </p:sp>
+      <p:sp>
+        <p:nvSpPr>
+          <p:cNvPr id="4" name="Slide Number Placeholder 3"/>
+          <p:cNvSpPr>
+            <a:spLocks noGrp="1"/>
+          </p:cNvSpPr>
+          <p:nvPr>
+            <p:ph type="sldNum" idx="5" sz="quarter"/>
+          </p:nvPr>
+        </p:nvSpPr>
+        <p:spPr/>
+      </p:sp>
+    </p:spTree>
+  </p:cSld>
+  <p:clrMapOvr>
+    <a:masterClrMapping/>
+  </p:clrMapOvr>
+</p:notes>
+</file>
+
+<file path=ppt/notesSlides/notesSlide20.xml><?xml version="1.0" encoding="utf-8"?>
+<p:notes xmlns:a="http://schemas.openxmlformats.org/drawingml/2006/main" xmlns:p="http://schemas.openxmlformats.org/presentationml/2006/main" xmlns:r="http://schemas.openxmlformats.org/officeDocument/2006/relationships">
+  <p:cSld>
+    <p:spTree>
+      <p:nvGrpSpPr>
+        <p:cNvPr id="1" name=""/>
+        <p:cNvGrpSpPr/>
+        <p:nvPr/>
+      </p:nvGrpSpPr>
+      <p:grpSpPr>
+        <a:xfrm>
+          <a:off x="0" y="0"/>
+          <a:ext cx="0" cy="0"/>
+          <a:chOff x="0" y="0"/>
+          <a:chExt cx="0" cy="0"/>
+        </a:xfrm>
+      </p:grpSpPr>
+      <p:sp>
+        <p:nvSpPr>
+          <p:cNvPr id="2" name="Slide Image Placeholder 1"/>
+          <p:cNvSpPr>
+            <a:spLocks noGrp="1"/>
+          </p:cNvSpPr>
+          <p:nvPr>
+            <p:ph type="sldImg" idx="2"/>
+          </p:nvPr>
+        </p:nvSpPr>
+        <p:spPr/>
+      </p:sp>
+      <p:sp>
+        <p:nvSpPr>
+          <p:cNvPr id="3" name="Notes Placeholder 2"/>
+          <p:cNvSpPr>
+            <a:spLocks noGrp="1"/>
+          </p:cNvSpPr>
+          <p:nvPr>
+            <p:ph type="body" idx="3" sz="quarter"/>
+          </p:nvPr>
+        </p:nvSpPr>
+        <p:spPr/>
+        <p:txBody>
+          <a:bodyPr/>
+          <a:lstStyle/>
+          <a:p>
+            <a:r>
+              <a:t>Урок 1, E5; вопросы внизу — P1.4, к ним вернуться в 63–73 минуты. Сначала написать действие, затем двигать запятую. Запятая десятичная; 0,250 г и 0,25 г равны. Для сравнения масс сначала привести обе к одной единице.</a:t>
             </a:r>
           </a:p>
           <a:p/>
           <a:p>
             <a:r>
-              <a:t>**Заметки преподавателю**</a:t>
+              <a:t>Ответ (следующий слайд):</a:t>
+            </a:r>
+          </a:p>
+          <a:p>
+            <a:r>
+              <a:t>0,25 × 1000 = **250 г**; 600/1000 = **0,6 г**; 1,2 × 1000 = **1200 мг**. Обратная проверка: 1200 мг / 1000 = 1,2 г.</a:t>
+            </a:r>
+          </a:p>
+        </p:txBody>
+      </p:sp>
+      <p:sp>
+        <p:nvSpPr>
+          <p:cNvPr id="4" name="Slide Number Placeholder 3"/>
+          <p:cNvSpPr>
+            <a:spLocks noGrp="1"/>
+          </p:cNvSpPr>
+          <p:nvPr>
+            <p:ph type="sldNum" idx="5" sz="quarter"/>
+          </p:nvPr>
+        </p:nvSpPr>
+        <p:spPr/>
+      </p:sp>
+    </p:spTree>
+  </p:cSld>
+  <p:clrMapOvr>
+    <a:masterClrMapping/>
+  </p:clrMapOvr>
+</p:notes>
+</file>
+
+<file path=ppt/notesSlides/notesSlide21.xml><?xml version="1.0" encoding="utf-8"?>
+<p:notes xmlns:a="http://schemas.openxmlformats.org/drawingml/2006/main" xmlns:p="http://schemas.openxmlformats.org/presentationml/2006/main" xmlns:r="http://schemas.openxmlformats.org/officeDocument/2006/relationships">
+  <p:cSld>
+    <p:spTree>
+      <p:nvGrpSpPr>
+        <p:cNvPr id="1" name=""/>
+        <p:cNvGrpSpPr/>
+        <p:nvPr/>
+      </p:nvGrpSpPr>
+      <p:grpSpPr>
+        <a:xfrm>
+          <a:off x="0" y="0"/>
+          <a:ext cx="0" cy="0"/>
+          <a:chOff x="0" y="0"/>
+          <a:chExt cx="0" cy="0"/>
+        </a:xfrm>
+      </p:grpSpPr>
+      <p:sp>
+        <p:nvSpPr>
+          <p:cNvPr id="2" name="Slide Image Placeholder 1"/>
+          <p:cNvSpPr>
+            <a:spLocks noGrp="1"/>
+          </p:cNvSpPr>
+          <p:nvPr>
+            <p:ph type="sldImg" idx="2"/>
+          </p:nvPr>
+        </p:nvSpPr>
+        <p:spPr/>
+      </p:sp>
+      <p:sp>
+        <p:nvSpPr>
+          <p:cNvPr id="3" name="Notes Placeholder 2"/>
+          <p:cNvSpPr>
+            <a:spLocks noGrp="1"/>
+          </p:cNvSpPr>
+          <p:nvPr>
+            <p:ph type="body" idx="3" sz="quarter"/>
+          </p:nvPr>
+        </p:nvSpPr>
+        <p:spPr/>
+        <p:txBody>
+          <a:bodyPr/>
+          <a:lstStyle/>
+          <a:p>
+            <a:r>
+              <a:t>Показать после попытки учеников.</a:t>
             </a:r>
           </a:p>
           <a:p/>
           <a:p>
             <a:r>
-              <a:t>Урок 1, E1. Объяснить признаки до вопросов. Не называть атом неделимым и не объяснять образование ионов. Не говорить «любая формула обозначает молекулу». SO₄²⁻ нужен только как пример группы атомов с зарядом, его название и свойства не проверяются.</a:t>
+              <a:t>0,25 × 1000 = **250 г**; 600/1000 = **0,6 г**; 1,2 × 1000 = **1200 мг**. Обратная проверка: 1200 мг / 1000 = 1,2 г.</a:t>
+            </a:r>
+          </a:p>
+        </p:txBody>
+      </p:sp>
+      <p:sp>
+        <p:nvSpPr>
+          <p:cNvPr id="4" name="Slide Number Placeholder 3"/>
+          <p:cNvSpPr>
+            <a:spLocks noGrp="1"/>
+          </p:cNvSpPr>
+          <p:nvPr>
+            <p:ph type="sldNum" idx="5" sz="quarter"/>
+          </p:nvPr>
+        </p:nvSpPr>
+        <p:spPr/>
+      </p:sp>
+    </p:spTree>
+  </p:cSld>
+  <p:clrMapOvr>
+    <a:masterClrMapping/>
+  </p:clrMapOvr>
+</p:notes>
+</file>
+
+<file path=ppt/notesSlides/notesSlide22.xml><?xml version="1.0" encoding="utf-8"?>
+<p:notes xmlns:a="http://schemas.openxmlformats.org/drawingml/2006/main" xmlns:p="http://schemas.openxmlformats.org/presentationml/2006/main" xmlns:r="http://schemas.openxmlformats.org/officeDocument/2006/relationships">
+  <p:cSld>
+    <p:spTree>
+      <p:nvGrpSpPr>
+        <p:cNvPr id="1" name=""/>
+        <p:cNvGrpSpPr/>
+        <p:nvPr/>
+      </p:nvGrpSpPr>
+      <p:grpSpPr>
+        <a:xfrm>
+          <a:off x="0" y="0"/>
+          <a:ext cx="0" cy="0"/>
+          <a:chOff x="0" y="0"/>
+          <a:chExt cx="0" cy="0"/>
+        </a:xfrm>
+      </p:grpSpPr>
+      <p:sp>
+        <p:nvSpPr>
+          <p:cNvPr id="2" name="Slide Image Placeholder 1"/>
+          <p:cNvSpPr>
+            <a:spLocks noGrp="1"/>
+          </p:cNvSpPr>
+          <p:nvPr>
+            <p:ph type="sldImg" idx="2"/>
+          </p:nvPr>
+        </p:nvSpPr>
+        <p:spPr/>
+      </p:sp>
+      <p:sp>
+        <p:nvSpPr>
+          <p:cNvPr id="3" name="Notes Placeholder 2"/>
+          <p:cNvSpPr>
+            <a:spLocks noGrp="1"/>
+          </p:cNvSpPr>
+          <p:nvPr>
+            <p:ph type="body" idx="3" sz="quarter"/>
+          </p:nvPr>
+        </p:nvSpPr>
+        <p:spPr/>
+        <p:txBody>
+          <a:bodyPr/>
+          <a:lstStyle/>
+          <a:p>
+            <a:r>
+              <a:t>Урок 1, E6. Все три действия объяснить до практики. Каждый раз подписать «ищем часть/целое/процент». Не вводить вычисление массы по химической формуле: здесь доля выбранной части образца дана или вычисляется из данных условия.</a:t>
             </a:r>
           </a:p>
           <a:p/>
           <a:p>
             <a:r>
-              <a:t>**Раскрытие ответа**</a:t>
+              <a:t>Ответ (следующий слайд):</a:t>
+            </a:r>
+          </a:p>
+          <a:p>
+            <a:r>
+              <a:t>12/80 × 100% = **15%**; проверка 80 × 0,15 = 12 г. Доля 0,15 и процент 15% выражают одну часть разными способами.</a:t>
+            </a:r>
+          </a:p>
+        </p:txBody>
+      </p:sp>
+      <p:sp>
+        <p:nvSpPr>
+          <p:cNvPr id="4" name="Slide Number Placeholder 3"/>
+          <p:cNvSpPr>
+            <a:spLocks noGrp="1"/>
+          </p:cNvSpPr>
+          <p:nvPr>
+            <p:ph type="sldNum" idx="5" sz="quarter"/>
+          </p:nvPr>
+        </p:nvSpPr>
+        <p:spPr/>
+      </p:sp>
+    </p:spTree>
+  </p:cSld>
+  <p:clrMapOvr>
+    <a:masterClrMapping/>
+  </p:clrMapOvr>
+</p:notes>
+</file>
+
+<file path=ppt/notesSlides/notesSlide23.xml><?xml version="1.0" encoding="utf-8"?>
+<p:notes xmlns:a="http://schemas.openxmlformats.org/drawingml/2006/main" xmlns:p="http://schemas.openxmlformats.org/presentationml/2006/main" xmlns:r="http://schemas.openxmlformats.org/officeDocument/2006/relationships">
+  <p:cSld>
+    <p:spTree>
+      <p:nvGrpSpPr>
+        <p:cNvPr id="1" name=""/>
+        <p:cNvGrpSpPr/>
+        <p:nvPr/>
+      </p:nvGrpSpPr>
+      <p:grpSpPr>
+        <a:xfrm>
+          <a:off x="0" y="0"/>
+          <a:ext cx="0" cy="0"/>
+          <a:chOff x="0" y="0"/>
+          <a:chExt cx="0" cy="0"/>
+        </a:xfrm>
+      </p:grpSpPr>
+      <p:sp>
+        <p:nvSpPr>
+          <p:cNvPr id="2" name="Slide Image Placeholder 1"/>
+          <p:cNvSpPr>
+            <a:spLocks noGrp="1"/>
+          </p:cNvSpPr>
+          <p:nvPr>
+            <p:ph type="sldImg" idx="2"/>
+          </p:nvPr>
+        </p:nvSpPr>
+        <p:spPr/>
+      </p:sp>
+      <p:sp>
+        <p:nvSpPr>
+          <p:cNvPr id="3" name="Notes Placeholder 2"/>
+          <p:cNvSpPr>
+            <a:spLocks noGrp="1"/>
+          </p:cNvSpPr>
+          <p:nvPr>
+            <p:ph type="body" idx="3" sz="quarter"/>
+          </p:nvPr>
+        </p:nvSpPr>
+        <p:spPr/>
+        <p:txBody>
+          <a:bodyPr/>
+          <a:lstStyle/>
+          <a:p>
+            <a:r>
+              <a:t>Показать после попытки учеников.</a:t>
             </a:r>
           </a:p>
           <a:p/>
           <a:p>
             <a:r>
-              <a:t>Для устного вопроса «Что отличает H₂O от SO₄²⁻ по типу частицы?» — H₂O нейтральная молекула, SO₄²⁻ заряженный многоатомный ион. Оба содержат несколько атомов.</a:t>
+              <a:t>12/80 × 100% = **15%**; проверка 80 × 0,15 = 12 г. Доля 0,15 и процент 15% выражают одну часть разными способами.</a:t>
+            </a:r>
+          </a:p>
+        </p:txBody>
+      </p:sp>
+      <p:sp>
+        <p:nvSpPr>
+          <p:cNvPr id="4" name="Slide Number Placeholder 3"/>
+          <p:cNvSpPr>
+            <a:spLocks noGrp="1"/>
+          </p:cNvSpPr>
+          <p:nvPr>
+            <p:ph type="sldNum" idx="5" sz="quarter"/>
+          </p:nvPr>
+        </p:nvSpPr>
+        <p:spPr/>
+      </p:sp>
+    </p:spTree>
+  </p:cSld>
+  <p:clrMapOvr>
+    <a:masterClrMapping/>
+  </p:clrMapOvr>
+</p:notes>
+</file>
+
+<file path=ppt/notesSlides/notesSlide24.xml><?xml version="1.0" encoding="utf-8"?>
+<p:notes xmlns:a="http://schemas.openxmlformats.org/drawingml/2006/main" xmlns:p="http://schemas.openxmlformats.org/presentationml/2006/main" xmlns:r="http://schemas.openxmlformats.org/officeDocument/2006/relationships">
+  <p:cSld>
+    <p:spTree>
+      <p:nvGrpSpPr>
+        <p:cNvPr id="1" name=""/>
+        <p:cNvGrpSpPr/>
+        <p:nvPr/>
+      </p:nvGrpSpPr>
+      <p:grpSpPr>
+        <a:xfrm>
+          <a:off x="0" y="0"/>
+          <a:ext cx="0" cy="0"/>
+          <a:chOff x="0" y="0"/>
+          <a:chExt cx="0" cy="0"/>
+        </a:xfrm>
+      </p:grpSpPr>
+      <p:sp>
+        <p:nvSpPr>
+          <p:cNvPr id="2" name="Slide Image Placeholder 1"/>
+          <p:cNvSpPr>
+            <a:spLocks noGrp="1"/>
+          </p:cNvSpPr>
+          <p:nvPr>
+            <p:ph type="sldImg" idx="2"/>
+          </p:nvPr>
+        </p:nvSpPr>
+        <p:spPr/>
+      </p:sp>
+      <p:sp>
+        <p:nvSpPr>
+          <p:cNvPr id="3" name="Notes Placeholder 2"/>
+          <p:cNvSpPr>
+            <a:spLocks noGrp="1"/>
+          </p:cNvSpPr>
+          <p:nvPr>
+            <p:ph type="body" idx="3" sz="quarter"/>
+          </p:nvPr>
+        </p:nvSpPr>
+        <p:spPr/>
+        <p:txBody>
+          <a:bodyPr/>
+          <a:lstStyle/>
+          <a:p>
+            <a:r>
+              <a:t>Урок 1, E6. Различить отношение A к B и долю A от всего: 2/3 и 2/(2 + 3). Для слабой базы нарисовать пять одинаковых прямоугольников, два закрасить одним цветом, три другим. Рисунок лишь показывает равные массовые части.</a:t>
+            </a:r>
+          </a:p>
+          <a:p/>
+          <a:p>
+            <a:r>
+              <a:t>Ответ (следующий слайд):</a:t>
+            </a:r>
+          </a:p>
+          <a:p>
+            <a:r>
+              <a:t>На 4 г A берут 10 г B, значит на 12 г A нужно 30 г B. Для A : B = 3 : 5 и общей массы 320 г: 8 частей, по 40 г; A — 120 г, B — 200 г.</a:t>
+            </a:r>
+          </a:p>
+        </p:txBody>
+      </p:sp>
+      <p:sp>
+        <p:nvSpPr>
+          <p:cNvPr id="4" name="Slide Number Placeholder 3"/>
+          <p:cNvSpPr>
+            <a:spLocks noGrp="1"/>
+          </p:cNvSpPr>
+          <p:nvPr>
+            <p:ph type="sldNum" idx="5" sz="quarter"/>
+          </p:nvPr>
+        </p:nvSpPr>
+        <p:spPr/>
+      </p:sp>
+    </p:spTree>
+  </p:cSld>
+  <p:clrMapOvr>
+    <a:masterClrMapping/>
+  </p:clrMapOvr>
+</p:notes>
+</file>
+
+<file path=ppt/notesSlides/notesSlide25.xml><?xml version="1.0" encoding="utf-8"?>
+<p:notes xmlns:a="http://schemas.openxmlformats.org/drawingml/2006/main" xmlns:p="http://schemas.openxmlformats.org/presentationml/2006/main" xmlns:r="http://schemas.openxmlformats.org/officeDocument/2006/relationships">
+  <p:cSld>
+    <p:spTree>
+      <p:nvGrpSpPr>
+        <p:cNvPr id="1" name=""/>
+        <p:cNvGrpSpPr/>
+        <p:nvPr/>
+      </p:nvGrpSpPr>
+      <p:grpSpPr>
+        <a:xfrm>
+          <a:off x="0" y="0"/>
+          <a:ext cx="0" cy="0"/>
+          <a:chOff x="0" y="0"/>
+          <a:chExt cx="0" cy="0"/>
+        </a:xfrm>
+      </p:grpSpPr>
+      <p:sp>
+        <p:nvSpPr>
+          <p:cNvPr id="2" name="Slide Image Placeholder 1"/>
+          <p:cNvSpPr>
+            <a:spLocks noGrp="1"/>
+          </p:cNvSpPr>
+          <p:nvPr>
+            <p:ph type="sldImg" idx="2"/>
+          </p:nvPr>
+        </p:nvSpPr>
+        <p:spPr/>
+      </p:sp>
+      <p:sp>
+        <p:nvSpPr>
+          <p:cNvPr id="3" name="Notes Placeholder 2"/>
+          <p:cNvSpPr>
+            <a:spLocks noGrp="1"/>
+          </p:cNvSpPr>
+          <p:nvPr>
+            <p:ph type="body" idx="3" sz="quarter"/>
+          </p:nvPr>
+        </p:nvSpPr>
+        <p:spPr/>
+        <p:txBody>
+          <a:bodyPr/>
+          <a:lstStyle/>
+          <a:p>
+            <a:r>
+              <a:t>Показать после попытки учеников.</a:t>
+            </a:r>
+          </a:p>
+          <a:p/>
+          <a:p>
+            <a:r>
+              <a:t>На 4 г A берут 10 г B, значит на 12 г A нужно 30 г B. Для A : B = 3 : 5 и общей массы 320 г: 8 частей, по 40 г; A — 120 г, B — 200 г.</a:t>
+            </a:r>
+          </a:p>
+        </p:txBody>
+      </p:sp>
+      <p:sp>
+        <p:nvSpPr>
+          <p:cNvPr id="4" name="Slide Number Placeholder 3"/>
+          <p:cNvSpPr>
+            <a:spLocks noGrp="1"/>
+          </p:cNvSpPr>
+          <p:nvPr>
+            <p:ph type="sldNum" idx="5" sz="quarter"/>
+          </p:nvPr>
+        </p:nvSpPr>
+        <p:spPr/>
+      </p:sp>
+    </p:spTree>
+  </p:cSld>
+  <p:clrMapOvr>
+    <a:masterClrMapping/>
+  </p:clrMapOvr>
+</p:notes>
+</file>
+
+<file path=ppt/notesSlides/notesSlide26.xml><?xml version="1.0" encoding="utf-8"?>
+<p:notes xmlns:a="http://schemas.openxmlformats.org/drawingml/2006/main" xmlns:p="http://schemas.openxmlformats.org/presentationml/2006/main" xmlns:r="http://schemas.openxmlformats.org/officeDocument/2006/relationships">
+  <p:cSld>
+    <p:spTree>
+      <p:nvGrpSpPr>
+        <p:cNvPr id="1" name=""/>
+        <p:cNvGrpSpPr/>
+        <p:nvPr/>
+      </p:nvGrpSpPr>
+      <p:grpSpPr>
+        <a:xfrm>
+          <a:off x="0" y="0"/>
+          <a:ext cx="0" cy="0"/>
+          <a:chOff x="0" y="0"/>
+          <a:chExt cx="0" cy="0"/>
+        </a:xfrm>
+      </p:grpSpPr>
+      <p:sp>
+        <p:nvSpPr>
+          <p:cNvPr id="2" name="Slide Image Placeholder 1"/>
+          <p:cNvSpPr>
+            <a:spLocks noGrp="1"/>
+          </p:cNvSpPr>
+          <p:nvPr>
+            <p:ph type="sldImg" idx="2"/>
+          </p:nvPr>
+        </p:nvSpPr>
+        <p:spPr/>
+      </p:sp>
+      <p:sp>
+        <p:nvSpPr>
+          <p:cNvPr id="3" name="Notes Placeholder 2"/>
+          <p:cNvSpPr>
+            <a:spLocks noGrp="1"/>
+          </p:cNvSpPr>
+          <p:nvPr>
+            <p:ph type="body" idx="3" sz="quarter"/>
+          </p:nvPr>
+        </p:nvSpPr>
+        <p:spPr/>
+        <p:txBody>
+          <a:bodyPr/>
+          <a:lstStyle/>
+          <a:p>
+            <a:r>
+              <a:t>Урок 1: пункты 1–3 соответствуют P1.1–P1.3 в 53–63 минуты, 4–5 — P1.7–P1.8 в 73–80. Между ними математическая практика P1.4–P1.6, слайды 10–12. Не проводить все пять пунктов одним новым блоком. Самостоятельный ответ принимать до раскрытия ключа.</a:t>
+            </a:r>
+          </a:p>
+          <a:p/>
+          <a:p>
+            <a:r>
+              <a:t>Ответ (следующий слайд):</a:t>
+            </a:r>
+          </a:p>
+          <a:p>
+            <a:r>
+              <a:t>1. H — атом; O₂ — молекула; Na⁺ — ион +1; SO₄²⁻ — ион −2.</a:t>
+            </a:r>
+          </a:p>
+          <a:p>
+            <a:r>
+              <a:t>2. Коэффициент 3; индексы H — 2, O — 1; H — 6, O — 3, всего 9.</a:t>
+            </a:r>
+          </a:p>
+          <a:p>
+            <a:r>
+              <a:t>3. Ca — 2, O — 4, H — 4, всего 10; скобка умножает O и H.</a:t>
+            </a:r>
+          </a:p>
+          <a:p>
+            <a:r>
+              <a:t>4. **C, 4**: 2 × 2. D — число всех атомов, а спрашивают O.</a:t>
+            </a:r>
+          </a:p>
+          <a:p>
+            <a:r>
+              <a:t>5. **B, 15%**: 0,20 кг = 200 г; 30/200 × 100%.</a:t>
+            </a:r>
+          </a:p>
+        </p:txBody>
+      </p:sp>
+      <p:sp>
+        <p:nvSpPr>
+          <p:cNvPr id="4" name="Slide Number Placeholder 3"/>
+          <p:cNvSpPr>
+            <a:spLocks noGrp="1"/>
+          </p:cNvSpPr>
+          <p:nvPr>
+            <p:ph type="sldNum" idx="5" sz="quarter"/>
+          </p:nvPr>
+        </p:nvSpPr>
+        <p:spPr/>
+      </p:sp>
+    </p:spTree>
+  </p:cSld>
+  <p:clrMapOvr>
+    <a:masterClrMapping/>
+  </p:clrMapOvr>
+</p:notes>
+</file>
+
+<file path=ppt/notesSlides/notesSlide27.xml><?xml version="1.0" encoding="utf-8"?>
+<p:notes xmlns:a="http://schemas.openxmlformats.org/drawingml/2006/main" xmlns:p="http://schemas.openxmlformats.org/presentationml/2006/main" xmlns:r="http://schemas.openxmlformats.org/officeDocument/2006/relationships">
+  <p:cSld>
+    <p:spTree>
+      <p:nvGrpSpPr>
+        <p:cNvPr id="1" name=""/>
+        <p:cNvGrpSpPr/>
+        <p:nvPr/>
+      </p:nvGrpSpPr>
+      <p:grpSpPr>
+        <a:xfrm>
+          <a:off x="0" y="0"/>
+          <a:ext cx="0" cy="0"/>
+          <a:chOff x="0" y="0"/>
+          <a:chExt cx="0" cy="0"/>
+        </a:xfrm>
+      </p:grpSpPr>
+      <p:sp>
+        <p:nvSpPr>
+          <p:cNvPr id="2" name="Slide Image Placeholder 1"/>
+          <p:cNvSpPr>
+            <a:spLocks noGrp="1"/>
+          </p:cNvSpPr>
+          <p:nvPr>
+            <p:ph type="sldImg" idx="2"/>
+          </p:nvPr>
+        </p:nvSpPr>
+        <p:spPr/>
+      </p:sp>
+      <p:sp>
+        <p:nvSpPr>
+          <p:cNvPr id="3" name="Notes Placeholder 2"/>
+          <p:cNvSpPr>
+            <a:spLocks noGrp="1"/>
+          </p:cNvSpPr>
+          <p:nvPr>
+            <p:ph type="body" idx="3" sz="quarter"/>
+          </p:nvPr>
+        </p:nvSpPr>
+        <p:spPr/>
+        <p:txBody>
+          <a:bodyPr/>
+          <a:lstStyle/>
+          <a:p>
+            <a:r>
+              <a:t>Показать после попытки учеников.</a:t>
+            </a:r>
+          </a:p>
+          <a:p/>
+          <a:p>
+            <a:r>
+              <a:t>1. H — атом; O₂ — молекула; Na⁺ — ион +1; SO₄²⁻ — ион −2.</a:t>
+            </a:r>
+          </a:p>
+          <a:p>
+            <a:r>
+              <a:t>2. Коэффициент 3; индексы H — 2, O — 1; H — 6, O — 3, всего 9.</a:t>
+            </a:r>
+          </a:p>
+          <a:p>
+            <a:r>
+              <a:t>3. Ca — 2, O — 4, H — 4, всего 10; скобка умножает O и H.</a:t>
+            </a:r>
+          </a:p>
+          <a:p>
+            <a:r>
+              <a:t>4. **C, 4**: 2 × 2. D — число всех атомов, а спрашивают O.</a:t>
+            </a:r>
+          </a:p>
+          <a:p>
+            <a:r>
+              <a:t>5. **B, 15%**: 0,20 кг = 200 г; 30/200 × 100%.</a:t>
+            </a:r>
+          </a:p>
+        </p:txBody>
+      </p:sp>
+      <p:sp>
+        <p:nvSpPr>
+          <p:cNvPr id="4" name="Slide Number Placeholder 3"/>
+          <p:cNvSpPr>
+            <a:spLocks noGrp="1"/>
+          </p:cNvSpPr>
+          <p:nvPr>
+            <p:ph type="sldNum" idx="5" sz="quarter"/>
+          </p:nvPr>
+        </p:nvSpPr>
+        <p:spPr/>
+      </p:sp>
+    </p:spTree>
+  </p:cSld>
+  <p:clrMapOvr>
+    <a:masterClrMapping/>
+  </p:clrMapOvr>
+</p:notes>
+</file>
+
+<file path=ppt/notesSlides/notesSlide28.xml><?xml version="1.0" encoding="utf-8"?>
+<p:notes xmlns:a="http://schemas.openxmlformats.org/drawingml/2006/main" xmlns:p="http://schemas.openxmlformats.org/presentationml/2006/main" xmlns:r="http://schemas.openxmlformats.org/officeDocument/2006/relationships">
+  <p:cSld>
+    <p:spTree>
+      <p:nvGrpSpPr>
+        <p:cNvPr id="1" name=""/>
+        <p:cNvGrpSpPr/>
+        <p:nvPr/>
+      </p:nvGrpSpPr>
+      <p:grpSpPr>
+        <a:xfrm>
+          <a:off x="0" y="0"/>
+          <a:ext cx="0" cy="0"/>
+          <a:chOff x="0" y="0"/>
+          <a:chExt cx="0" cy="0"/>
+        </a:xfrm>
+      </p:grpSpPr>
+      <p:sp>
+        <p:nvSpPr>
+          <p:cNvPr id="2" name="Slide Image Placeholder 1"/>
+          <p:cNvSpPr>
+            <a:spLocks noGrp="1"/>
+          </p:cNvSpPr>
+          <p:nvPr>
+            <p:ph type="sldImg" idx="2"/>
+          </p:nvPr>
+        </p:nvSpPr>
+        <p:spPr/>
+      </p:sp>
+      <p:sp>
+        <p:nvSpPr>
+          <p:cNvPr id="3" name="Notes Placeholder 2"/>
+          <p:cNvSpPr>
+            <a:spLocks noGrp="1"/>
+          </p:cNvSpPr>
+          <p:nvPr>
+            <p:ph type="body" idx="3" sz="quarter"/>
+          </p:nvPr>
+        </p:nvSpPr>
+        <p:spPr/>
+        <p:txBody>
+          <a:bodyPr/>
+          <a:lstStyle/>
+          <a:p>
+            <a:r>
+              <a:t>Урок 1, 80–87: четыре минуты на ответы, три на ключ; X4–X7 с пояснением. 87–90: назначить ДЗ и вернуться к двум исходным вопросам. Не называть результат прогнозом ЕНТ и не выполнять полную диагностику.</a:t>
+            </a:r>
+          </a:p>
+          <a:p/>
+          <a:p>
+            <a:r>
+              <a:t>Ответ (следующий слайд):</a:t>
+            </a:r>
+          </a:p>
+          <a:p>
+            <a:r>
+              <a:t>X1 атом H; X2 молекула O₂; X3 один ион Ca, +2; X4 индекс 2 — атомы H в одной молекуле, коэффициент 3 — три молекулы; X5 300 г; X6 0,45 г; X7 25%. Максимум 7 баллов по плану урока 1.</a:t>
+            </a:r>
+          </a:p>
+        </p:txBody>
+      </p:sp>
+      <p:sp>
+        <p:nvSpPr>
+          <p:cNvPr id="4" name="Slide Number Placeholder 3"/>
+          <p:cNvSpPr>
+            <a:spLocks noGrp="1"/>
+          </p:cNvSpPr>
+          <p:nvPr>
+            <p:ph type="sldNum" idx="5" sz="quarter"/>
+          </p:nvPr>
+        </p:nvSpPr>
+        <p:spPr/>
+      </p:sp>
+    </p:spTree>
+  </p:cSld>
+  <p:clrMapOvr>
+    <a:masterClrMapping/>
+  </p:clrMapOvr>
+</p:notes>
+</file>
+
+<file path=ppt/notesSlides/notesSlide29.xml><?xml version="1.0" encoding="utf-8"?>
+<p:notes xmlns:a="http://schemas.openxmlformats.org/drawingml/2006/main" xmlns:p="http://schemas.openxmlformats.org/presentationml/2006/main" xmlns:r="http://schemas.openxmlformats.org/officeDocument/2006/relationships">
+  <p:cSld>
+    <p:spTree>
+      <p:nvGrpSpPr>
+        <p:cNvPr id="1" name=""/>
+        <p:cNvGrpSpPr/>
+        <p:nvPr/>
+      </p:nvGrpSpPr>
+      <p:grpSpPr>
+        <a:xfrm>
+          <a:off x="0" y="0"/>
+          <a:ext cx="0" cy="0"/>
+          <a:chOff x="0" y="0"/>
+          <a:chExt cx="0" cy="0"/>
+        </a:xfrm>
+      </p:grpSpPr>
+      <p:sp>
+        <p:nvSpPr>
+          <p:cNvPr id="2" name="Slide Image Placeholder 1"/>
+          <p:cNvSpPr>
+            <a:spLocks noGrp="1"/>
+          </p:cNvSpPr>
+          <p:nvPr>
+            <p:ph type="sldImg" idx="2"/>
+          </p:nvPr>
+        </p:nvSpPr>
+        <p:spPr/>
+      </p:sp>
+      <p:sp>
+        <p:nvSpPr>
+          <p:cNvPr id="3" name="Notes Placeholder 2"/>
+          <p:cNvSpPr>
+            <a:spLocks noGrp="1"/>
+          </p:cNvSpPr>
+          <p:nvPr>
+            <p:ph type="body" idx="3" sz="quarter"/>
+          </p:nvPr>
+        </p:nvSpPr>
+        <p:spPr/>
+        <p:txBody>
+          <a:bodyPr/>
+          <a:lstStyle/>
+          <a:p>
+            <a:r>
+              <a:t>Показать после попытки учеников.</a:t>
+            </a:r>
+          </a:p>
+          <a:p/>
+          <a:p>
+            <a:r>
+              <a:t>X1 атом H; X2 молекула O₂; X3 один ион Ca, +2; X4 индекс 2 — атомы H в одной молекуле, коэффициент 3 — три молекулы; X5 300 г; X6 0,45 г; X7 25%. Максимум 7 баллов по плану урока 1.</a:t>
             </a:r>
           </a:p>
         </p:txBody>
@@ -1683,84 +2307,351 @@
           <a:lstStyle/>
           <a:p>
             <a:r>
-              <a:t>**Текст ученику**</a:t>
+              <a:t>Показать после попытки учеников.</a:t>
             </a:r>
           </a:p>
           <a:p/>
           <a:p>
             <a:r>
-              <a:t>Химический элемент — вид атомов. Его символ начинается с заглавной буквы; вторая буква строчная.</a:t>
+              <a:t>Единственного ответа нет. Вопрос считается сформулированным, если ученик назвал конкретную запись или шаг, который не понял.</a:t>
+            </a:r>
+          </a:p>
+        </p:txBody>
+      </p:sp>
+      <p:sp>
+        <p:nvSpPr>
+          <p:cNvPr id="4" name="Slide Number Placeholder 3"/>
+          <p:cNvSpPr>
+            <a:spLocks noGrp="1"/>
+          </p:cNvSpPr>
+          <p:nvPr>
+            <p:ph type="sldNum" idx="5" sz="quarter"/>
+          </p:nvPr>
+        </p:nvSpPr>
+        <p:spPr/>
+      </p:sp>
+    </p:spTree>
+  </p:cSld>
+  <p:clrMapOvr>
+    <a:masterClrMapping/>
+  </p:clrMapOvr>
+</p:notes>
+</file>
+
+<file path=ppt/notesSlides/notesSlide30.xml><?xml version="1.0" encoding="utf-8"?>
+<p:notes xmlns:a="http://schemas.openxmlformats.org/drawingml/2006/main" xmlns:p="http://schemas.openxmlformats.org/presentationml/2006/main" xmlns:r="http://schemas.openxmlformats.org/officeDocument/2006/relationships">
+  <p:cSld>
+    <p:spTree>
+      <p:nvGrpSpPr>
+        <p:cNvPr id="1" name=""/>
+        <p:cNvGrpSpPr/>
+        <p:nvPr/>
+      </p:nvGrpSpPr>
+      <p:grpSpPr>
+        <a:xfrm>
+          <a:off x="0" y="0"/>
+          <a:ext cx="0" cy="0"/>
+          <a:chOff x="0" y="0"/>
+          <a:chExt cx="0" cy="0"/>
+        </a:xfrm>
+      </p:grpSpPr>
+      <p:sp>
+        <p:nvSpPr>
+          <p:cNvPr id="2" name="Slide Image Placeholder 1"/>
+          <p:cNvSpPr>
+            <a:spLocks noGrp="1"/>
+          </p:cNvSpPr>
+          <p:nvPr>
+            <p:ph type="sldImg" idx="2"/>
+          </p:nvPr>
+        </p:nvSpPr>
+        <p:spPr/>
+      </p:sp>
+      <p:sp>
+        <p:nvSpPr>
+          <p:cNvPr id="3" name="Notes Placeholder 2"/>
+          <p:cNvSpPr>
+            <a:spLocks noGrp="1"/>
+          </p:cNvSpPr>
+          <p:nvPr>
+            <p:ph type="body" idx="3" sz="quarter"/>
+          </p:nvPr>
+        </p:nvSpPr>
+        <p:spPr/>
+        <p:txBody>
+          <a:bodyPr/>
+          <a:lstStyle/>
+          <a:p>
+            <a:r>
+              <a:t>Урок 2: 0–4 воспроизведение алгоритма по слайду 9; 4–12 R1; 12–20 R2. 20–35 разбор уже сданного ДЗ, точные условия и ключ G1–G3 в плане 2. Ученик с ошибкой объясняет новый ход, а не только копирует число. Все определения уже вводились на уроке 1.</a:t>
             </a:r>
           </a:p>
           <a:p/>
           <a:p>
             <a:r>
-              <a:t>| Символ | Элемент | Символ | Элемент |</a:t>
-            </a:r>
-          </a:p>
-          <a:p>
-            <a:r>
-              <a:t>|---|---|---|---|</a:t>
-            </a:r>
-          </a:p>
-          <a:p>
-            <a:r>
-              <a:t>| H | водород | He | гелий |</a:t>
-            </a:r>
-          </a:p>
-          <a:p>
-            <a:r>
-              <a:t>| O | кислород | N | азот |</a:t>
-            </a:r>
-          </a:p>
-          <a:p>
-            <a:r>
-              <a:t>| C | углерод | S | сера |</a:t>
-            </a:r>
-          </a:p>
-          <a:p>
-            <a:r>
-              <a:t>| Na | натрий | Cl | хлор |</a:t>
-            </a:r>
-          </a:p>
-          <a:p>
-            <a:r>
-              <a:t>| Ca | кальций | Mg | магний |</a:t>
-            </a:r>
-          </a:p>
-          <a:p>
-            <a:r>
-              <a:t>| Al | алюминий | | |</a:t>
+              <a:t>Ответ (следующий слайд):</a:t>
+            </a:r>
+          </a:p>
+          <a:p>
+            <a:r>
+              <a:t>R1: H₂O — одна молекула, H — 2, O — 1; CO₂ — одна молекула, C — 1, O — 2; Na⁺ — один ион Na, +1; Ca²⁺ — один ион Ca, +2; 3H₂O — три молекулы, H — 6, O — 3; NaCl — одна формульная единица, Na : Cl = 1 : 1.</a:t>
             </a:r>
           </a:p>
           <a:p/>
           <a:p>
             <a:r>
-              <a:t>В отдельной записи **H** — один атом водорода; в **H₂O** символ H указывает элемент в составе воды. **Cl** — один символ. **CO₂** содержит символы C и O.</a:t>
+              <a:t>R2: 120 г; 0,075 г; 10 г; 18 г B. Для последнего пункта множитель 9/3 = 3.</a:t>
             </a:r>
           </a:p>
           <a:p/>
           <a:p>
             <a:r>
-              <a:t>**Заметки преподавателю**</a:t>
+              <a:t>Ключ ДЗ для заметок: G1 He — атом, N₂ — молекула, Na⁺ — ион +1, O²⁻ — ион −2; G2 4NH₃: коэффициент 4; в одной молекуле N — 1, H — 3; во всех N — 4, H — 12, всего 16; G3 32 г, 0,48 г, 2500 мг, 0,6 г &gt; 550 мг.</a:t>
+            </a:r>
+          </a:p>
+        </p:txBody>
+      </p:sp>
+      <p:sp>
+        <p:nvSpPr>
+          <p:cNvPr id="4" name="Slide Number Placeholder 3"/>
+          <p:cNvSpPr>
+            <a:spLocks noGrp="1"/>
+          </p:cNvSpPr>
+          <p:nvPr>
+            <p:ph type="sldNum" idx="5" sz="quarter"/>
+          </p:nvPr>
+        </p:nvSpPr>
+        <p:spPr/>
+      </p:sp>
+    </p:spTree>
+  </p:cSld>
+  <p:clrMapOvr>
+    <a:masterClrMapping/>
+  </p:clrMapOvr>
+</p:notes>
+</file>
+
+<file path=ppt/notesSlides/notesSlide31.xml><?xml version="1.0" encoding="utf-8"?>
+<p:notes xmlns:a="http://schemas.openxmlformats.org/drawingml/2006/main" xmlns:p="http://schemas.openxmlformats.org/presentationml/2006/main" xmlns:r="http://schemas.openxmlformats.org/officeDocument/2006/relationships">
+  <p:cSld>
+    <p:spTree>
+      <p:nvGrpSpPr>
+        <p:cNvPr id="1" name=""/>
+        <p:cNvGrpSpPr/>
+        <p:nvPr/>
+      </p:nvGrpSpPr>
+      <p:grpSpPr>
+        <a:xfrm>
+          <a:off x="0" y="0"/>
+          <a:ext cx="0" cy="0"/>
+          <a:chOff x="0" y="0"/>
+          <a:chExt cx="0" cy="0"/>
+        </a:xfrm>
+      </p:grpSpPr>
+      <p:sp>
+        <p:nvSpPr>
+          <p:cNvPr id="2" name="Slide Image Placeholder 1"/>
+          <p:cNvSpPr>
+            <a:spLocks noGrp="1"/>
+          </p:cNvSpPr>
+          <p:nvPr>
+            <p:ph type="sldImg" idx="2"/>
+          </p:nvPr>
+        </p:nvSpPr>
+        <p:spPr/>
+      </p:sp>
+      <p:sp>
+        <p:nvSpPr>
+          <p:cNvPr id="3" name="Notes Placeholder 2"/>
+          <p:cNvSpPr>
+            <a:spLocks noGrp="1"/>
+          </p:cNvSpPr>
+          <p:nvPr>
+            <p:ph type="body" idx="3" sz="quarter"/>
+          </p:nvPr>
+        </p:nvSpPr>
+        <p:spPr/>
+        <p:txBody>
+          <a:bodyPr/>
+          <a:lstStyle/>
+          <a:p>
+            <a:r>
+              <a:t>Показать после попытки учеников.</a:t>
             </a:r>
           </a:p>
           <a:p/>
           <a:p>
             <a:r>
-              <a:t>Урок 1, E1–E2. Таблица — справка. Показать границу символа пальцем или рамкой. Не требовать заучивания всех названий как отдельной цели недели. Латинскую O не заменять цифрой 0.</a:t>
+              <a:t>R1: H₂O — одна молекула, H — 2, O — 1; CO₂ — одна молекула, C — 1, O — 2; Na⁺ — один ион Na, +1; Ca²⁺ — один ион Ca, +2; 3H₂O — три молекулы, H — 6, O — 3; NaCl — одна формульная единица, Na : Cl = 1 : 1.</a:t>
             </a:r>
           </a:p>
           <a:p/>
           <a:p>
             <a:r>
-              <a:t>**Раскрытие ответа**</a:t>
+              <a:t>R2: 120 г; 0,075 г; 10 г; 18 г B. Для последнего пункта множитель 9/3 = 3.</a:t>
             </a:r>
           </a:p>
           <a:p/>
           <a:p>
             <a:r>
-              <a:t>Если спрашиваем «Сколько разных элементов в NaCl и CO₂?»: по два — Na/Cl и C/O. Это не количество атомов.</a:t>
+              <a:t>Ключ ДЗ для заметок: G1 He — атом, N₂ — молекула, Na⁺ — ион +1, O²⁻ — ион −2; G2 4NH₃: коэффициент 4; в одной молекуле N — 1, H — 3; во всех N — 4, H — 12, всего 16; G3 32 г, 0,48 г, 2500 мг, 0,6 г &gt; 550 мг.</a:t>
+            </a:r>
+          </a:p>
+        </p:txBody>
+      </p:sp>
+      <p:sp>
+        <p:nvSpPr>
+          <p:cNvPr id="4" name="Slide Number Placeholder 3"/>
+          <p:cNvSpPr>
+            <a:spLocks noGrp="1"/>
+          </p:cNvSpPr>
+          <p:nvPr>
+            <p:ph type="sldNum" idx="5" sz="quarter"/>
+          </p:nvPr>
+        </p:nvSpPr>
+        <p:spPr/>
+      </p:sp>
+    </p:spTree>
+  </p:cSld>
+  <p:clrMapOvr>
+    <a:masterClrMapping/>
+  </p:clrMapOvr>
+</p:notes>
+</file>
+
+<file path=ppt/notesSlides/notesSlide32.xml><?xml version="1.0" encoding="utf-8"?>
+<p:notes xmlns:a="http://schemas.openxmlformats.org/drawingml/2006/main" xmlns:p="http://schemas.openxmlformats.org/presentationml/2006/main" xmlns:r="http://schemas.openxmlformats.org/officeDocument/2006/relationships">
+  <p:cSld>
+    <p:spTree>
+      <p:nvGrpSpPr>
+        <p:cNvPr id="1" name=""/>
+        <p:cNvGrpSpPr/>
+        <p:nvPr/>
+      </p:nvGrpSpPr>
+      <p:grpSpPr>
+        <a:xfrm>
+          <a:off x="0" y="0"/>
+          <a:ext cx="0" cy="0"/>
+          <a:chOff x="0" y="0"/>
+          <a:chExt cx="0" cy="0"/>
+        </a:xfrm>
+      </p:grpSpPr>
+      <p:sp>
+        <p:nvSpPr>
+          <p:cNvPr id="2" name="Slide Image Placeholder 1"/>
+          <p:cNvSpPr>
+            <a:spLocks noGrp="1"/>
+          </p:cNvSpPr>
+          <p:nvPr>
+            <p:ph type="sldImg" idx="2"/>
+          </p:nvPr>
+        </p:nvSpPr>
+        <p:spPr/>
+      </p:sp>
+      <p:sp>
+        <p:nvSpPr>
+          <p:cNvPr id="3" name="Notes Placeholder 2"/>
+          <p:cNvSpPr>
+            <a:spLocks noGrp="1"/>
+          </p:cNvSpPr>
+          <p:nvPr>
+            <p:ph type="body" idx="3" sz="quarter"/>
+          </p:nvPr>
+        </p:nvSpPr>
+        <p:spPr/>
+        <p:txBody>
+          <a:bodyPr/>
+          <a:lstStyle/>
+          <a:p>
+            <a:r>
+              <a:t>Урок 2, 35–65: совместные P2.1–P2.6 по полным условиям плана 2, на доске используем опоры слайдов 5–12; самостоятельная попытка P2.7–P2.8 — 65–78. 78–88 — quiz, 88–90 — назвать шаг проверки и назначить работу. Не прибавлять отдельные минуты на домашку или контроль. A — углубление, B — закрепление, C — поддержка, один вариант на ученика.</a:t>
+            </a:r>
+          </a:p>
+          <a:p/>
+          <a:p>
+            <a:r>
+              <a:t>Ответ (следующий слайд):</a:t>
+            </a:r>
+          </a:p>
+          <a:p>
+            <a:r>
+              <a:t>P2.7 — **D**: 3 × 4 = 12; A — 6, B — 4, C — 4 атома O. P2.8 — нужны одинаковые единицы: 0,50 кг = 500 г; 25/500 × 100% = **5%**; обратная проверка 500 × 0,05 = 25 г. Ключ Q1–Q6 раскрывать только после сдачи, из преподавательского раздела quiz.md.</a:t>
+            </a:r>
+          </a:p>
+        </p:txBody>
+      </p:sp>
+      <p:sp>
+        <p:nvSpPr>
+          <p:cNvPr id="4" name="Slide Number Placeholder 3"/>
+          <p:cNvSpPr>
+            <a:spLocks noGrp="1"/>
+          </p:cNvSpPr>
+          <p:nvPr>
+            <p:ph type="sldNum" idx="5" sz="quarter"/>
+          </p:nvPr>
+        </p:nvSpPr>
+        <p:spPr/>
+      </p:sp>
+    </p:spTree>
+  </p:cSld>
+  <p:clrMapOvr>
+    <a:masterClrMapping/>
+  </p:clrMapOvr>
+</p:notes>
+</file>
+
+<file path=ppt/notesSlides/notesSlide33.xml><?xml version="1.0" encoding="utf-8"?>
+<p:notes xmlns:a="http://schemas.openxmlformats.org/drawingml/2006/main" xmlns:p="http://schemas.openxmlformats.org/presentationml/2006/main" xmlns:r="http://schemas.openxmlformats.org/officeDocument/2006/relationships">
+  <p:cSld>
+    <p:spTree>
+      <p:nvGrpSpPr>
+        <p:cNvPr id="1" name=""/>
+        <p:cNvGrpSpPr/>
+        <p:nvPr/>
+      </p:nvGrpSpPr>
+      <p:grpSpPr>
+        <a:xfrm>
+          <a:off x="0" y="0"/>
+          <a:ext cx="0" cy="0"/>
+          <a:chOff x="0" y="0"/>
+          <a:chExt cx="0" cy="0"/>
+        </a:xfrm>
+      </p:grpSpPr>
+      <p:sp>
+        <p:nvSpPr>
+          <p:cNvPr id="2" name="Slide Image Placeholder 1"/>
+          <p:cNvSpPr>
+            <a:spLocks noGrp="1"/>
+          </p:cNvSpPr>
+          <p:nvPr>
+            <p:ph type="sldImg" idx="2"/>
+          </p:nvPr>
+        </p:nvSpPr>
+        <p:spPr/>
+      </p:sp>
+      <p:sp>
+        <p:nvSpPr>
+          <p:cNvPr id="3" name="Notes Placeholder 2"/>
+          <p:cNvSpPr>
+            <a:spLocks noGrp="1"/>
+          </p:cNvSpPr>
+          <p:nvPr>
+            <p:ph type="body" idx="3" sz="quarter"/>
+          </p:nvPr>
+        </p:nvSpPr>
+        <p:spPr/>
+        <p:txBody>
+          <a:bodyPr/>
+          <a:lstStyle/>
+          <a:p>
+            <a:r>
+              <a:t>Показать после попытки учеников.</a:t>
+            </a:r>
+          </a:p>
+          <a:p/>
+          <a:p>
+            <a:r>
+              <a:t>P2.7 — **D**: 3 × 4 = 12; A — 6, B — 4, C — 4 атома O. P2.8 — нужны одинаковые единицы: 0,50 кг = 500 г; 25/500 × 100% = **5%**; обратная проверка 500 × 0,05 = 25 г. Ключ Q1–Q6 раскрывать только после сдачи, из преподавательского раздела quiz.md.</a:t>
             </a:r>
           </a:p>
         </p:txBody>
@@ -1830,64 +2721,18 @@
           <a:lstStyle/>
           <a:p>
             <a:r>
-              <a:t>**Текст ученику**</a:t>
+              <a:t>Урок 1, E1. Объяснить признаки до вопросов. Не называть атом неделимым и не объяснять образование ионов. Не говорить «любая формула обозначает молекулу». SO₄²⁻ нужен только как пример группы атомов с зарядом, его название и свойства не проверяются.</a:t>
             </a:r>
           </a:p>
           <a:p/>
           <a:p>
             <a:r>
-              <a:t>**H₂O**</a:t>
-            </a:r>
-          </a:p>
-          <a:p/>
-          <a:p>
-            <a:r>
-              <a:t>- ₂ справа снизу после H — индекс: 2 атома H.</a:t>
-            </a:r>
-          </a:p>
-          <a:p>
-            <a:r>
-              <a:t>- После O цифры нет: индекс равен 1, значит 1 атом O.</a:t>
-            </a:r>
-          </a:p>
-          <a:p>
-            <a:r>
-              <a:t>- В одной молекуле: 2 + 1 = 3 атома.</a:t>
-            </a:r>
-          </a:p>
-          <a:p>
-            <a:r>
-              <a:t>- Индекс относится к символу перед ним.</a:t>
-            </a:r>
-          </a:p>
-          <a:p/>
-          <a:p>
-            <a:r>
-              <a:t>**H₂O** и **H₂O₂** — разные составы. Формулу сохраняем как дана.</a:t>
-            </a:r>
-          </a:p>
-          <a:p/>
-          <a:p>
-            <a:r>
-              <a:t>**Заметки преподавателю**</a:t>
-            </a:r>
-          </a:p>
-          <a:p/>
-          <a:p>
-            <a:r>
-              <a:t>Урок 1, E2. Сначала объяснить один индекс, затем отсутствие единицы. Отличить «два элемента» от «три атома». Не обсуждать, почему формула вещества именно такая: формулы здесь исходные данные.</a:t>
-            </a:r>
-          </a:p>
-          <a:p/>
-          <a:p>
-            <a:r>
-              <a:t>**Раскрытие ответа**</a:t>
-            </a:r>
-          </a:p>
-          <a:p/>
-          <a:p>
-            <a:r>
-              <a:t>В CO₂: C — 1, O — 2, всего 3 атома в одной молекуле. В H₂O₂: H — 2, O — 2, всего 4 атома.</a:t>
+              <a:t>Ответ (следующий слайд):</a:t>
+            </a:r>
+          </a:p>
+          <a:p>
+            <a:r>
+              <a:t>Для устного вопроса «Что отличает H₂O от SO₄²⁻ по типу частицы?» — H₂O нейтральная молекула, SO₄²⁻ заряженный многоатомный ион. Оба содержат несколько атомов.</a:t>
             </a:r>
           </a:p>
         </p:txBody>
@@ -1957,81 +2802,13 @@
           <a:lstStyle/>
           <a:p>
             <a:r>
-              <a:t>**Текст ученику**</a:t>
+              <a:t>Показать после попытки учеников.</a:t>
             </a:r>
           </a:p>
           <a:p/>
           <a:p>
             <a:r>
-              <a:t>**3H₂O** — три молекулы воды.</a:t>
-            </a:r>
-          </a:p>
-          <a:p/>
-          <a:p>
-            <a:r>
-              <a:t>| Элемент | В одной молекуле | В трёх молекулах |</a:t>
-            </a:r>
-          </a:p>
-          <a:p>
-            <a:r>
-              <a:t>|---|---:|---:|</a:t>
-            </a:r>
-          </a:p>
-          <a:p>
-            <a:r>
-              <a:t>| H | 2 | 3 × 2 = 6 |</a:t>
-            </a:r>
-          </a:p>
-          <a:p>
-            <a:r>
-              <a:t>| O | 1 | 3 × 1 = 3 |</a:t>
-            </a:r>
-          </a:p>
-          <a:p>
-            <a:r>
-              <a:t>| Всего | 3 | 9 |</a:t>
-            </a:r>
-          </a:p>
-          <a:p/>
-          <a:p>
-            <a:r>
-              <a:t>3 перед формулой — коэффициент. Если его нет, коэффициент равен 1. Коэффициент умножает количество каждого элемента.</a:t>
-            </a:r>
-          </a:p>
-          <a:p/>
-          <a:p>
-            <a:r>
-              <a:t>Вопрос: сколько атомов O в **2CO₂**?</a:t>
-            </a:r>
-          </a:p>
-          <a:p/>
-          <a:p>
-            <a:r>
-              <a:t>**Заметки преподавателю**</a:t>
-            </a:r>
-          </a:p>
-          <a:p/>
-          <a:p>
-            <a:r>
-              <a:t>Урок 1, E2. Дать заполненную модель 3H₂O, затем показать маленький устный вопрос как проверку объяснения. Основная самостоятельная практика — после полного блока теории.</a:t>
-            </a:r>
-          </a:p>
-          <a:p/>
-          <a:p>
-            <a:r>
-              <a:t>**Раскрытие ответа**</a:t>
-            </a:r>
-          </a:p>
-          <a:p/>
-          <a:p>
-            <a:r>
-              <a:t>В 2CO₂: C — 2 × 1 = 2; O — 2 × 2 = **4**; всего 6. Число 4 относится только к O, а 6 — ко всем атомам.</a:t>
-            </a:r>
-          </a:p>
-          <a:p/>
-          <a:p>
-            <a:r>
-              <a:t>Обратный шаг: если в молекулах H₂O всего 6 атомов H, коэффициент 6/2 = 3. Проверка по O: 3 × 1 = 3. Индексы готовой формулы сохраняются.</a:t>
+              <a:t>Для устного вопроса «Что отличает H₂O от SO₄²⁻ по типу частицы?» — H₂O нейтральная молекула, SO₄²⁻ заряженный многоатомный ион. Оба содержат несколько атомов.</a:t>
             </a:r>
           </a:p>
         </p:txBody>
@@ -2101,74 +2878,18 @@
           <a:lstStyle/>
           <a:p>
             <a:r>
-              <a:t>**Текст ученику**</a:t>
+              <a:t>Урок 1, E1–E2. Таблица — справка. Показать границу символа пальцем или рамкой. Не требовать заучивания всех названий как отдельной цели недели. Латинскую O не заменять цифрой 0.</a:t>
             </a:r>
           </a:p>
           <a:p/>
           <a:p>
             <a:r>
-              <a:t>В **Ca(OH)₂** индекс ₂ после скобок относится ко всему **OH**.</a:t>
-            </a:r>
-          </a:p>
-          <a:p/>
-          <a:p>
-            <a:r>
-              <a:t>| Элемент | В Ca(OH)₂ | В 2Ca(OH)₂ |</a:t>
-            </a:r>
-          </a:p>
-          <a:p>
-            <a:r>
-              <a:t>|---|---:|---:|</a:t>
-            </a:r>
-          </a:p>
-          <a:p>
-            <a:r>
-              <a:t>| Ca | 1 | 2 |</a:t>
-            </a:r>
-          </a:p>
-          <a:p>
-            <a:r>
-              <a:t>| O | 1 × 2 = 2 | 4 |</a:t>
-            </a:r>
-          </a:p>
-          <a:p>
-            <a:r>
-              <a:t>| H | 1 × 2 = 2 | 4 |</a:t>
-            </a:r>
-          </a:p>
-          <a:p>
-            <a:r>
-              <a:t>| Всего | 5 | 10 |</a:t>
-            </a:r>
-          </a:p>
-          <a:p/>
-          <a:p>
-            <a:r>
-              <a:t>Порядок: индексы внутри → индекс после скобок → коэффициент перед формулой. Здесь считаем состав формульных единиц.</a:t>
-            </a:r>
-          </a:p>
-          <a:p/>
-          <a:p>
-            <a:r>
-              <a:t>**Заметки преподавателю**</a:t>
-            </a:r>
-          </a:p>
-          <a:p/>
-          <a:p>
-            <a:r>
-              <a:t>Урок 1, E3. Сначала рамкой выделить (OH), затем показать стрелки множителя к O и H. Скобка не умножает Ca. Написать полную таблицу, а не только итог 10. Примеры с большей группой используют этот же алгоритм.</a:t>
-            </a:r>
-          </a:p>
-          <a:p/>
-          <a:p>
-            <a:r>
-              <a:t>**Раскрытие ответа**</a:t>
-            </a:r>
-          </a:p>
-          <a:p/>
-          <a:p>
-            <a:r>
-              <a:t>Для переноса алгоритма: в Al₂(SO₄)₃ одна формульная единица содержит Al — 2, S — 3, O — 12. Число 3 после скобки умножает S и O; оно не меняет Al.</a:t>
+              <a:t>Ответ (следующий слайд):</a:t>
+            </a:r>
+          </a:p>
+          <a:p>
+            <a:r>
+              <a:t>Если спрашиваем «Сколько разных элементов в NaCl и CO₂?»: по два — Na/Cl и C/O. Это не количество атомов.</a:t>
             </a:r>
           </a:p>
         </p:txBody>
@@ -2238,80 +2959,13 @@
           <a:lstStyle/>
           <a:p>
             <a:r>
-              <a:t>**Текст ученику**</a:t>
+              <a:t>Показать после попытки учеников.</a:t>
             </a:r>
           </a:p>
           <a:p/>
           <a:p>
             <a:r>
-              <a:t>Заряд стоит **справа сверху**, после величины записан знак.</a:t>
-            </a:r>
-          </a:p>
-          <a:p/>
-          <a:p>
-            <a:r>
-              <a:t>| Запись | Что представлено | Заряд одного иона |</a:t>
-            </a:r>
-          </a:p>
-          <a:p>
-            <a:r>
-              <a:t>|---|---|---:|</a:t>
-            </a:r>
-          </a:p>
-          <a:p>
-            <a:r>
-              <a:t>| Na⁺ | один ион Na | +1 |</a:t>
-            </a:r>
-          </a:p>
-          <a:p>
-            <a:r>
-              <a:t>| Ca²⁺ | один ион Ca | +2 |</a:t>
-            </a:r>
-          </a:p>
-          <a:p>
-            <a:r>
-              <a:t>| Cl⁻ | один ион Cl | −1 |</a:t>
-            </a:r>
-          </a:p>
-          <a:p>
-            <a:r>
-              <a:t>| SO₄²⁻ | один ион: 1 S и 4 O | −2 |</a:t>
-            </a:r>
-          </a:p>
-          <a:p/>
-          <a:p>
-            <a:r>
-              <a:t>В **3SO₄²⁻** — три иона; заряд каждого −2. ₄ — индекс O, ²⁻ — заряд всей группы SO₄.</a:t>
-            </a:r>
-          </a:p>
-          <a:p/>
-          <a:p>
-            <a:r>
-              <a:t>Для условной группы «два Na⁺ и один Cl⁻» найдите число ионов и суммарный заряд.</a:t>
-            </a:r>
-          </a:p>
-          <a:p/>
-          <a:p>
-            <a:r>
-              <a:t>**Заметки преподавателю**</a:t>
-            </a:r>
-          </a:p>
-          <a:p/>
-          <a:p>
-            <a:r>
-              <a:t>Урок 1, E4. Единицу в записи Na⁺ обычно опускают. Суммарный заряд — простое сложение зарядов перечисленных ионов, в единицах элементарного заряда. Не выводить формулу вещества из этой условной группы. Не вводить механизм образования иона.</a:t>
-            </a:r>
-          </a:p>
-          <a:p/>
-          <a:p>
-            <a:r>
-              <a:t>**Раскрытие ответа**</a:t>
-            </a:r>
-          </a:p>
-          <a:p/>
-          <a:p>
-            <a:r>
-              <a:t>Два Na⁺ и один Cl⁻: 3 иона; суммарный заряд 2 × (+1) + 1 × (−1) = **+1**. В 3SO₄²⁻: S — 3, O — 12; суммарный заряд трёх ионов −6, но заряд каждого −2.</a:t>
+              <a:t>Если спрашиваем «Сколько разных элементов в NaCl и CO₂?»: по два — Na/Cl и C/O. Это не количество атомов.</a:t>
             </a:r>
           </a:p>
         </p:txBody>
@@ -2381,64 +3035,18 @@
           <a:lstStyle/>
           <a:p>
             <a:r>
-              <a:t>**Текст ученику**</a:t>
+              <a:t>Урок 1, E2. Сначала объяснить один индекс, затем отсутствие единицы. Отличить «два элемента» от «три атома». Не обсуждать, почему формула вещества именно такая: формулы здесь исходные данные.</a:t>
             </a:r>
           </a:p>
           <a:p/>
           <a:p>
             <a:r>
-              <a:t>Не у всех веществ есть отдельные молекулы.</a:t>
-            </a:r>
-          </a:p>
-          <a:p/>
-          <a:p>
-            <a:r>
-              <a:t>- **NaCl** показывает соотношение Na : Cl = 1 : 1.</a:t>
-            </a:r>
-          </a:p>
-          <a:p>
-            <a:r>
-              <a:t>- Одна формульная единица NaCl содержит в записи один ион Na⁺ и один Cl⁻.</a:t>
-            </a:r>
-          </a:p>
-          <a:p>
-            <a:r>
-              <a:t>- **2NaCl** — две формульные единицы: по два иона каждого вида.</a:t>
-            </a:r>
-          </a:p>
-          <a:p>
-            <a:r>
-              <a:t>- Формула NaCl в целом нейтральна.</a:t>
-            </a:r>
-          </a:p>
-          <a:p/>
-          <a:p>
-            <a:r>
-              <a:t>На этой неделе готовые формулы читаем, правила их составления не изучаем.</a:t>
-            </a:r>
-          </a:p>
-          <a:p/>
-          <a:p>
-            <a:r>
-              <a:t>**Заметки преподавателю**</a:t>
-            </a:r>
-          </a:p>
-          <a:p/>
-          <a:p>
-            <a:r>
-              <a:t>Урок 1, E4. Не рисовать отдельные «молекулы соли». Для объяснения достаточно сказать, что формула передаёт соотношение частиц. Типы устройства веществ и их свойства — темы дальнейших недель. В задачах «сколько атомов элемента в записи» можно считать представленное количество Na и Cl, но название единицы должно оставаться верным.</a:t>
-            </a:r>
-          </a:p>
-          <a:p/>
-          <a:p>
-            <a:r>
-              <a:t>**Раскрытие ответа**</a:t>
-            </a:r>
-          </a:p>
-          <a:p/>
-          <a:p>
-            <a:r>
-              <a:t>В 3NaCl представлены Na — 3 и Cl — 3; всего 6 одноатомных ионов. Три формульные единицы, а не три молекулы.</a:t>
+              <a:t>Ответ (следующий слайд):</a:t>
+            </a:r>
+          </a:p>
+          <a:p>
+            <a:r>
+              <a:t>В CO₂: C — 1, O — 2, всего 3 атома в одной молекуле. В H₂O₂: H — 2, O — 2, всего 4 атома.</a:t>
             </a:r>
           </a:p>
         </p:txBody>
@@ -2508,63 +3116,13 @@
           <a:lstStyle/>
           <a:p>
             <a:r>
-              <a:t>**Текст ученику**</a:t>
+              <a:t>Показать после попытки учеников.</a:t>
             </a:r>
           </a:p>
           <a:p/>
           <a:p>
             <a:r>
-              <a:t>1. Найди символы элементов.</a:t>
-            </a:r>
-          </a:p>
-          <a:p>
-            <a:r>
-              <a:t>2. Учти индексы после символов; отсутствующий индекс — 1.</a:t>
-            </a:r>
-          </a:p>
-          <a:p>
-            <a:r>
-              <a:t>3. Умножь состав скобок на индекс после скобок.</a:t>
-            </a:r>
-          </a:p>
-          <a:p>
-            <a:r>
-              <a:t>4. Умножь весь состав на коэффициент; отсутствующий — 1.</a:t>
-            </a:r>
-          </a:p>
-          <a:p>
-            <a:r>
-              <a:t>5. Прочитай заряд отдельно. Он не множитель для числа атомов.</a:t>
-            </a:r>
-          </a:p>
-          <a:p/>
-          <a:p>
-            <a:r>
-              <a:t>Проверка ловушек: **3H₂O**, **Ca²⁺**, **2Ca(OH)₂**. У какого числа какая роль?</a:t>
-            </a:r>
-          </a:p>
-          <a:p/>
-          <a:p>
-            <a:r>
-              <a:t>**Заметки преподавателю**</a:t>
-            </a:r>
-          </a:p>
-          <a:p/>
-          <a:p>
-            <a:r>
-              <a:t>Урок 1: закончить объяснение химической записи перед математикой. Слайд остаётся опорой на практике, затем используется для повторения урока 2. В первой попытке ученик проговаривает шаг; после освоения опору закрыть.</a:t>
-            </a:r>
-          </a:p>
-          <a:p/>
-          <a:p>
-            <a:r>
-              <a:t>**Раскрытие ответа**</a:t>
-            </a:r>
-          </a:p>
-          <a:p/>
-          <a:p>
-            <a:r>
-              <a:t>3H₂O: 3 — коэффициент, ₂ — индекс H. Ca²⁺: ²⁺ — заряд одного иона. 2Ca(OH)₂: первая 2 — коэффициент, последняя ₂ — множитель O и H внутри скобок. Заряд и индекс не меняем местами.</a:t>
+              <a:t>В CO₂: C — 1, O — 2, всего 3 атома в одной молекуле. В H₂O₂: H — 2, O — 2, всего 4 атома.</a:t>
             </a:r>
           </a:p>
         </p:txBody>
@@ -5563,14 +6121,6 @@
 <file path=ppt/slides/slide1.xml><?xml version="1.0" encoding="utf-8"?>
 <p:sld xmlns:a="http://schemas.openxmlformats.org/drawingml/2006/main" xmlns:p="http://schemas.openxmlformats.org/presentationml/2006/main" xmlns:r="http://schemas.openxmlformats.org/officeDocument/2006/relationships">
   <p:cSld>
-    <p:bg>
-      <p:bgPr>
-        <a:solidFill>
-          <a:srgbClr val="F8FAFC"/>
-        </a:solidFill>
-        <a:effectLst/>
-      </p:bgPr>
-    </p:bg>
     <p:spTree>
       <p:nvGrpSpPr>
         <p:cNvPr id="1" name=""/>
@@ -5578,175 +6128,30 @@
         <p:nvPr/>
       </p:nvGrpSpPr>
       <p:grpSpPr/>
-      <p:sp>
-        <p:nvSpPr>
-          <p:cNvPr id="2" name="TextBox 1"/>
-          <p:cNvSpPr txBox="1"/>
+      <p:pic>
+        <p:nvPicPr>
+          <p:cNvPr id="2" name="Picture 1" descr="s01.png"/>
+          <p:cNvPicPr>
+            <a:picLocks noChangeAspect="1"/>
+          </p:cNvPicPr>
           <p:nvPr/>
-        </p:nvSpPr>
+        </p:nvPicPr>
+        <p:blipFill>
+          <a:blip r:embed="rId2"/>
+          <a:stretch>
+            <a:fillRect/>
+          </a:stretch>
+        </p:blipFill>
         <p:spPr>
           <a:xfrm>
-            <a:off x="640080" y="365760"/>
-            <a:ext cx="10972800" cy="822960"/>
+            <a:off x="0" y="0"/>
+            <a:ext cx="12191695" cy="6858000"/>
           </a:xfrm>
           <a:prstGeom prst="rect">
             <a:avLst/>
           </a:prstGeom>
-          <a:noFill/>
         </p:spPr>
-        <p:txBody>
-          <a:bodyPr wrap="none">
-            <a:spAutoFit/>
-          </a:bodyPr>
-          <a:lstStyle/>
-          <a:p>
-            <a:pPr>
-              <a:defRPr sz="2800" b="1">
-                <a:solidFill>
-                  <a:srgbClr val="0F172A"/>
-                </a:solidFill>
-              </a:defRPr>
-            </a:pPr>
-            <a:r>
-              <a:t>Слайд 1. Что научимся читать</a:t>
-            </a:r>
-          </a:p>
-        </p:txBody>
-      </p:sp>
-      <p:sp>
-        <p:nvSpPr>
-          <p:cNvPr id="3" name="TextBox 2"/>
-          <p:cNvSpPr txBox="1"/>
-          <p:nvPr/>
-        </p:nvSpPr>
-        <p:spPr>
-          <a:xfrm>
-            <a:off x="731520" y="1417320"/>
-            <a:ext cx="10789920" cy="4709160"/>
-          </a:xfrm>
-          <a:prstGeom prst="rect">
-            <a:avLst/>
-          </a:prstGeom>
-          <a:noFill/>
-        </p:spPr>
-        <p:txBody>
-          <a:bodyPr wrap="square">
-            <a:spAutoFit/>
-          </a:bodyPr>
-          <a:lstStyle/>
-          <a:p>
-            <a:pPr>
-              <a:spcAft>
-                <a:spcPts val="300"/>
-              </a:spcAft>
-              <a:defRPr sz="2200">
-                <a:solidFill>
-                  <a:srgbClr val="1E293B"/>
-                </a:solidFill>
-                <a:latin typeface="DejaVu Sans"/>
-              </a:defRPr>
-            </a:pPr>
-            <a:r>
-              <a:t>Различаю атом, молекулу, ион.</a:t>
-            </a:r>
-          </a:p>
-          <a:p>
-            <a:pPr>
-              <a:spcAft>
-                <a:spcPts val="300"/>
-              </a:spcAft>
-              <a:defRPr sz="2200">
-                <a:solidFill>
-                  <a:srgbClr val="1E293B"/>
-                </a:solidFill>
-                <a:latin typeface="DejaVu Sans"/>
-              </a:defRPr>
-            </a:pPr>
-            <a:r>
-              <a:t>Вижу символ, индекс, коэффициент и заряд.</a:t>
-            </a:r>
-          </a:p>
-          <a:p>
-            <a:pPr>
-              <a:spcAft>
-                <a:spcPts val="300"/>
-              </a:spcAft>
-              <a:defRPr sz="2200">
-                <a:solidFill>
-                  <a:srgbClr val="1E293B"/>
-                </a:solidFill>
-                <a:latin typeface="DejaVu Sans"/>
-              </a:defRPr>
-            </a:pPr>
-            <a:r>
-              <a:t>Считаю атомы, включая запись со скобками.</a:t>
-            </a:r>
-          </a:p>
-          <a:p>
-            <a:pPr>
-              <a:spcAft>
-                <a:spcPts val="300"/>
-              </a:spcAft>
-              <a:defRPr sz="2200">
-                <a:solidFill>
-                  <a:srgbClr val="1E293B"/>
-                </a:solidFill>
-                <a:latin typeface="DejaVu Sans"/>
-              </a:defRPr>
-            </a:pPr>
-            <a:r>
-              <a:t>Перевожу кг/г/мг; нахожу процент; сохраняю отношение.</a:t>
-            </a:r>
-          </a:p>
-          <a:p>
-            <a:pPr>
-              <a:spcAft>
-                <a:spcPts val="300"/>
-              </a:spcAft>
-              <a:defRPr sz="2200">
-                <a:solidFill>
-                  <a:srgbClr val="1E293B"/>
-                </a:solidFill>
-                <a:latin typeface="DejaVu Sans"/>
-              </a:defRPr>
-            </a:pPr>
-            <a:r>
-              <a:t>Мой вопрос после конспекта: «…».</a:t>
-            </a:r>
-          </a:p>
-        </p:txBody>
-      </p:sp>
-      <p:sp>
-        <p:nvSpPr>
-          <p:cNvPr id="4" name="TextBox 3"/>
-          <p:cNvSpPr txBox="1"/>
-          <p:nvPr/>
-        </p:nvSpPr>
-        <p:spPr>
-          <a:xfrm>
-            <a:off x="731520" y="6400800"/>
-            <a:ext cx="10789920" cy="274320"/>
-          </a:xfrm>
-          <a:prstGeom prst="rect">
-            <a:avLst/>
-          </a:prstGeom>
-          <a:noFill/>
-        </p:spPr>
-        <p:txBody>
-          <a:bodyPr wrap="none">
-            <a:spAutoFit/>
-          </a:bodyPr>
-          <a:lstStyle/>
-          <a:p>
-            <a:pPr>
-              <a:defRPr sz="1200"/>
-            </a:pPr>
-            <a:r>
-              <a:t>Черновик для проверки преподавателем • 1</a:t>
-            </a:r>
-          </a:p>
-        </p:txBody>
-      </p:sp>
+      </p:pic>
     </p:spTree>
   </p:cSld>
   <p:clrMapOvr>
@@ -5758,14 +6163,6 @@
 <file path=ppt/slides/slide10.xml><?xml version="1.0" encoding="utf-8"?>
 <p:sld xmlns:a="http://schemas.openxmlformats.org/drawingml/2006/main" xmlns:p="http://schemas.openxmlformats.org/presentationml/2006/main" xmlns:r="http://schemas.openxmlformats.org/officeDocument/2006/relationships">
   <p:cSld>
-    <p:bg>
-      <p:bgPr>
-        <a:solidFill>
-          <a:srgbClr val="F8FAFC"/>
-        </a:solidFill>
-        <a:effectLst/>
-      </p:bgPr>
-    </p:bg>
     <p:spTree>
       <p:nvGrpSpPr>
         <p:cNvPr id="1" name=""/>
@@ -5773,191 +6170,30 @@
         <p:nvPr/>
       </p:nvGrpSpPr>
       <p:grpSpPr/>
-      <p:sp>
-        <p:nvSpPr>
-          <p:cNvPr id="2" name="TextBox 1"/>
-          <p:cNvSpPr txBox="1"/>
+      <p:pic>
+        <p:nvPicPr>
+          <p:cNvPr id="2" name="Picture 1" descr="s10.png"/>
+          <p:cNvPicPr>
+            <a:picLocks noChangeAspect="1"/>
+          </p:cNvPicPr>
           <p:nvPr/>
-        </p:nvSpPr>
+        </p:nvPicPr>
+        <p:blipFill>
+          <a:blip r:embed="rId2"/>
+          <a:stretch>
+            <a:fillRect/>
+          </a:stretch>
+        </p:blipFill>
         <p:spPr>
           <a:xfrm>
-            <a:off x="640080" y="365760"/>
-            <a:ext cx="10972800" cy="822960"/>
+            <a:off x="0" y="0"/>
+            <a:ext cx="12191695" cy="6858000"/>
           </a:xfrm>
           <a:prstGeom prst="rect">
             <a:avLst/>
           </a:prstGeom>
-          <a:noFill/>
         </p:spPr>
-        <p:txBody>
-          <a:bodyPr wrap="none">
-            <a:spAutoFit/>
-          </a:bodyPr>
-          <a:lstStyle/>
-          <a:p>
-            <a:pPr>
-              <a:defRPr sz="2800" b="1">
-                <a:solidFill>
-                  <a:srgbClr val="0F172A"/>
-                </a:solidFill>
-              </a:defRPr>
-            </a:pPr>
-            <a:r>
-              <a:t>Слайд 10. Масса та же, единицы другие</a:t>
-            </a:r>
-          </a:p>
-        </p:txBody>
-      </p:sp>
-      <p:sp>
-        <p:nvSpPr>
-          <p:cNvPr id="3" name="TextBox 2"/>
-          <p:cNvSpPr txBox="1"/>
-          <p:nvPr/>
-        </p:nvSpPr>
-        <p:spPr>
-          <a:xfrm>
-            <a:off x="731520" y="1417320"/>
-            <a:ext cx="10789920" cy="4709160"/>
-          </a:xfrm>
-          <a:prstGeom prst="rect">
-            <a:avLst/>
-          </a:prstGeom>
-          <a:noFill/>
-        </p:spPr>
-        <p:txBody>
-          <a:bodyPr wrap="square">
-            <a:spAutoFit/>
-          </a:bodyPr>
-          <a:lstStyle/>
-          <a:p>
-            <a:pPr>
-              <a:spcAft>
-                <a:spcPts val="300"/>
-              </a:spcAft>
-              <a:defRPr sz="2200">
-                <a:solidFill>
-                  <a:srgbClr val="1E293B"/>
-                </a:solidFill>
-                <a:latin typeface="DejaVu Sans"/>
-              </a:defRPr>
-            </a:pPr>
-            <a:r>
-              <a:t>1 кг = 1000 г; 1 г = 1000 мг.</a:t>
-            </a:r>
-          </a:p>
-          <a:p>
-            <a:pPr>
-              <a:spcAft>
-                <a:spcPts val="300"/>
-              </a:spcAft>
-              <a:defRPr sz="2200">
-                <a:solidFill>
-                  <a:srgbClr val="1E293B"/>
-                </a:solidFill>
-                <a:latin typeface="DejaVu Sans"/>
-              </a:defRPr>
-            </a:pPr>
-            <a:r>
-              <a:t>кг → г: × 1000; г → мг: × 1000.</a:t>
-            </a:r>
-          </a:p>
-          <a:p>
-            <a:pPr>
-              <a:spcAft>
-                <a:spcPts val="300"/>
-              </a:spcAft>
-              <a:defRPr sz="2200">
-                <a:solidFill>
-                  <a:srgbClr val="1E293B"/>
-                </a:solidFill>
-                <a:latin typeface="DejaVu Sans"/>
-              </a:defRPr>
-            </a:pPr>
-            <a:r>
-              <a:t>г → кг: ÷ 1000; мг → г: ÷ 1000.</a:t>
-            </a:r>
-          </a:p>
-          <a:p>
-            <a:pPr>
-              <a:spcAft>
-                <a:spcPts val="300"/>
-              </a:spcAft>
-              <a:defRPr sz="2200">
-                <a:solidFill>
-                  <a:srgbClr val="1E293B"/>
-                </a:solidFill>
-                <a:latin typeface="DejaVu Sans"/>
-              </a:defRPr>
-            </a:pPr>
-            <a:r>
-              <a:t>кг → мг: × 1 000 000.</a:t>
-            </a:r>
-          </a:p>
-          <a:p>
-            <a:pPr>
-              <a:spcAft>
-                <a:spcPts val="300"/>
-              </a:spcAft>
-              <a:defRPr sz="2200">
-                <a:solidFill>
-                  <a:srgbClr val="1E293B"/>
-                </a:solidFill>
-                <a:latin typeface="DejaVu Sans"/>
-              </a:defRPr>
-            </a:pPr>
-            <a:r>
-              <a:t>Примеры: 0,40 кг = 400 г; 250 мг = 0,250 г. В меньших единицах числовое значение больше.</a:t>
-            </a:r>
-          </a:p>
-          <a:p>
-            <a:pPr>
-              <a:spcAft>
-                <a:spcPts val="300"/>
-              </a:spcAft>
-              <a:defRPr sz="2200">
-                <a:solidFill>
-                  <a:srgbClr val="1E293B"/>
-                </a:solidFill>
-                <a:latin typeface="DejaVu Sans"/>
-              </a:defRPr>
-            </a:pPr>
-            <a:r>
-              <a:t>Проверка: 0,25 кг = … г; 600 мг = … г; 1,2 г = … мг.</a:t>
-            </a:r>
-          </a:p>
-        </p:txBody>
-      </p:sp>
-      <p:sp>
-        <p:nvSpPr>
-          <p:cNvPr id="4" name="TextBox 3"/>
-          <p:cNvSpPr txBox="1"/>
-          <p:nvPr/>
-        </p:nvSpPr>
-        <p:spPr>
-          <a:xfrm>
-            <a:off x="731520" y="6400800"/>
-            <a:ext cx="10789920" cy="274320"/>
-          </a:xfrm>
-          <a:prstGeom prst="rect">
-            <a:avLst/>
-          </a:prstGeom>
-          <a:noFill/>
-        </p:spPr>
-        <p:txBody>
-          <a:bodyPr wrap="none">
-            <a:spAutoFit/>
-          </a:bodyPr>
-          <a:lstStyle/>
-          <a:p>
-            <a:pPr>
-              <a:defRPr sz="1200"/>
-            </a:pPr>
-            <a:r>
-              <a:t>Черновик для проверки преподавателем • 10</a:t>
-            </a:r>
-          </a:p>
-        </p:txBody>
-      </p:sp>
+      </p:pic>
     </p:spTree>
   </p:cSld>
   <p:clrMapOvr>
@@ -5969,14 +6205,6 @@
 <file path=ppt/slides/slide11.xml><?xml version="1.0" encoding="utf-8"?>
 <p:sld xmlns:a="http://schemas.openxmlformats.org/drawingml/2006/main" xmlns:p="http://schemas.openxmlformats.org/presentationml/2006/main" xmlns:r="http://schemas.openxmlformats.org/officeDocument/2006/relationships">
   <p:cSld>
-    <p:bg>
-      <p:bgPr>
-        <a:solidFill>
-          <a:srgbClr val="F8FAFC"/>
-        </a:solidFill>
-        <a:effectLst/>
-      </p:bgPr>
-    </p:bg>
     <p:spTree>
       <p:nvGrpSpPr>
         <p:cNvPr id="1" name=""/>
@@ -5984,223 +6212,30 @@
         <p:nvPr/>
       </p:nvGrpSpPr>
       <p:grpSpPr/>
-      <p:sp>
-        <p:nvSpPr>
-          <p:cNvPr id="2" name="TextBox 1"/>
-          <p:cNvSpPr txBox="1"/>
+      <p:pic>
+        <p:nvPicPr>
+          <p:cNvPr id="2" name="Picture 1" descr="s11.png"/>
+          <p:cNvPicPr>
+            <a:picLocks noChangeAspect="1"/>
+          </p:cNvPicPr>
           <p:nvPr/>
-        </p:nvSpPr>
+        </p:nvPicPr>
+        <p:blipFill>
+          <a:blip r:embed="rId2"/>
+          <a:stretch>
+            <a:fillRect/>
+          </a:stretch>
+        </p:blipFill>
         <p:spPr>
           <a:xfrm>
-            <a:off x="640080" y="365760"/>
-            <a:ext cx="10972800" cy="822960"/>
+            <a:off x="0" y="0"/>
+            <a:ext cx="12191695" cy="6858000"/>
           </a:xfrm>
           <a:prstGeom prst="rect">
             <a:avLst/>
           </a:prstGeom>
-          <a:noFill/>
         </p:spPr>
-        <p:txBody>
-          <a:bodyPr wrap="none">
-            <a:spAutoFit/>
-          </a:bodyPr>
-          <a:lstStyle/>
-          <a:p>
-            <a:pPr>
-              <a:defRPr sz="2800" b="1">
-                <a:solidFill>
-                  <a:srgbClr val="0F172A"/>
-                </a:solidFill>
-              </a:defRPr>
-            </a:pPr>
-            <a:r>
-              <a:t>Слайд 11. Процент: часть и целое</a:t>
-            </a:r>
-          </a:p>
-        </p:txBody>
-      </p:sp>
-      <p:sp>
-        <p:nvSpPr>
-          <p:cNvPr id="3" name="TextBox 2"/>
-          <p:cNvSpPr txBox="1"/>
-          <p:nvPr/>
-        </p:nvSpPr>
-        <p:spPr>
-          <a:xfrm>
-            <a:off x="731520" y="1417320"/>
-            <a:ext cx="10789920" cy="4709160"/>
-          </a:xfrm>
-          <a:prstGeom prst="rect">
-            <a:avLst/>
-          </a:prstGeom>
-          <a:noFill/>
-        </p:spPr>
-        <p:txBody>
-          <a:bodyPr wrap="square">
-            <a:spAutoFit/>
-          </a:bodyPr>
-          <a:lstStyle/>
-          <a:p>
-            <a:pPr>
-              <a:spcAft>
-                <a:spcPts val="300"/>
-              </a:spcAft>
-              <a:defRPr sz="2200">
-                <a:solidFill>
-                  <a:srgbClr val="1E293B"/>
-                </a:solidFill>
-                <a:latin typeface="DejaVu Sans"/>
-              </a:defRPr>
-            </a:pPr>
-            <a:r>
-              <a:t>Сначала приведи часть и целое к одинаковым единицам.</a:t>
-            </a:r>
-          </a:p>
-          <a:p>
-            <a:pPr>
-              <a:spcAft>
-                <a:spcPts val="300"/>
-              </a:spcAft>
-              <a:defRPr sz="2200">
-                <a:solidFill>
-                  <a:srgbClr val="1E293B"/>
-                </a:solidFill>
-                <a:latin typeface="DejaVu Sans"/>
-              </a:defRPr>
-            </a:pPr>
-            <a:r>
-              <a:t>Процент части: часть / целое × 100%.</a:t>
-            </a:r>
-          </a:p>
-          <a:p>
-            <a:pPr>
-              <a:spcAft>
-                <a:spcPts val="300"/>
-              </a:spcAft>
-              <a:defRPr sz="2200">
-                <a:solidFill>
-                  <a:srgbClr val="1E293B"/>
-                </a:solidFill>
-                <a:latin typeface="DejaVu Sans"/>
-              </a:defRPr>
-            </a:pPr>
-            <a:r>
-              <a:t>Часть по проценту: целое × (p/100).</a:t>
-            </a:r>
-          </a:p>
-          <a:p>
-            <a:pPr>
-              <a:spcAft>
-                <a:spcPts val="300"/>
-              </a:spcAft>
-              <a:defRPr sz="2200">
-                <a:solidFill>
-                  <a:srgbClr val="1E293B"/>
-                </a:solidFill>
-                <a:latin typeface="DejaVu Sans"/>
-              </a:defRPr>
-            </a:pPr>
-            <a:r>
-              <a:t>Целое по известной части: часть / (p/100).</a:t>
-            </a:r>
-          </a:p>
-          <a:p>
-            <a:pPr>
-              <a:spcAft>
-                <a:spcPts val="300"/>
-              </a:spcAft>
-              <a:defRPr sz="2200">
-                <a:solidFill>
-                  <a:srgbClr val="1E293B"/>
-                </a:solidFill>
-                <a:latin typeface="DejaVu Sans"/>
-              </a:defRPr>
-            </a:pPr>
-            <a:r>
-              <a:t>30 г от 200 г: 30/200 = 0,15 = 15%.</a:t>
-            </a:r>
-          </a:p>
-          <a:p>
-            <a:pPr>
-              <a:spcAft>
-                <a:spcPts val="300"/>
-              </a:spcAft>
-              <a:defRPr sz="2200">
-                <a:solidFill>
-                  <a:srgbClr val="1E293B"/>
-                </a:solidFill>
-                <a:latin typeface="DejaVu Sans"/>
-              </a:defRPr>
-            </a:pPr>
-            <a:r>
-              <a:t>15% от 200 г: 200 × 0,15 = 30 г.</a:t>
-            </a:r>
-          </a:p>
-          <a:p>
-            <a:pPr>
-              <a:spcAft>
-                <a:spcPts val="300"/>
-              </a:spcAft>
-              <a:defRPr sz="2200">
-                <a:solidFill>
-                  <a:srgbClr val="1E293B"/>
-                </a:solidFill>
-                <a:latin typeface="DejaVu Sans"/>
-              </a:defRPr>
-            </a:pPr>
-            <a:r>
-              <a:t>30 г — это 15% целого: 30/0,15 = 200 г.</a:t>
-            </a:r>
-          </a:p>
-          <a:p>
-            <a:pPr>
-              <a:spcAft>
-                <a:spcPts val="300"/>
-              </a:spcAft>
-              <a:defRPr sz="2200">
-                <a:solidFill>
-                  <a:srgbClr val="1E293B"/>
-                </a:solidFill>
-                <a:latin typeface="DejaVu Sans"/>
-              </a:defRPr>
-            </a:pPr>
-            <a:r>
-              <a:t>Вопрос для практики: 12 г — какой процент от 80 г?</a:t>
-            </a:r>
-          </a:p>
-        </p:txBody>
-      </p:sp>
-      <p:sp>
-        <p:nvSpPr>
-          <p:cNvPr id="4" name="TextBox 3"/>
-          <p:cNvSpPr txBox="1"/>
-          <p:nvPr/>
-        </p:nvSpPr>
-        <p:spPr>
-          <a:xfrm>
-            <a:off x="731520" y="6400800"/>
-            <a:ext cx="10789920" cy="274320"/>
-          </a:xfrm>
-          <a:prstGeom prst="rect">
-            <a:avLst/>
-          </a:prstGeom>
-          <a:noFill/>
-        </p:spPr>
-        <p:txBody>
-          <a:bodyPr wrap="none">
-            <a:spAutoFit/>
-          </a:bodyPr>
-          <a:lstStyle/>
-          <a:p>
-            <a:pPr>
-              <a:defRPr sz="1200"/>
-            </a:pPr>
-            <a:r>
-              <a:t>Черновик для проверки преподавателем • 11</a:t>
-            </a:r>
-          </a:p>
-        </p:txBody>
-      </p:sp>
+      </p:pic>
     </p:spTree>
   </p:cSld>
   <p:clrMapOvr>
@@ -6212,14 +6247,6 @@
 <file path=ppt/slides/slide12.xml><?xml version="1.0" encoding="utf-8"?>
 <p:sld xmlns:a="http://schemas.openxmlformats.org/drawingml/2006/main" xmlns:p="http://schemas.openxmlformats.org/presentationml/2006/main" xmlns:r="http://schemas.openxmlformats.org/officeDocument/2006/relationships">
   <p:cSld>
-    <p:bg>
-      <p:bgPr>
-        <a:solidFill>
-          <a:srgbClr val="F8FAFC"/>
-        </a:solidFill>
-        <a:effectLst/>
-      </p:bgPr>
-    </p:bg>
     <p:spTree>
       <p:nvGrpSpPr>
         <p:cNvPr id="1" name=""/>
@@ -6227,223 +6254,30 @@
         <p:nvPr/>
       </p:nvGrpSpPr>
       <p:grpSpPr/>
-      <p:sp>
-        <p:nvSpPr>
-          <p:cNvPr id="2" name="TextBox 1"/>
-          <p:cNvSpPr txBox="1"/>
+      <p:pic>
+        <p:nvPicPr>
+          <p:cNvPr id="2" name="Picture 1" descr="s12.png"/>
+          <p:cNvPicPr>
+            <a:picLocks noChangeAspect="1"/>
+          </p:cNvPicPr>
           <p:nvPr/>
-        </p:nvSpPr>
+        </p:nvPicPr>
+        <p:blipFill>
+          <a:blip r:embed="rId2"/>
+          <a:stretch>
+            <a:fillRect/>
+          </a:stretch>
+        </p:blipFill>
         <p:spPr>
           <a:xfrm>
-            <a:off x="640080" y="365760"/>
-            <a:ext cx="10972800" cy="822960"/>
+            <a:off x="0" y="0"/>
+            <a:ext cx="12191695" cy="6858000"/>
           </a:xfrm>
           <a:prstGeom prst="rect">
             <a:avLst/>
           </a:prstGeom>
-          <a:noFill/>
         </p:spPr>
-        <p:txBody>
-          <a:bodyPr wrap="none">
-            <a:spAutoFit/>
-          </a:bodyPr>
-          <a:lstStyle/>
-          <a:p>
-            <a:pPr>
-              <a:defRPr sz="2800" b="1">
-                <a:solidFill>
-                  <a:srgbClr val="0F172A"/>
-                </a:solidFill>
-              </a:defRPr>
-            </a:pPr>
-            <a:r>
-              <a:t>Слайд 12. Пропорция и равные части</a:t>
-            </a:r>
-          </a:p>
-        </p:txBody>
-      </p:sp>
-      <p:sp>
-        <p:nvSpPr>
-          <p:cNvPr id="3" name="TextBox 2"/>
-          <p:cNvSpPr txBox="1"/>
-          <p:nvPr/>
-        </p:nvSpPr>
-        <p:spPr>
-          <a:xfrm>
-            <a:off x="731520" y="1417320"/>
-            <a:ext cx="10789920" cy="4709160"/>
-          </a:xfrm>
-          <a:prstGeom prst="rect">
-            <a:avLst/>
-          </a:prstGeom>
-          <a:noFill/>
-        </p:spPr>
-        <p:txBody>
-          <a:bodyPr wrap="square">
-            <a:spAutoFit/>
-          </a:bodyPr>
-          <a:lstStyle/>
-          <a:p>
-            <a:pPr>
-              <a:spcAft>
-                <a:spcPts val="300"/>
-              </a:spcAft>
-              <a:defRPr sz="2200">
-                <a:solidFill>
-                  <a:srgbClr val="1E293B"/>
-                </a:solidFill>
-                <a:latin typeface="DejaVu Sans"/>
-              </a:defRPr>
-            </a:pPr>
-            <a:r>
-              <a:t>Если отношение по условию постоянно, обе величины меняются в одинаковое число раз.</a:t>
-            </a:r>
-          </a:p>
-          <a:p>
-            <a:pPr>
-              <a:spcAft>
-                <a:spcPts val="300"/>
-              </a:spcAft>
-              <a:defRPr sz="2200">
-                <a:solidFill>
-                  <a:srgbClr val="1E293B"/>
-                </a:solidFill>
-                <a:latin typeface="DejaVu Sans"/>
-              </a:defRPr>
-            </a:pPr>
-            <a:r>
-              <a:t>На 2 г компонента A приходится 5 г B. На 6 г A потребуется 5 × (6/2) = 15 г B.</a:t>
-            </a:r>
-          </a:p>
-          <a:p>
-            <a:pPr>
-              <a:spcAft>
-                <a:spcPts val="300"/>
-              </a:spcAft>
-              <a:defRPr sz="2200">
-                <a:solidFill>
-                  <a:srgbClr val="1E293B"/>
-                </a:solidFill>
-                <a:latin typeface="DejaVu Sans"/>
-              </a:defRPr>
-            </a:pPr>
-            <a:r>
-              <a:t>Если A : B = 2 : 3, а вместе 20 г:</a:t>
-            </a:r>
-          </a:p>
-          <a:p>
-            <a:pPr>
-              <a:spcAft>
-                <a:spcPts val="300"/>
-              </a:spcAft>
-              <a:defRPr sz="2200">
-                <a:solidFill>
-                  <a:srgbClr val="1E293B"/>
-                </a:solidFill>
-                <a:latin typeface="DejaVu Sans"/>
-              </a:defRPr>
-            </a:pPr>
-            <a:r>
-              <a:t>1. Всего 2 + 3 = 5 равных частей.</a:t>
-            </a:r>
-          </a:p>
-          <a:p>
-            <a:pPr>
-              <a:spcAft>
-                <a:spcPts val="300"/>
-              </a:spcAft>
-              <a:defRPr sz="2200">
-                <a:solidFill>
-                  <a:srgbClr val="1E293B"/>
-                </a:solidFill>
-                <a:latin typeface="DejaVu Sans"/>
-              </a:defRPr>
-            </a:pPr>
-            <a:r>
-              <a:t>2. Одна часть: 20/5 = 4 г.</a:t>
-            </a:r>
-          </a:p>
-          <a:p>
-            <a:pPr>
-              <a:spcAft>
-                <a:spcPts val="300"/>
-              </a:spcAft>
-              <a:defRPr sz="2200">
-                <a:solidFill>
-                  <a:srgbClr val="1E293B"/>
-                </a:solidFill>
-                <a:latin typeface="DejaVu Sans"/>
-              </a:defRPr>
-            </a:pPr>
-            <a:r>
-              <a:t>3. A: 2 × 4 = 8 г; B: 3 × 4 = 12 г.</a:t>
-            </a:r>
-          </a:p>
-          <a:p>
-            <a:pPr>
-              <a:spcAft>
-                <a:spcPts val="300"/>
-              </a:spcAft>
-              <a:defRPr sz="2200">
-                <a:solidFill>
-                  <a:srgbClr val="1E293B"/>
-                </a:solidFill>
-                <a:latin typeface="DejaVu Sans"/>
-              </a:defRPr>
-            </a:pPr>
-            <a:r>
-              <a:t>4. Проверка: 8 + 12 = 20; 8/12 = 2/3.</a:t>
-            </a:r>
-          </a:p>
-          <a:p>
-            <a:pPr>
-              <a:spcAft>
-                <a:spcPts val="300"/>
-              </a:spcAft>
-              <a:defRPr sz="2200">
-                <a:solidFill>
-                  <a:srgbClr val="1E293B"/>
-                </a:solidFill>
-                <a:latin typeface="DejaVu Sans"/>
-              </a:defRPr>
-            </a:pPr>
-            <a:r>
-              <a:t>A и B — обозначения компонентов из условия, не символы химических элементов.</a:t>
-            </a:r>
-          </a:p>
-        </p:txBody>
-      </p:sp>
-      <p:sp>
-        <p:nvSpPr>
-          <p:cNvPr id="4" name="TextBox 3"/>
-          <p:cNvSpPr txBox="1"/>
-          <p:nvPr/>
-        </p:nvSpPr>
-        <p:spPr>
-          <a:xfrm>
-            <a:off x="731520" y="6400800"/>
-            <a:ext cx="10789920" cy="274320"/>
-          </a:xfrm>
-          <a:prstGeom prst="rect">
-            <a:avLst/>
-          </a:prstGeom>
-          <a:noFill/>
-        </p:spPr>
-        <p:txBody>
-          <a:bodyPr wrap="none">
-            <a:spAutoFit/>
-          </a:bodyPr>
-          <a:lstStyle/>
-          <a:p>
-            <a:pPr>
-              <a:defRPr sz="1200"/>
-            </a:pPr>
-            <a:r>
-              <a:t>Черновик для проверки преподавателем • 12</a:t>
-            </a:r>
-          </a:p>
-        </p:txBody>
-      </p:sp>
+      </p:pic>
     </p:spTree>
   </p:cSld>
   <p:clrMapOvr>
@@ -6455,14 +6289,6 @@
 <file path=ppt/slides/slide13.xml><?xml version="1.0" encoding="utf-8"?>
 <p:sld xmlns:a="http://schemas.openxmlformats.org/drawingml/2006/main" xmlns:p="http://schemas.openxmlformats.org/presentationml/2006/main" xmlns:r="http://schemas.openxmlformats.org/officeDocument/2006/relationships">
   <p:cSld>
-    <p:bg>
-      <p:bgPr>
-        <a:solidFill>
-          <a:srgbClr val="F8FAFC"/>
-        </a:solidFill>
-        <a:effectLst/>
-      </p:bgPr>
-    </p:bg>
     <p:spTree>
       <p:nvGrpSpPr>
         <p:cNvPr id="1" name=""/>
@@ -6470,191 +6296,30 @@
         <p:nvPr/>
       </p:nvGrpSpPr>
       <p:grpSpPr/>
-      <p:sp>
-        <p:nvSpPr>
-          <p:cNvPr id="2" name="TextBox 1"/>
-          <p:cNvSpPr txBox="1"/>
+      <p:pic>
+        <p:nvPicPr>
+          <p:cNvPr id="2" name="Picture 1" descr="s13.png"/>
+          <p:cNvPicPr>
+            <a:picLocks noChangeAspect="1"/>
+          </p:cNvPicPr>
           <p:nvPr/>
-        </p:nvSpPr>
+        </p:nvPicPr>
+        <p:blipFill>
+          <a:blip r:embed="rId2"/>
+          <a:stretch>
+            <a:fillRect/>
+          </a:stretch>
+        </p:blipFill>
         <p:spPr>
           <a:xfrm>
-            <a:off x="640080" y="365760"/>
-            <a:ext cx="10972800" cy="822960"/>
+            <a:off x="0" y="0"/>
+            <a:ext cx="12191695" cy="6858000"/>
           </a:xfrm>
           <a:prstGeom prst="rect">
             <a:avLst/>
           </a:prstGeom>
-          <a:noFill/>
         </p:spPr>
-        <p:txBody>
-          <a:bodyPr wrap="none">
-            <a:spAutoFit/>
-          </a:bodyPr>
-          <a:lstStyle/>
-          <a:p>
-            <a:pPr>
-              <a:defRPr sz="2800" b="1">
-                <a:solidFill>
-                  <a:srgbClr val="0F172A"/>
-                </a:solidFill>
-              </a:defRPr>
-            </a:pPr>
-            <a:r>
-              <a:t>Слайд 13. Самостоятельная практика после объяснения</a:t>
-            </a:r>
-          </a:p>
-        </p:txBody>
-      </p:sp>
-      <p:sp>
-        <p:nvSpPr>
-          <p:cNvPr id="3" name="TextBox 2"/>
-          <p:cNvSpPr txBox="1"/>
-          <p:nvPr/>
-        </p:nvSpPr>
-        <p:spPr>
-          <a:xfrm>
-            <a:off x="731520" y="1417320"/>
-            <a:ext cx="10789920" cy="4709160"/>
-          </a:xfrm>
-          <a:prstGeom prst="rect">
-            <a:avLst/>
-          </a:prstGeom>
-          <a:noFill/>
-        </p:spPr>
-        <p:txBody>
-          <a:bodyPr wrap="square">
-            <a:spAutoFit/>
-          </a:bodyPr>
-          <a:lstStyle/>
-          <a:p>
-            <a:pPr>
-              <a:spcAft>
-                <a:spcPts val="300"/>
-              </a:spcAft>
-              <a:defRPr sz="2200">
-                <a:solidFill>
-                  <a:srgbClr val="1E293B"/>
-                </a:solidFill>
-                <a:latin typeface="DejaVu Sans"/>
-              </a:defRPr>
-            </a:pPr>
-            <a:r>
-              <a:t>1. H; O₂; Na⁺; SO₄²⁻: тип частицы; для иона заряд.</a:t>
-            </a:r>
-          </a:p>
-          <a:p>
-            <a:pPr>
-              <a:spcAft>
-                <a:spcPts val="300"/>
-              </a:spcAft>
-              <a:defRPr sz="2200">
-                <a:solidFill>
-                  <a:srgbClr val="1E293B"/>
-                </a:solidFill>
-                <a:latin typeface="DejaVu Sans"/>
-              </a:defRPr>
-            </a:pPr>
-            <a:r>
-              <a:t>2. 3H₂O: коэффициент, индексы, атомы H/O/всего.</a:t>
-            </a:r>
-          </a:p>
-          <a:p>
-            <a:pPr>
-              <a:spcAft>
-                <a:spcPts val="300"/>
-              </a:spcAft>
-              <a:defRPr sz="2200">
-                <a:solidFill>
-                  <a:srgbClr val="1E293B"/>
-                </a:solidFill>
-                <a:latin typeface="DejaVu Sans"/>
-              </a:defRPr>
-            </a:pPr>
-            <a:r>
-              <a:t>3. 2Ca(OH)₂: атомы Ca/O/H/всего; поясни скобки.</a:t>
-            </a:r>
-          </a:p>
-          <a:p>
-            <a:pPr>
-              <a:spcAft>
-                <a:spcPts val="300"/>
-              </a:spcAft>
-              <a:defRPr sz="2200">
-                <a:solidFill>
-                  <a:srgbClr val="1E293B"/>
-                </a:solidFill>
-                <a:latin typeface="DejaVu Sans"/>
-              </a:defRPr>
-            </a:pPr>
-            <a:r>
-              <a:t>4. 2CO₂: сколько атомов O? A) 2; B) 3; C) 4; D) 6.</a:t>
-            </a:r>
-          </a:p>
-          <a:p>
-            <a:pPr>
-              <a:spcAft>
-                <a:spcPts val="300"/>
-              </a:spcAft>
-              <a:defRPr sz="2200">
-                <a:solidFill>
-                  <a:srgbClr val="1E293B"/>
-                </a:solidFill>
-                <a:latin typeface="DejaVu Sans"/>
-              </a:defRPr>
-            </a:pPr>
-            <a:r>
-              <a:t>5. Целое 0,20 кг, часть 30 г: какой процент? A) 0,15%; B) 15%; C) 150%; D) 15000%.</a:t>
-            </a:r>
-          </a:p>
-          <a:p>
-            <a:pPr>
-              <a:spcAft>
-                <a:spcPts val="300"/>
-              </a:spcAft>
-              <a:defRPr sz="2200">
-                <a:solidFill>
-                  <a:srgbClr val="1E293B"/>
-                </a:solidFill>
-                <a:latin typeface="DejaVu Sans"/>
-              </a:defRPr>
-            </a:pPr>
-            <a:r>
-              <a:t>Ответ без шага не показывает, как ты решил. Сначала своя попытка, затем общий разбор.</a:t>
-            </a:r>
-          </a:p>
-        </p:txBody>
-      </p:sp>
-      <p:sp>
-        <p:nvSpPr>
-          <p:cNvPr id="4" name="TextBox 3"/>
-          <p:cNvSpPr txBox="1"/>
-          <p:nvPr/>
-        </p:nvSpPr>
-        <p:spPr>
-          <a:xfrm>
-            <a:off x="731520" y="6400800"/>
-            <a:ext cx="10789920" cy="274320"/>
-          </a:xfrm>
-          <a:prstGeom prst="rect">
-            <a:avLst/>
-          </a:prstGeom>
-          <a:noFill/>
-        </p:spPr>
-        <p:txBody>
-          <a:bodyPr wrap="none">
-            <a:spAutoFit/>
-          </a:bodyPr>
-          <a:lstStyle/>
-          <a:p>
-            <a:pPr>
-              <a:defRPr sz="1200"/>
-            </a:pPr>
-            <a:r>
-              <a:t>Черновик для проверки преподавателем • 13</a:t>
-            </a:r>
-          </a:p>
-        </p:txBody>
-      </p:sp>
+      </p:pic>
     </p:spTree>
   </p:cSld>
   <p:clrMapOvr>
@@ -6666,14 +6331,6 @@
 <file path=ppt/slides/slide14.xml><?xml version="1.0" encoding="utf-8"?>
 <p:sld xmlns:a="http://schemas.openxmlformats.org/drawingml/2006/main" xmlns:p="http://schemas.openxmlformats.org/presentationml/2006/main" xmlns:r="http://schemas.openxmlformats.org/officeDocument/2006/relationships">
   <p:cSld>
-    <p:bg>
-      <p:bgPr>
-        <a:solidFill>
-          <a:srgbClr val="F8FAFC"/>
-        </a:solidFill>
-        <a:effectLst/>
-      </p:bgPr>
-    </p:bg>
     <p:spTree>
       <p:nvGrpSpPr>
         <p:cNvPr id="1" name=""/>
@@ -6681,207 +6338,30 @@
         <p:nvPr/>
       </p:nvGrpSpPr>
       <p:grpSpPr/>
-      <p:sp>
-        <p:nvSpPr>
-          <p:cNvPr id="2" name="TextBox 1"/>
-          <p:cNvSpPr txBox="1"/>
+      <p:pic>
+        <p:nvPicPr>
+          <p:cNvPr id="2" name="Picture 1" descr="s14.png"/>
+          <p:cNvPicPr>
+            <a:picLocks noChangeAspect="1"/>
+          </p:cNvPicPr>
           <p:nvPr/>
-        </p:nvSpPr>
+        </p:nvPicPr>
+        <p:blipFill>
+          <a:blip r:embed="rId2"/>
+          <a:stretch>
+            <a:fillRect/>
+          </a:stretch>
+        </p:blipFill>
         <p:spPr>
           <a:xfrm>
-            <a:off x="640080" y="365760"/>
-            <a:ext cx="10972800" cy="822960"/>
+            <a:off x="0" y="0"/>
+            <a:ext cx="12191695" cy="6858000"/>
           </a:xfrm>
           <a:prstGeom prst="rect">
             <a:avLst/>
           </a:prstGeom>
-          <a:noFill/>
         </p:spPr>
-        <p:txBody>
-          <a:bodyPr wrap="none">
-            <a:spAutoFit/>
-          </a:bodyPr>
-          <a:lstStyle/>
-          <a:p>
-            <a:pPr>
-              <a:defRPr sz="2800" b="1">
-                <a:solidFill>
-                  <a:srgbClr val="0F172A"/>
-                </a:solidFill>
-              </a:defRPr>
-            </a:pPr>
-            <a:r>
-              <a:t>Слайд 14. Выход из урока 1 и домашний шаг</a:t>
-            </a:r>
-          </a:p>
-        </p:txBody>
-      </p:sp>
-      <p:sp>
-        <p:nvSpPr>
-          <p:cNvPr id="3" name="TextBox 2"/>
-          <p:cNvSpPr txBox="1"/>
-          <p:nvPr/>
-        </p:nvSpPr>
-        <p:spPr>
-          <a:xfrm>
-            <a:off x="731520" y="1417320"/>
-            <a:ext cx="10789920" cy="4709160"/>
-          </a:xfrm>
-          <a:prstGeom prst="rect">
-            <a:avLst/>
-          </a:prstGeom>
-          <a:noFill/>
-        </p:spPr>
-        <p:txBody>
-          <a:bodyPr wrap="square">
-            <a:spAutoFit/>
-          </a:bodyPr>
-          <a:lstStyle/>
-          <a:p>
-            <a:pPr>
-              <a:spcAft>
-                <a:spcPts val="300"/>
-              </a:spcAft>
-              <a:defRPr sz="2200">
-                <a:solidFill>
-                  <a:srgbClr val="1E293B"/>
-                </a:solidFill>
-                <a:latin typeface="DejaVu Sans"/>
-              </a:defRPr>
-            </a:pPr>
-            <a:r>
-              <a:t>X1. H — атом или молекула?</a:t>
-            </a:r>
-          </a:p>
-          <a:p>
-            <a:pPr>
-              <a:spcAft>
-                <a:spcPts val="300"/>
-              </a:spcAft>
-              <a:defRPr sz="2200">
-                <a:solidFill>
-                  <a:srgbClr val="1E293B"/>
-                </a:solidFill>
-                <a:latin typeface="DejaVu Sans"/>
-              </a:defRPr>
-            </a:pPr>
-            <a:r>
-              <a:t>X2. O₂ — молекула или ион?</a:t>
-            </a:r>
-          </a:p>
-          <a:p>
-            <a:pPr>
-              <a:spcAft>
-                <a:spcPts val="300"/>
-              </a:spcAft>
-              <a:defRPr sz="2200">
-                <a:solidFill>
-                  <a:srgbClr val="1E293B"/>
-                </a:solidFill>
-                <a:latin typeface="DejaVu Sans"/>
-              </a:defRPr>
-            </a:pPr>
-            <a:r>
-              <a:t>X3. Ca²⁺ — какая частица и какой заряд?</a:t>
-            </a:r>
-          </a:p>
-          <a:p>
-            <a:pPr>
-              <a:spcAft>
-                <a:spcPts val="300"/>
-              </a:spcAft>
-              <a:defRPr sz="2200">
-                <a:solidFill>
-                  <a:srgbClr val="1E293B"/>
-                </a:solidFill>
-                <a:latin typeface="DejaVu Sans"/>
-              </a:defRPr>
-            </a:pPr>
-            <a:r>
-              <a:t>X4. Чем отличаются ₂ и 3 в 3H₂O?</a:t>
-            </a:r>
-          </a:p>
-          <a:p>
-            <a:pPr>
-              <a:spcAft>
-                <a:spcPts val="300"/>
-              </a:spcAft>
-              <a:defRPr sz="2200">
-                <a:solidFill>
-                  <a:srgbClr val="1E293B"/>
-                </a:solidFill>
-                <a:latin typeface="DejaVu Sans"/>
-              </a:defRPr>
-            </a:pPr>
-            <a:r>
-              <a:t>X5. 0,30 кг = … г. X6. 450 мг = … г.</a:t>
-            </a:r>
-          </a:p>
-          <a:p>
-            <a:pPr>
-              <a:spcAft>
-                <a:spcPts val="300"/>
-              </a:spcAft>
-              <a:defRPr sz="2200">
-                <a:solidFill>
-                  <a:srgbClr val="1E293B"/>
-                </a:solidFill>
-                <a:latin typeface="DejaVu Sans"/>
-              </a:defRPr>
-            </a:pPr>
-            <a:r>
-              <a:t>X7. 5 г — какой процент от 20 г?</a:t>
-            </a:r>
-          </a:p>
-          <a:p>
-            <a:pPr>
-              <a:spcAft>
-                <a:spcPts val="300"/>
-              </a:spcAft>
-              <a:defRPr sz="2200">
-                <a:solidFill>
-                  <a:srgbClr val="1E293B"/>
-                </a:solidFill>
-                <a:latin typeface="DejaVu Sans"/>
-              </a:defRPr>
-            </a:pPr>
-            <a:r>
-              <a:t>До урока 2: G1–G3, 15 минут, входят в недельное ДЗ. Запиши незавершённый шаг и вопрос.</a:t>
-            </a:r>
-          </a:p>
-        </p:txBody>
-      </p:sp>
-      <p:sp>
-        <p:nvSpPr>
-          <p:cNvPr id="4" name="TextBox 3"/>
-          <p:cNvSpPr txBox="1"/>
-          <p:nvPr/>
-        </p:nvSpPr>
-        <p:spPr>
-          <a:xfrm>
-            <a:off x="731520" y="6400800"/>
-            <a:ext cx="10789920" cy="274320"/>
-          </a:xfrm>
-          <a:prstGeom prst="rect">
-            <a:avLst/>
-          </a:prstGeom>
-          <a:noFill/>
-        </p:spPr>
-        <p:txBody>
-          <a:bodyPr wrap="none">
-            <a:spAutoFit/>
-          </a:bodyPr>
-          <a:lstStyle/>
-          <a:p>
-            <a:pPr>
-              <a:defRPr sz="1200"/>
-            </a:pPr>
-            <a:r>
-              <a:t>Черновик для проверки преподавателем • 14</a:t>
-            </a:r>
-          </a:p>
-        </p:txBody>
-      </p:sp>
+      </p:pic>
     </p:spTree>
   </p:cSld>
   <p:clrMapOvr>
@@ -6893,14 +6373,6 @@
 <file path=ppt/slides/slide15.xml><?xml version="1.0" encoding="utf-8"?>
 <p:sld xmlns:a="http://schemas.openxmlformats.org/drawingml/2006/main" xmlns:p="http://schemas.openxmlformats.org/presentationml/2006/main" xmlns:r="http://schemas.openxmlformats.org/officeDocument/2006/relationships">
   <p:cSld>
-    <p:bg>
-      <p:bgPr>
-        <a:solidFill>
-          <a:srgbClr val="F8FAFC"/>
-        </a:solidFill>
-        <a:effectLst/>
-      </p:bgPr>
-    </p:bg>
     <p:spTree>
       <p:nvGrpSpPr>
         <p:cNvPr id="1" name=""/>
@@ -6908,143 +6380,30 @@
         <p:nvPr/>
       </p:nvGrpSpPr>
       <p:grpSpPr/>
-      <p:sp>
-        <p:nvSpPr>
-          <p:cNvPr id="2" name="TextBox 1"/>
-          <p:cNvSpPr txBox="1"/>
+      <p:pic>
+        <p:nvPicPr>
+          <p:cNvPr id="2" name="Picture 1" descr="s15.png"/>
+          <p:cNvPicPr>
+            <a:picLocks noChangeAspect="1"/>
+          </p:cNvPicPr>
           <p:nvPr/>
-        </p:nvSpPr>
+        </p:nvPicPr>
+        <p:blipFill>
+          <a:blip r:embed="rId2"/>
+          <a:stretch>
+            <a:fillRect/>
+          </a:stretch>
+        </p:blipFill>
         <p:spPr>
           <a:xfrm>
-            <a:off x="640080" y="365760"/>
-            <a:ext cx="10972800" cy="822960"/>
+            <a:off x="0" y="0"/>
+            <a:ext cx="12191695" cy="6858000"/>
           </a:xfrm>
           <a:prstGeom prst="rect">
             <a:avLst/>
           </a:prstGeom>
-          <a:noFill/>
         </p:spPr>
-        <p:txBody>
-          <a:bodyPr wrap="none">
-            <a:spAutoFit/>
-          </a:bodyPr>
-          <a:lstStyle/>
-          <a:p>
-            <a:pPr>
-              <a:defRPr sz="2800" b="1">
-                <a:solidFill>
-                  <a:srgbClr val="0F172A"/>
-                </a:solidFill>
-              </a:defRPr>
-            </a:pPr>
-            <a:r>
-              <a:t>Слайд 15. Урок 2: повторяем ровно 20 минут</a:t>
-            </a:r>
-          </a:p>
-        </p:txBody>
-      </p:sp>
-      <p:sp>
-        <p:nvSpPr>
-          <p:cNvPr id="3" name="TextBox 2"/>
-          <p:cNvSpPr txBox="1"/>
-          <p:nvPr/>
-        </p:nvSpPr>
-        <p:spPr>
-          <a:xfrm>
-            <a:off x="731520" y="1417320"/>
-            <a:ext cx="10789920" cy="4709160"/>
-          </a:xfrm>
-          <a:prstGeom prst="rect">
-            <a:avLst/>
-          </a:prstGeom>
-          <a:noFill/>
-        </p:spPr>
-        <p:txBody>
-          <a:bodyPr wrap="square">
-            <a:spAutoFit/>
-          </a:bodyPr>
-          <a:lstStyle/>
-          <a:p>
-            <a:pPr>
-              <a:spcAft>
-                <a:spcPts val="300"/>
-              </a:spcAft>
-              <a:defRPr sz="2200">
-                <a:solidFill>
-                  <a:srgbClr val="1E293B"/>
-                </a:solidFill>
-                <a:latin typeface="DejaVu Sans"/>
-              </a:defRPr>
-            </a:pPr>
-            <a:r>
-              <a:t>R1. Прочитай шесть записей: H₂O; CO₂; Na⁺; Ca²⁺; 3H₂O; NaCl. Что представлено? Сколько атомов каждого элемента? Для иона прочитай заряд, для NaCl назови единицу.</a:t>
-            </a:r>
-          </a:p>
-          <a:p>
-            <a:pPr>
-              <a:spcAft>
-                <a:spcPts val="300"/>
-              </a:spcAft>
-              <a:defRPr sz="2200">
-                <a:solidFill>
-                  <a:srgbClr val="1E293B"/>
-                </a:solidFill>
-                <a:latin typeface="DejaVu Sans"/>
-              </a:defRPr>
-            </a:pPr>
-            <a:r>
-              <a:t>R2. 0,12 кг = … г; 75 мг = … г; 20% от 50 г = … г. В одинаковых наборах на 3 г A приходится 6 г B: сколько B нужно на 9 г A?</a:t>
-            </a:r>
-          </a:p>
-          <a:p>
-            <a:pPr>
-              <a:spcAft>
-                <a:spcPts val="300"/>
-              </a:spcAft>
-              <a:defRPr sz="2200">
-                <a:solidFill>
-                  <a:srgbClr val="1E293B"/>
-                </a:solidFill>
-                <a:latin typeface="DejaVu Sans"/>
-              </a:defRPr>
-            </a:pPr>
-            <a:r>
-              <a:t>После 20-й минуты: сравним ход выполнения G1–G3, объясним две общие ошибки, заново решим один исправленный шаг.</a:t>
-            </a:r>
-          </a:p>
-        </p:txBody>
-      </p:sp>
-      <p:sp>
-        <p:nvSpPr>
-          <p:cNvPr id="4" name="TextBox 3"/>
-          <p:cNvSpPr txBox="1"/>
-          <p:nvPr/>
-        </p:nvSpPr>
-        <p:spPr>
-          <a:xfrm>
-            <a:off x="731520" y="6400800"/>
-            <a:ext cx="10789920" cy="274320"/>
-          </a:xfrm>
-          <a:prstGeom prst="rect">
-            <a:avLst/>
-          </a:prstGeom>
-          <a:noFill/>
-        </p:spPr>
-        <p:txBody>
-          <a:bodyPr wrap="none">
-            <a:spAutoFit/>
-          </a:bodyPr>
-          <a:lstStyle/>
-          <a:p>
-            <a:pPr>
-              <a:defRPr sz="1200"/>
-            </a:pPr>
-            <a:r>
-              <a:t>Черновик для проверки преподавателем • 15</a:t>
-            </a:r>
-          </a:p>
-        </p:txBody>
-      </p:sp>
+      </p:pic>
     </p:spTree>
   </p:cSld>
   <p:clrMapOvr>
@@ -7056,14 +6415,6 @@
 <file path=ppt/slides/slide16.xml><?xml version="1.0" encoding="utf-8"?>
 <p:sld xmlns:a="http://schemas.openxmlformats.org/drawingml/2006/main" xmlns:p="http://schemas.openxmlformats.org/presentationml/2006/main" xmlns:r="http://schemas.openxmlformats.org/officeDocument/2006/relationships">
   <p:cSld>
-    <p:bg>
-      <p:bgPr>
-        <a:solidFill>
-          <a:srgbClr val="F8FAFC"/>
-        </a:solidFill>
-        <a:effectLst/>
-      </p:bgPr>
-    </p:bg>
     <p:spTree>
       <p:nvGrpSpPr>
         <p:cNvPr id="1" name=""/>
@@ -7071,159 +6422,156 @@
         <p:nvPr/>
       </p:nvGrpSpPr>
       <p:grpSpPr/>
-      <p:sp>
-        <p:nvSpPr>
-          <p:cNvPr id="2" name="TextBox 1"/>
-          <p:cNvSpPr txBox="1"/>
+      <p:pic>
+        <p:nvPicPr>
+          <p:cNvPr id="2" name="Picture 1" descr="s16.png"/>
+          <p:cNvPicPr>
+            <a:picLocks noChangeAspect="1"/>
+          </p:cNvPicPr>
           <p:nvPr/>
-        </p:nvSpPr>
+        </p:nvPicPr>
+        <p:blipFill>
+          <a:blip r:embed="rId2"/>
+          <a:stretch>
+            <a:fillRect/>
+          </a:stretch>
+        </p:blipFill>
         <p:spPr>
           <a:xfrm>
-            <a:off x="640080" y="365760"/>
-            <a:ext cx="10972800" cy="822960"/>
+            <a:off x="0" y="0"/>
+            <a:ext cx="12191695" cy="6858000"/>
           </a:xfrm>
           <a:prstGeom prst="rect">
             <a:avLst/>
           </a:prstGeom>
-          <a:noFill/>
         </p:spPr>
-        <p:txBody>
-          <a:bodyPr wrap="none">
-            <a:spAutoFit/>
-          </a:bodyPr>
-          <a:lstStyle/>
-          <a:p>
-            <a:pPr>
-              <a:defRPr sz="2800" b="1">
-                <a:solidFill>
-                  <a:srgbClr val="0F172A"/>
-                </a:solidFill>
-              </a:defRPr>
-            </a:pPr>
-            <a:r>
-              <a:t>Слайд 16. Новый вариант, затем проверка</a:t>
-            </a:r>
-          </a:p>
-        </p:txBody>
-      </p:sp>
-      <p:sp>
-        <p:nvSpPr>
-          <p:cNvPr id="3" name="TextBox 2"/>
-          <p:cNvSpPr txBox="1"/>
+      </p:pic>
+    </p:spTree>
+  </p:cSld>
+  <p:clrMapOvr>
+    <a:masterClrMapping/>
+  </p:clrMapOvr>
+</p:sld>
+</file>
+
+<file path=ppt/slides/slide17.xml><?xml version="1.0" encoding="utf-8"?>
+<p:sld xmlns:a="http://schemas.openxmlformats.org/drawingml/2006/main" xmlns:p="http://schemas.openxmlformats.org/presentationml/2006/main" xmlns:r="http://schemas.openxmlformats.org/officeDocument/2006/relationships">
+  <p:cSld>
+    <p:spTree>
+      <p:nvGrpSpPr>
+        <p:cNvPr id="1" name=""/>
+        <p:cNvGrpSpPr/>
+        <p:nvPr/>
+      </p:nvGrpSpPr>
+      <p:grpSpPr/>
+      <p:pic>
+        <p:nvPicPr>
+          <p:cNvPr id="2" name="Picture 1" descr="s17.png"/>
+          <p:cNvPicPr>
+            <a:picLocks noChangeAspect="1"/>
+          </p:cNvPicPr>
           <p:nvPr/>
-        </p:nvSpPr>
+        </p:nvPicPr>
+        <p:blipFill>
+          <a:blip r:embed="rId2"/>
+          <a:stretch>
+            <a:fillRect/>
+          </a:stretch>
+        </p:blipFill>
         <p:spPr>
           <a:xfrm>
-            <a:off x="731520" y="1417320"/>
-            <a:ext cx="10789920" cy="4709160"/>
+            <a:off x="0" y="0"/>
+            <a:ext cx="12191695" cy="6858000"/>
           </a:xfrm>
           <a:prstGeom prst="rect">
             <a:avLst/>
           </a:prstGeom>
-          <a:noFill/>
         </p:spPr>
-        <p:txBody>
-          <a:bodyPr wrap="square">
-            <a:spAutoFit/>
-          </a:bodyPr>
-          <a:lstStyle/>
-          <a:p>
-            <a:pPr>
-              <a:spcAft>
-                <a:spcPts val="300"/>
-              </a:spcAft>
-              <a:defRPr sz="2200">
-                <a:solidFill>
-                  <a:srgbClr val="1E293B"/>
-                </a:solidFill>
-                <a:latin typeface="DejaVu Sans"/>
-              </a:defRPr>
-            </a:pPr>
-            <a:r>
-              <a:t>P2.7. Где ровно 12 атомов O в представленных единицах? A) 3CO₂; B) 4H₂O; C) 2Ca(OH)₂; D) 3SO₄²⁻. Подтверди выбранный ответ и объясни один неверный.</a:t>
-            </a:r>
-          </a:p>
-          <a:p>
-            <a:pPr>
-              <a:spcAft>
-                <a:spcPts val="300"/>
-              </a:spcAft>
-              <a:defRPr sz="2200">
-                <a:solidFill>
-                  <a:srgbClr val="1E293B"/>
-                </a:solidFill>
-                <a:latin typeface="DejaVu Sans"/>
-              </a:defRPr>
-            </a:pPr>
-            <a:r>
-              <a:t>P2.8. Целое 0,50 кг, часть 25 г. Ученик написал 25/0,50 × 100% = 5000%. Найди первую ошибку, реши верно и проверь обратно.</a:t>
-            </a:r>
-          </a:p>
-          <a:p>
-            <a:pPr>
-              <a:spcAft>
-                <a:spcPts val="300"/>
-              </a:spcAft>
-              <a:defRPr sz="2200">
-                <a:solidFill>
-                  <a:srgbClr val="1E293B"/>
-                </a:solidFill>
-                <a:latin typeface="DejaVu Sans"/>
-              </a:defRPr>
-            </a:pPr>
-            <a:r>
-              <a:t>В конце: Q1–Q6, 10 минут, без ключа до сдачи.</a:t>
-            </a:r>
-          </a:p>
-          <a:p>
-            <a:pPr>
-              <a:spcAft>
-                <a:spcPts val="300"/>
-              </a:spcAft>
-              <a:defRPr sz="2200">
-                <a:solidFill>
-                  <a:srgbClr val="1E293B"/>
-                </a:solidFill>
-                <a:latin typeface="DejaVu Sans"/>
-              </a:defRPr>
-            </a:pPr>
-            <a:r>
-              <a:t>После урока: G4–G8 + один вариант A/B/C, 50 минут; исправления — 25 минут, повторение — 15 минут. Все самостоятельные части недели вместе — 150 минут.</a:t>
-            </a:r>
-          </a:p>
-        </p:txBody>
-      </p:sp>
-      <p:sp>
-        <p:nvSpPr>
-          <p:cNvPr id="4" name="TextBox 3"/>
-          <p:cNvSpPr txBox="1"/>
+      </p:pic>
+    </p:spTree>
+  </p:cSld>
+  <p:clrMapOvr>
+    <a:masterClrMapping/>
+  </p:clrMapOvr>
+</p:sld>
+</file>
+
+<file path=ppt/slides/slide18.xml><?xml version="1.0" encoding="utf-8"?>
+<p:sld xmlns:a="http://schemas.openxmlformats.org/drawingml/2006/main" xmlns:p="http://schemas.openxmlformats.org/presentationml/2006/main" xmlns:r="http://schemas.openxmlformats.org/officeDocument/2006/relationships">
+  <p:cSld>
+    <p:spTree>
+      <p:nvGrpSpPr>
+        <p:cNvPr id="1" name=""/>
+        <p:cNvGrpSpPr/>
+        <p:nvPr/>
+      </p:nvGrpSpPr>
+      <p:grpSpPr/>
+      <p:pic>
+        <p:nvPicPr>
+          <p:cNvPr id="2" name="Picture 1" descr="s18.png"/>
+          <p:cNvPicPr>
+            <a:picLocks noChangeAspect="1"/>
+          </p:cNvPicPr>
           <p:nvPr/>
-        </p:nvSpPr>
+        </p:nvPicPr>
+        <p:blipFill>
+          <a:blip r:embed="rId2"/>
+          <a:stretch>
+            <a:fillRect/>
+          </a:stretch>
+        </p:blipFill>
         <p:spPr>
           <a:xfrm>
-            <a:off x="731520" y="6400800"/>
-            <a:ext cx="10789920" cy="274320"/>
+            <a:off x="0" y="0"/>
+            <a:ext cx="12191695" cy="6858000"/>
           </a:xfrm>
           <a:prstGeom prst="rect">
             <a:avLst/>
           </a:prstGeom>
-          <a:noFill/>
         </p:spPr>
-        <p:txBody>
-          <a:bodyPr wrap="none">
-            <a:spAutoFit/>
-          </a:bodyPr>
-          <a:lstStyle/>
-          <a:p>
-            <a:pPr>
-              <a:defRPr sz="1200"/>
-            </a:pPr>
-            <a:r>
-              <a:t>Черновик для проверки преподавателем • 16</a:t>
-            </a:r>
-          </a:p>
-        </p:txBody>
-      </p:sp>
+      </p:pic>
+    </p:spTree>
+  </p:cSld>
+  <p:clrMapOvr>
+    <a:masterClrMapping/>
+  </p:clrMapOvr>
+</p:sld>
+</file>
+
+<file path=ppt/slides/slide19.xml><?xml version="1.0" encoding="utf-8"?>
+<p:sld xmlns:a="http://schemas.openxmlformats.org/drawingml/2006/main" xmlns:p="http://schemas.openxmlformats.org/presentationml/2006/main" xmlns:r="http://schemas.openxmlformats.org/officeDocument/2006/relationships">
+  <p:cSld>
+    <p:spTree>
+      <p:nvGrpSpPr>
+        <p:cNvPr id="1" name=""/>
+        <p:cNvGrpSpPr/>
+        <p:nvPr/>
+      </p:nvGrpSpPr>
+      <p:grpSpPr/>
+      <p:pic>
+        <p:nvPicPr>
+          <p:cNvPr id="2" name="Picture 1" descr="s19.png"/>
+          <p:cNvPicPr>
+            <a:picLocks noChangeAspect="1"/>
+          </p:cNvPicPr>
+          <p:nvPr/>
+        </p:nvPicPr>
+        <p:blipFill>
+          <a:blip r:embed="rId2"/>
+          <a:stretch>
+            <a:fillRect/>
+          </a:stretch>
+        </p:blipFill>
+        <p:spPr>
+          <a:xfrm>
+            <a:off x="0" y="0"/>
+            <a:ext cx="12191695" cy="6858000"/>
+          </a:xfrm>
+          <a:prstGeom prst="rect">
+            <a:avLst/>
+          </a:prstGeom>
+        </p:spPr>
+      </p:pic>
     </p:spTree>
   </p:cSld>
   <p:clrMapOvr>
@@ -7235,14 +6583,6 @@
 <file path=ppt/slides/slide2.xml><?xml version="1.0" encoding="utf-8"?>
 <p:sld xmlns:a="http://schemas.openxmlformats.org/drawingml/2006/main" xmlns:p="http://schemas.openxmlformats.org/presentationml/2006/main" xmlns:r="http://schemas.openxmlformats.org/officeDocument/2006/relationships">
   <p:cSld>
-    <p:bg>
-      <p:bgPr>
-        <a:solidFill>
-          <a:srgbClr val="F8FAFC"/>
-        </a:solidFill>
-        <a:effectLst/>
-      </p:bgPr>
-    </p:bg>
     <p:spTree>
       <p:nvGrpSpPr>
         <p:cNvPr id="1" name=""/>
@@ -7250,159 +6590,450 @@
         <p:nvPr/>
       </p:nvGrpSpPr>
       <p:grpSpPr/>
-      <p:sp>
-        <p:nvSpPr>
-          <p:cNvPr id="2" name="TextBox 1"/>
-          <p:cNvSpPr txBox="1"/>
+      <p:pic>
+        <p:nvPicPr>
+          <p:cNvPr id="2" name="Picture 1" descr="s02.png"/>
+          <p:cNvPicPr>
+            <a:picLocks noChangeAspect="1"/>
+          </p:cNvPicPr>
           <p:nvPr/>
-        </p:nvSpPr>
+        </p:nvPicPr>
+        <p:blipFill>
+          <a:blip r:embed="rId2"/>
+          <a:stretch>
+            <a:fillRect/>
+          </a:stretch>
+        </p:blipFill>
         <p:spPr>
           <a:xfrm>
-            <a:off x="640080" y="365760"/>
-            <a:ext cx="10972800" cy="822960"/>
+            <a:off x="0" y="0"/>
+            <a:ext cx="12191695" cy="6858000"/>
           </a:xfrm>
           <a:prstGeom prst="rect">
             <a:avLst/>
           </a:prstGeom>
-          <a:noFill/>
         </p:spPr>
-        <p:txBody>
-          <a:bodyPr wrap="none">
-            <a:spAutoFit/>
-          </a:bodyPr>
-          <a:lstStyle/>
-          <a:p>
-            <a:pPr>
-              <a:defRPr sz="2800" b="1">
-                <a:solidFill>
-                  <a:srgbClr val="0F172A"/>
-                </a:solidFill>
-              </a:defRPr>
-            </a:pPr>
-            <a:r>
-              <a:t>Слайд 2. Атом, молекула, ион</a:t>
-            </a:r>
-          </a:p>
-        </p:txBody>
-      </p:sp>
-      <p:sp>
-        <p:nvSpPr>
-          <p:cNvPr id="3" name="TextBox 2"/>
-          <p:cNvSpPr txBox="1"/>
+      </p:pic>
+    </p:spTree>
+  </p:cSld>
+  <p:clrMapOvr>
+    <a:masterClrMapping/>
+  </p:clrMapOvr>
+</p:sld>
+</file>
+
+<file path=ppt/slides/slide20.xml><?xml version="1.0" encoding="utf-8"?>
+<p:sld xmlns:a="http://schemas.openxmlformats.org/drawingml/2006/main" xmlns:p="http://schemas.openxmlformats.org/presentationml/2006/main" xmlns:r="http://schemas.openxmlformats.org/officeDocument/2006/relationships">
+  <p:cSld>
+    <p:spTree>
+      <p:nvGrpSpPr>
+        <p:cNvPr id="1" name=""/>
+        <p:cNvGrpSpPr/>
+        <p:nvPr/>
+      </p:nvGrpSpPr>
+      <p:grpSpPr/>
+      <p:pic>
+        <p:nvPicPr>
+          <p:cNvPr id="2" name="Picture 1" descr="s20.png"/>
+          <p:cNvPicPr>
+            <a:picLocks noChangeAspect="1"/>
+          </p:cNvPicPr>
           <p:nvPr/>
-        </p:nvSpPr>
+        </p:nvPicPr>
+        <p:blipFill>
+          <a:blip r:embed="rId2"/>
+          <a:stretch>
+            <a:fillRect/>
+          </a:stretch>
+        </p:blipFill>
         <p:spPr>
           <a:xfrm>
-            <a:off x="731520" y="1417320"/>
-            <a:ext cx="10789920" cy="4709160"/>
+            <a:off x="0" y="0"/>
+            <a:ext cx="12191695" cy="6858000"/>
           </a:xfrm>
           <a:prstGeom prst="rect">
             <a:avLst/>
           </a:prstGeom>
-          <a:noFill/>
         </p:spPr>
-        <p:txBody>
-          <a:bodyPr wrap="square">
-            <a:spAutoFit/>
-          </a:bodyPr>
-          <a:lstStyle/>
-          <a:p>
-            <a:pPr>
-              <a:spcAft>
-                <a:spcPts val="300"/>
-              </a:spcAft>
-              <a:defRPr sz="2200">
-                <a:solidFill>
-                  <a:srgbClr val="1E293B"/>
-                </a:solidFill>
-                <a:latin typeface="DejaVu Sans"/>
-              </a:defRPr>
-            </a:pPr>
-            <a:r>
-              <a:t>Атом — частица химического элемента. Отдельный атом в наших записях нейтрален: H, He.</a:t>
-            </a:r>
-          </a:p>
-          <a:p>
-            <a:pPr>
-              <a:spcAft>
-                <a:spcPts val="300"/>
-              </a:spcAft>
-              <a:defRPr sz="2200">
-                <a:solidFill>
-                  <a:srgbClr val="1E293B"/>
-                </a:solidFill>
-                <a:latin typeface="DejaVu Sans"/>
-              </a:defRPr>
-            </a:pPr>
-            <a:r>
-              <a:t>Молекула — отдельная нейтральная частица из связанных атомов: O₂, H₂O.</a:t>
-            </a:r>
-          </a:p>
-          <a:p>
-            <a:pPr>
-              <a:spcAft>
-                <a:spcPts val="300"/>
-              </a:spcAft>
-              <a:defRPr sz="2200">
-                <a:solidFill>
-                  <a:srgbClr val="1E293B"/>
-                </a:solidFill>
-                <a:latin typeface="DejaVu Sans"/>
-              </a:defRPr>
-            </a:pPr>
-            <a:r>
-              <a:t>Ион — заряженный атом или группа атомов: Na⁺, Cl⁻, SO₄²⁻.</a:t>
-            </a:r>
-          </a:p>
-          <a:p>
-            <a:pPr>
-              <a:spcAft>
-                <a:spcPts val="300"/>
-              </a:spcAft>
-              <a:defRPr sz="2200">
-                <a:solidFill>
-                  <a:srgbClr val="1E293B"/>
-                </a:solidFill>
-                <a:latin typeface="DejaVu Sans"/>
-              </a:defRPr>
-            </a:pPr>
-            <a:r>
-              <a:t>Ион может содержать один атом или несколько. Число атомов и заряд — разные признаки.</a:t>
-            </a:r>
-          </a:p>
-        </p:txBody>
-      </p:sp>
-      <p:sp>
-        <p:nvSpPr>
-          <p:cNvPr id="4" name="TextBox 3"/>
-          <p:cNvSpPr txBox="1"/>
+      </p:pic>
+    </p:spTree>
+  </p:cSld>
+  <p:clrMapOvr>
+    <a:masterClrMapping/>
+  </p:clrMapOvr>
+</p:sld>
+</file>
+
+<file path=ppt/slides/slide21.xml><?xml version="1.0" encoding="utf-8"?>
+<p:sld xmlns:a="http://schemas.openxmlformats.org/drawingml/2006/main" xmlns:p="http://schemas.openxmlformats.org/presentationml/2006/main" xmlns:r="http://schemas.openxmlformats.org/officeDocument/2006/relationships">
+  <p:cSld>
+    <p:spTree>
+      <p:nvGrpSpPr>
+        <p:cNvPr id="1" name=""/>
+        <p:cNvGrpSpPr/>
+        <p:nvPr/>
+      </p:nvGrpSpPr>
+      <p:grpSpPr/>
+      <p:pic>
+        <p:nvPicPr>
+          <p:cNvPr id="2" name="Picture 1" descr="s21.png"/>
+          <p:cNvPicPr>
+            <a:picLocks noChangeAspect="1"/>
+          </p:cNvPicPr>
           <p:nvPr/>
-        </p:nvSpPr>
+        </p:nvPicPr>
+        <p:blipFill>
+          <a:blip r:embed="rId2"/>
+          <a:stretch>
+            <a:fillRect/>
+          </a:stretch>
+        </p:blipFill>
         <p:spPr>
           <a:xfrm>
-            <a:off x="731520" y="6400800"/>
-            <a:ext cx="10789920" cy="274320"/>
+            <a:off x="0" y="0"/>
+            <a:ext cx="12191695" cy="6858000"/>
           </a:xfrm>
           <a:prstGeom prst="rect">
             <a:avLst/>
           </a:prstGeom>
-          <a:noFill/>
         </p:spPr>
-        <p:txBody>
-          <a:bodyPr wrap="none">
-            <a:spAutoFit/>
-          </a:bodyPr>
-          <a:lstStyle/>
-          <a:p>
-            <a:pPr>
-              <a:defRPr sz="1200"/>
-            </a:pPr>
-            <a:r>
-              <a:t>Черновик для проверки преподавателем • 2</a:t>
-            </a:r>
-          </a:p>
-        </p:txBody>
-      </p:sp>
+      </p:pic>
+    </p:spTree>
+  </p:cSld>
+  <p:clrMapOvr>
+    <a:masterClrMapping/>
+  </p:clrMapOvr>
+</p:sld>
+</file>
+
+<file path=ppt/slides/slide22.xml><?xml version="1.0" encoding="utf-8"?>
+<p:sld xmlns:a="http://schemas.openxmlformats.org/drawingml/2006/main" xmlns:p="http://schemas.openxmlformats.org/presentationml/2006/main" xmlns:r="http://schemas.openxmlformats.org/officeDocument/2006/relationships">
+  <p:cSld>
+    <p:spTree>
+      <p:nvGrpSpPr>
+        <p:cNvPr id="1" name=""/>
+        <p:cNvGrpSpPr/>
+        <p:nvPr/>
+      </p:nvGrpSpPr>
+      <p:grpSpPr/>
+      <p:pic>
+        <p:nvPicPr>
+          <p:cNvPr id="2" name="Picture 1" descr="s22.png"/>
+          <p:cNvPicPr>
+            <a:picLocks noChangeAspect="1"/>
+          </p:cNvPicPr>
+          <p:nvPr/>
+        </p:nvPicPr>
+        <p:blipFill>
+          <a:blip r:embed="rId2"/>
+          <a:stretch>
+            <a:fillRect/>
+          </a:stretch>
+        </p:blipFill>
+        <p:spPr>
+          <a:xfrm>
+            <a:off x="0" y="0"/>
+            <a:ext cx="12191695" cy="6858000"/>
+          </a:xfrm>
+          <a:prstGeom prst="rect">
+            <a:avLst/>
+          </a:prstGeom>
+        </p:spPr>
+      </p:pic>
+    </p:spTree>
+  </p:cSld>
+  <p:clrMapOvr>
+    <a:masterClrMapping/>
+  </p:clrMapOvr>
+</p:sld>
+</file>
+
+<file path=ppt/slides/slide23.xml><?xml version="1.0" encoding="utf-8"?>
+<p:sld xmlns:a="http://schemas.openxmlformats.org/drawingml/2006/main" xmlns:p="http://schemas.openxmlformats.org/presentationml/2006/main" xmlns:r="http://schemas.openxmlformats.org/officeDocument/2006/relationships">
+  <p:cSld>
+    <p:spTree>
+      <p:nvGrpSpPr>
+        <p:cNvPr id="1" name=""/>
+        <p:cNvGrpSpPr/>
+        <p:nvPr/>
+      </p:nvGrpSpPr>
+      <p:grpSpPr/>
+      <p:pic>
+        <p:nvPicPr>
+          <p:cNvPr id="2" name="Picture 1" descr="s23.png"/>
+          <p:cNvPicPr>
+            <a:picLocks noChangeAspect="1"/>
+          </p:cNvPicPr>
+          <p:nvPr/>
+        </p:nvPicPr>
+        <p:blipFill>
+          <a:blip r:embed="rId2"/>
+          <a:stretch>
+            <a:fillRect/>
+          </a:stretch>
+        </p:blipFill>
+        <p:spPr>
+          <a:xfrm>
+            <a:off x="0" y="0"/>
+            <a:ext cx="12191695" cy="6858000"/>
+          </a:xfrm>
+          <a:prstGeom prst="rect">
+            <a:avLst/>
+          </a:prstGeom>
+        </p:spPr>
+      </p:pic>
+    </p:spTree>
+  </p:cSld>
+  <p:clrMapOvr>
+    <a:masterClrMapping/>
+  </p:clrMapOvr>
+</p:sld>
+</file>
+
+<file path=ppt/slides/slide24.xml><?xml version="1.0" encoding="utf-8"?>
+<p:sld xmlns:a="http://schemas.openxmlformats.org/drawingml/2006/main" xmlns:p="http://schemas.openxmlformats.org/presentationml/2006/main" xmlns:r="http://schemas.openxmlformats.org/officeDocument/2006/relationships">
+  <p:cSld>
+    <p:spTree>
+      <p:nvGrpSpPr>
+        <p:cNvPr id="1" name=""/>
+        <p:cNvGrpSpPr/>
+        <p:nvPr/>
+      </p:nvGrpSpPr>
+      <p:grpSpPr/>
+      <p:pic>
+        <p:nvPicPr>
+          <p:cNvPr id="2" name="Picture 1" descr="s24.png"/>
+          <p:cNvPicPr>
+            <a:picLocks noChangeAspect="1"/>
+          </p:cNvPicPr>
+          <p:nvPr/>
+        </p:nvPicPr>
+        <p:blipFill>
+          <a:blip r:embed="rId2"/>
+          <a:stretch>
+            <a:fillRect/>
+          </a:stretch>
+        </p:blipFill>
+        <p:spPr>
+          <a:xfrm>
+            <a:off x="0" y="0"/>
+            <a:ext cx="12191695" cy="6858000"/>
+          </a:xfrm>
+          <a:prstGeom prst="rect">
+            <a:avLst/>
+          </a:prstGeom>
+        </p:spPr>
+      </p:pic>
+    </p:spTree>
+  </p:cSld>
+  <p:clrMapOvr>
+    <a:masterClrMapping/>
+  </p:clrMapOvr>
+</p:sld>
+</file>
+
+<file path=ppt/slides/slide25.xml><?xml version="1.0" encoding="utf-8"?>
+<p:sld xmlns:a="http://schemas.openxmlformats.org/drawingml/2006/main" xmlns:p="http://schemas.openxmlformats.org/presentationml/2006/main" xmlns:r="http://schemas.openxmlformats.org/officeDocument/2006/relationships">
+  <p:cSld>
+    <p:spTree>
+      <p:nvGrpSpPr>
+        <p:cNvPr id="1" name=""/>
+        <p:cNvGrpSpPr/>
+        <p:nvPr/>
+      </p:nvGrpSpPr>
+      <p:grpSpPr/>
+      <p:pic>
+        <p:nvPicPr>
+          <p:cNvPr id="2" name="Picture 1" descr="s25.png"/>
+          <p:cNvPicPr>
+            <a:picLocks noChangeAspect="1"/>
+          </p:cNvPicPr>
+          <p:nvPr/>
+        </p:nvPicPr>
+        <p:blipFill>
+          <a:blip r:embed="rId2"/>
+          <a:stretch>
+            <a:fillRect/>
+          </a:stretch>
+        </p:blipFill>
+        <p:spPr>
+          <a:xfrm>
+            <a:off x="0" y="0"/>
+            <a:ext cx="12191695" cy="6858000"/>
+          </a:xfrm>
+          <a:prstGeom prst="rect">
+            <a:avLst/>
+          </a:prstGeom>
+        </p:spPr>
+      </p:pic>
+    </p:spTree>
+  </p:cSld>
+  <p:clrMapOvr>
+    <a:masterClrMapping/>
+  </p:clrMapOvr>
+</p:sld>
+</file>
+
+<file path=ppt/slides/slide26.xml><?xml version="1.0" encoding="utf-8"?>
+<p:sld xmlns:a="http://schemas.openxmlformats.org/drawingml/2006/main" xmlns:p="http://schemas.openxmlformats.org/presentationml/2006/main" xmlns:r="http://schemas.openxmlformats.org/officeDocument/2006/relationships">
+  <p:cSld>
+    <p:spTree>
+      <p:nvGrpSpPr>
+        <p:cNvPr id="1" name=""/>
+        <p:cNvGrpSpPr/>
+        <p:nvPr/>
+      </p:nvGrpSpPr>
+      <p:grpSpPr/>
+      <p:pic>
+        <p:nvPicPr>
+          <p:cNvPr id="2" name="Picture 1" descr="s26.png"/>
+          <p:cNvPicPr>
+            <a:picLocks noChangeAspect="1"/>
+          </p:cNvPicPr>
+          <p:nvPr/>
+        </p:nvPicPr>
+        <p:blipFill>
+          <a:blip r:embed="rId2"/>
+          <a:stretch>
+            <a:fillRect/>
+          </a:stretch>
+        </p:blipFill>
+        <p:spPr>
+          <a:xfrm>
+            <a:off x="0" y="0"/>
+            <a:ext cx="12191695" cy="6858000"/>
+          </a:xfrm>
+          <a:prstGeom prst="rect">
+            <a:avLst/>
+          </a:prstGeom>
+        </p:spPr>
+      </p:pic>
+    </p:spTree>
+  </p:cSld>
+  <p:clrMapOvr>
+    <a:masterClrMapping/>
+  </p:clrMapOvr>
+</p:sld>
+</file>
+
+<file path=ppt/slides/slide27.xml><?xml version="1.0" encoding="utf-8"?>
+<p:sld xmlns:a="http://schemas.openxmlformats.org/drawingml/2006/main" xmlns:p="http://schemas.openxmlformats.org/presentationml/2006/main" xmlns:r="http://schemas.openxmlformats.org/officeDocument/2006/relationships">
+  <p:cSld>
+    <p:spTree>
+      <p:nvGrpSpPr>
+        <p:cNvPr id="1" name=""/>
+        <p:cNvGrpSpPr/>
+        <p:nvPr/>
+      </p:nvGrpSpPr>
+      <p:grpSpPr/>
+      <p:pic>
+        <p:nvPicPr>
+          <p:cNvPr id="2" name="Picture 1" descr="s27.png"/>
+          <p:cNvPicPr>
+            <a:picLocks noChangeAspect="1"/>
+          </p:cNvPicPr>
+          <p:nvPr/>
+        </p:nvPicPr>
+        <p:blipFill>
+          <a:blip r:embed="rId2"/>
+          <a:stretch>
+            <a:fillRect/>
+          </a:stretch>
+        </p:blipFill>
+        <p:spPr>
+          <a:xfrm>
+            <a:off x="0" y="0"/>
+            <a:ext cx="12191695" cy="6858000"/>
+          </a:xfrm>
+          <a:prstGeom prst="rect">
+            <a:avLst/>
+          </a:prstGeom>
+        </p:spPr>
+      </p:pic>
+    </p:spTree>
+  </p:cSld>
+  <p:clrMapOvr>
+    <a:masterClrMapping/>
+  </p:clrMapOvr>
+</p:sld>
+</file>
+
+<file path=ppt/slides/slide28.xml><?xml version="1.0" encoding="utf-8"?>
+<p:sld xmlns:a="http://schemas.openxmlformats.org/drawingml/2006/main" xmlns:p="http://schemas.openxmlformats.org/presentationml/2006/main" xmlns:r="http://schemas.openxmlformats.org/officeDocument/2006/relationships">
+  <p:cSld>
+    <p:spTree>
+      <p:nvGrpSpPr>
+        <p:cNvPr id="1" name=""/>
+        <p:cNvGrpSpPr/>
+        <p:nvPr/>
+      </p:nvGrpSpPr>
+      <p:grpSpPr/>
+      <p:pic>
+        <p:nvPicPr>
+          <p:cNvPr id="2" name="Picture 1" descr="s28.png"/>
+          <p:cNvPicPr>
+            <a:picLocks noChangeAspect="1"/>
+          </p:cNvPicPr>
+          <p:nvPr/>
+        </p:nvPicPr>
+        <p:blipFill>
+          <a:blip r:embed="rId2"/>
+          <a:stretch>
+            <a:fillRect/>
+          </a:stretch>
+        </p:blipFill>
+        <p:spPr>
+          <a:xfrm>
+            <a:off x="0" y="0"/>
+            <a:ext cx="12191695" cy="6858000"/>
+          </a:xfrm>
+          <a:prstGeom prst="rect">
+            <a:avLst/>
+          </a:prstGeom>
+        </p:spPr>
+      </p:pic>
+    </p:spTree>
+  </p:cSld>
+  <p:clrMapOvr>
+    <a:masterClrMapping/>
+  </p:clrMapOvr>
+</p:sld>
+</file>
+
+<file path=ppt/slides/slide29.xml><?xml version="1.0" encoding="utf-8"?>
+<p:sld xmlns:a="http://schemas.openxmlformats.org/drawingml/2006/main" xmlns:p="http://schemas.openxmlformats.org/presentationml/2006/main" xmlns:r="http://schemas.openxmlformats.org/officeDocument/2006/relationships">
+  <p:cSld>
+    <p:spTree>
+      <p:nvGrpSpPr>
+        <p:cNvPr id="1" name=""/>
+        <p:cNvGrpSpPr/>
+        <p:nvPr/>
+      </p:nvGrpSpPr>
+      <p:grpSpPr/>
+      <p:pic>
+        <p:nvPicPr>
+          <p:cNvPr id="2" name="Picture 1" descr="s29.png"/>
+          <p:cNvPicPr>
+            <a:picLocks noChangeAspect="1"/>
+          </p:cNvPicPr>
+          <p:nvPr/>
+        </p:nvPicPr>
+        <p:blipFill>
+          <a:blip r:embed="rId2"/>
+          <a:stretch>
+            <a:fillRect/>
+          </a:stretch>
+        </p:blipFill>
+        <p:spPr>
+          <a:xfrm>
+            <a:off x="0" y="0"/>
+            <a:ext cx="12191695" cy="6858000"/>
+          </a:xfrm>
+          <a:prstGeom prst="rect">
+            <a:avLst/>
+          </a:prstGeom>
+        </p:spPr>
+      </p:pic>
     </p:spTree>
   </p:cSld>
   <p:clrMapOvr>
@@ -7414,14 +7045,6 @@
 <file path=ppt/slides/slide3.xml><?xml version="1.0" encoding="utf-8"?>
 <p:sld xmlns:a="http://schemas.openxmlformats.org/drawingml/2006/main" xmlns:p="http://schemas.openxmlformats.org/presentationml/2006/main" xmlns:r="http://schemas.openxmlformats.org/officeDocument/2006/relationships">
   <p:cSld>
-    <p:bg>
-      <p:bgPr>
-        <a:solidFill>
-          <a:srgbClr val="F8FAFC"/>
-        </a:solidFill>
-        <a:effectLst/>
-      </p:bgPr>
-    </p:bg>
     <p:spTree>
       <p:nvGrpSpPr>
         <p:cNvPr id="1" name=""/>
@@ -7429,239 +7052,198 @@
         <p:nvPr/>
       </p:nvGrpSpPr>
       <p:grpSpPr/>
-      <p:sp>
-        <p:nvSpPr>
-          <p:cNvPr id="2" name="TextBox 1"/>
-          <p:cNvSpPr txBox="1"/>
+      <p:pic>
+        <p:nvPicPr>
+          <p:cNvPr id="2" name="Picture 1" descr="s03.png"/>
+          <p:cNvPicPr>
+            <a:picLocks noChangeAspect="1"/>
+          </p:cNvPicPr>
           <p:nvPr/>
-        </p:nvSpPr>
+        </p:nvPicPr>
+        <p:blipFill>
+          <a:blip r:embed="rId2"/>
+          <a:stretch>
+            <a:fillRect/>
+          </a:stretch>
+        </p:blipFill>
         <p:spPr>
           <a:xfrm>
-            <a:off x="640080" y="365760"/>
-            <a:ext cx="10972800" cy="822960"/>
+            <a:off x="0" y="0"/>
+            <a:ext cx="12191695" cy="6858000"/>
           </a:xfrm>
           <a:prstGeom prst="rect">
             <a:avLst/>
           </a:prstGeom>
-          <a:noFill/>
         </p:spPr>
-        <p:txBody>
-          <a:bodyPr wrap="none">
-            <a:spAutoFit/>
-          </a:bodyPr>
-          <a:lstStyle/>
-          <a:p>
-            <a:pPr>
-              <a:defRPr sz="2800" b="1">
-                <a:solidFill>
-                  <a:srgbClr val="0F172A"/>
-                </a:solidFill>
-              </a:defRPr>
-            </a:pPr>
-            <a:r>
-              <a:t>Слайд 3. Символ — одна или две буквы</a:t>
-            </a:r>
-          </a:p>
-        </p:txBody>
-      </p:sp>
-      <p:sp>
-        <p:nvSpPr>
-          <p:cNvPr id="3" name="TextBox 2"/>
-          <p:cNvSpPr txBox="1"/>
+      </p:pic>
+    </p:spTree>
+  </p:cSld>
+  <p:clrMapOvr>
+    <a:masterClrMapping/>
+  </p:clrMapOvr>
+</p:sld>
+</file>
+
+<file path=ppt/slides/slide30.xml><?xml version="1.0" encoding="utf-8"?>
+<p:sld xmlns:a="http://schemas.openxmlformats.org/drawingml/2006/main" xmlns:p="http://schemas.openxmlformats.org/presentationml/2006/main" xmlns:r="http://schemas.openxmlformats.org/officeDocument/2006/relationships">
+  <p:cSld>
+    <p:spTree>
+      <p:nvGrpSpPr>
+        <p:cNvPr id="1" name=""/>
+        <p:cNvGrpSpPr/>
+        <p:nvPr/>
+      </p:nvGrpSpPr>
+      <p:grpSpPr/>
+      <p:pic>
+        <p:nvPicPr>
+          <p:cNvPr id="2" name="Picture 1" descr="s30.png"/>
+          <p:cNvPicPr>
+            <a:picLocks noChangeAspect="1"/>
+          </p:cNvPicPr>
           <p:nvPr/>
-        </p:nvSpPr>
+        </p:nvPicPr>
+        <p:blipFill>
+          <a:blip r:embed="rId2"/>
+          <a:stretch>
+            <a:fillRect/>
+          </a:stretch>
+        </p:blipFill>
         <p:spPr>
           <a:xfrm>
-            <a:off x="731520" y="1417320"/>
-            <a:ext cx="10789920" cy="4709160"/>
+            <a:off x="0" y="0"/>
+            <a:ext cx="12191695" cy="6858000"/>
           </a:xfrm>
           <a:prstGeom prst="rect">
             <a:avLst/>
           </a:prstGeom>
-          <a:noFill/>
         </p:spPr>
-        <p:txBody>
-          <a:bodyPr wrap="square">
-            <a:spAutoFit/>
-          </a:bodyPr>
-          <a:lstStyle/>
-          <a:p>
-            <a:pPr>
-              <a:spcAft>
-                <a:spcPts val="300"/>
-              </a:spcAft>
-              <a:defRPr sz="2200">
-                <a:solidFill>
-                  <a:srgbClr val="1E293B"/>
-                </a:solidFill>
-                <a:latin typeface="DejaVu Sans"/>
-              </a:defRPr>
-            </a:pPr>
-            <a:r>
-              <a:t>Химический элемент — вид атомов. Его символ начинается с заглавной буквы; вторая буква строчная.</a:t>
-            </a:r>
-          </a:p>
-          <a:p>
-            <a:pPr>
-              <a:spcAft>
-                <a:spcPts val="300"/>
-              </a:spcAft>
-              <a:defRPr sz="2200">
-                <a:solidFill>
-                  <a:srgbClr val="1E293B"/>
-                </a:solidFill>
-                <a:latin typeface="DejaVu Sans"/>
-              </a:defRPr>
-            </a:pPr>
-            <a:r>
-              <a:t>Символ  ·  Элемент  ·  Символ  ·  Элемент</a:t>
-            </a:r>
-          </a:p>
-          <a:p>
-            <a:pPr>
-              <a:spcAft>
-                <a:spcPts val="300"/>
-              </a:spcAft>
-              <a:defRPr sz="2200">
-                <a:solidFill>
-                  <a:srgbClr val="1E293B"/>
-                </a:solidFill>
-                <a:latin typeface="DejaVu Sans"/>
-              </a:defRPr>
-            </a:pPr>
-            <a:r>
-              <a:t>H  ·  водород  ·  He  ·  гелий</a:t>
-            </a:r>
-          </a:p>
-          <a:p>
-            <a:pPr>
-              <a:spcAft>
-                <a:spcPts val="300"/>
-              </a:spcAft>
-              <a:defRPr sz="2200">
-                <a:solidFill>
-                  <a:srgbClr val="1E293B"/>
-                </a:solidFill>
-                <a:latin typeface="DejaVu Sans"/>
-              </a:defRPr>
-            </a:pPr>
-            <a:r>
-              <a:t>O  ·  кислород  ·  N  ·  азот</a:t>
-            </a:r>
-          </a:p>
-          <a:p>
-            <a:pPr>
-              <a:spcAft>
-                <a:spcPts val="300"/>
-              </a:spcAft>
-              <a:defRPr sz="2200">
-                <a:solidFill>
-                  <a:srgbClr val="1E293B"/>
-                </a:solidFill>
-                <a:latin typeface="DejaVu Sans"/>
-              </a:defRPr>
-            </a:pPr>
-            <a:r>
-              <a:t>C  ·  углерод  ·  S  ·  сера</a:t>
-            </a:r>
-          </a:p>
-          <a:p>
-            <a:pPr>
-              <a:spcAft>
-                <a:spcPts val="300"/>
-              </a:spcAft>
-              <a:defRPr sz="2200">
-                <a:solidFill>
-                  <a:srgbClr val="1E293B"/>
-                </a:solidFill>
-                <a:latin typeface="DejaVu Sans"/>
-              </a:defRPr>
-            </a:pPr>
-            <a:r>
-              <a:t>Na  ·  натрий  ·  Cl  ·  хлор</a:t>
-            </a:r>
-          </a:p>
-          <a:p>
-            <a:pPr>
-              <a:spcAft>
-                <a:spcPts val="300"/>
-              </a:spcAft>
-              <a:defRPr sz="2200">
-                <a:solidFill>
-                  <a:srgbClr val="1E293B"/>
-                </a:solidFill>
-                <a:latin typeface="DejaVu Sans"/>
-              </a:defRPr>
-            </a:pPr>
-            <a:r>
-              <a:t>Ca  ·  кальций  ·  Mg  ·  магний</a:t>
-            </a:r>
-          </a:p>
-          <a:p>
-            <a:pPr>
-              <a:spcAft>
-                <a:spcPts val="300"/>
-              </a:spcAft>
-              <a:defRPr sz="2200">
-                <a:solidFill>
-                  <a:srgbClr val="1E293B"/>
-                </a:solidFill>
-                <a:latin typeface="DejaVu Sans"/>
-              </a:defRPr>
-            </a:pPr>
-            <a:r>
-              <a:t>Al  ·  алюминий</a:t>
-            </a:r>
-          </a:p>
-          <a:p>
-            <a:pPr>
-              <a:spcAft>
-                <a:spcPts val="300"/>
-              </a:spcAft>
-              <a:defRPr sz="2200">
-                <a:solidFill>
-                  <a:srgbClr val="1E293B"/>
-                </a:solidFill>
-                <a:latin typeface="DejaVu Sans"/>
-              </a:defRPr>
-            </a:pPr>
-            <a:r>
-              <a:t>В отдельной записи H — один атом водорода; в H₂O символ H указывает элемент в составе воды. Cl — один символ. CO₂ содержит символы C и O.</a:t>
-            </a:r>
-          </a:p>
-        </p:txBody>
-      </p:sp>
-      <p:sp>
-        <p:nvSpPr>
-          <p:cNvPr id="4" name="TextBox 3"/>
-          <p:cNvSpPr txBox="1"/>
+      </p:pic>
+    </p:spTree>
+  </p:cSld>
+  <p:clrMapOvr>
+    <a:masterClrMapping/>
+  </p:clrMapOvr>
+</p:sld>
+</file>
+
+<file path=ppt/slides/slide31.xml><?xml version="1.0" encoding="utf-8"?>
+<p:sld xmlns:a="http://schemas.openxmlformats.org/drawingml/2006/main" xmlns:p="http://schemas.openxmlformats.org/presentationml/2006/main" xmlns:r="http://schemas.openxmlformats.org/officeDocument/2006/relationships">
+  <p:cSld>
+    <p:spTree>
+      <p:nvGrpSpPr>
+        <p:cNvPr id="1" name=""/>
+        <p:cNvGrpSpPr/>
+        <p:nvPr/>
+      </p:nvGrpSpPr>
+      <p:grpSpPr/>
+      <p:pic>
+        <p:nvPicPr>
+          <p:cNvPr id="2" name="Picture 1" descr="s31.png"/>
+          <p:cNvPicPr>
+            <a:picLocks noChangeAspect="1"/>
+          </p:cNvPicPr>
           <p:nvPr/>
-        </p:nvSpPr>
+        </p:nvPicPr>
+        <p:blipFill>
+          <a:blip r:embed="rId2"/>
+          <a:stretch>
+            <a:fillRect/>
+          </a:stretch>
+        </p:blipFill>
         <p:spPr>
           <a:xfrm>
-            <a:off x="731520" y="6400800"/>
-            <a:ext cx="10789920" cy="274320"/>
+            <a:off x="0" y="0"/>
+            <a:ext cx="12191695" cy="6858000"/>
           </a:xfrm>
           <a:prstGeom prst="rect">
             <a:avLst/>
           </a:prstGeom>
-          <a:noFill/>
         </p:spPr>
-        <p:txBody>
-          <a:bodyPr wrap="none">
-            <a:spAutoFit/>
-          </a:bodyPr>
-          <a:lstStyle/>
-          <a:p>
-            <a:pPr>
-              <a:defRPr sz="1200"/>
-            </a:pPr>
-            <a:r>
-              <a:t>Черновик для проверки преподавателем • 3</a:t>
-            </a:r>
-          </a:p>
-        </p:txBody>
-      </p:sp>
+      </p:pic>
+    </p:spTree>
+  </p:cSld>
+  <p:clrMapOvr>
+    <a:masterClrMapping/>
+  </p:clrMapOvr>
+</p:sld>
+</file>
+
+<file path=ppt/slides/slide32.xml><?xml version="1.0" encoding="utf-8"?>
+<p:sld xmlns:a="http://schemas.openxmlformats.org/drawingml/2006/main" xmlns:p="http://schemas.openxmlformats.org/presentationml/2006/main" xmlns:r="http://schemas.openxmlformats.org/officeDocument/2006/relationships">
+  <p:cSld>
+    <p:spTree>
+      <p:nvGrpSpPr>
+        <p:cNvPr id="1" name=""/>
+        <p:cNvGrpSpPr/>
+        <p:nvPr/>
+      </p:nvGrpSpPr>
+      <p:grpSpPr/>
+      <p:pic>
+        <p:nvPicPr>
+          <p:cNvPr id="2" name="Picture 1" descr="s32.png"/>
+          <p:cNvPicPr>
+            <a:picLocks noChangeAspect="1"/>
+          </p:cNvPicPr>
+          <p:nvPr/>
+        </p:nvPicPr>
+        <p:blipFill>
+          <a:blip r:embed="rId2"/>
+          <a:stretch>
+            <a:fillRect/>
+          </a:stretch>
+        </p:blipFill>
+        <p:spPr>
+          <a:xfrm>
+            <a:off x="0" y="0"/>
+            <a:ext cx="12191695" cy="6858000"/>
+          </a:xfrm>
+          <a:prstGeom prst="rect">
+            <a:avLst/>
+          </a:prstGeom>
+        </p:spPr>
+      </p:pic>
+    </p:spTree>
+  </p:cSld>
+  <p:clrMapOvr>
+    <a:masterClrMapping/>
+  </p:clrMapOvr>
+</p:sld>
+</file>
+
+<file path=ppt/slides/slide33.xml><?xml version="1.0" encoding="utf-8"?>
+<p:sld xmlns:a="http://schemas.openxmlformats.org/drawingml/2006/main" xmlns:p="http://schemas.openxmlformats.org/presentationml/2006/main" xmlns:r="http://schemas.openxmlformats.org/officeDocument/2006/relationships">
+  <p:cSld>
+    <p:spTree>
+      <p:nvGrpSpPr>
+        <p:cNvPr id="1" name=""/>
+        <p:cNvGrpSpPr/>
+        <p:nvPr/>
+      </p:nvGrpSpPr>
+      <p:grpSpPr/>
+      <p:pic>
+        <p:nvPicPr>
+          <p:cNvPr id="2" name="Picture 1" descr="s33.png"/>
+          <p:cNvPicPr>
+            <a:picLocks noChangeAspect="1"/>
+          </p:cNvPicPr>
+          <p:nvPr/>
+        </p:nvPicPr>
+        <p:blipFill>
+          <a:blip r:embed="rId2"/>
+          <a:stretch>
+            <a:fillRect/>
+          </a:stretch>
+        </p:blipFill>
+        <p:spPr>
+          <a:xfrm>
+            <a:off x="0" y="0"/>
+            <a:ext cx="12191695" cy="6858000"/>
+          </a:xfrm>
+          <a:prstGeom prst="rect">
+            <a:avLst/>
+          </a:prstGeom>
+        </p:spPr>
+      </p:pic>
     </p:spTree>
   </p:cSld>
   <p:clrMapOvr>
@@ -7673,14 +7255,6 @@
 <file path=ppt/slides/slide4.xml><?xml version="1.0" encoding="utf-8"?>
 <p:sld xmlns:a="http://schemas.openxmlformats.org/drawingml/2006/main" xmlns:p="http://schemas.openxmlformats.org/presentationml/2006/main" xmlns:r="http://schemas.openxmlformats.org/officeDocument/2006/relationships">
   <p:cSld>
-    <p:bg>
-      <p:bgPr>
-        <a:solidFill>
-          <a:srgbClr val="F8FAFC"/>
-        </a:solidFill>
-        <a:effectLst/>
-      </p:bgPr>
-    </p:bg>
     <p:spTree>
       <p:nvGrpSpPr>
         <p:cNvPr id="1" name=""/>
@@ -7688,191 +7262,30 @@
         <p:nvPr/>
       </p:nvGrpSpPr>
       <p:grpSpPr/>
-      <p:sp>
-        <p:nvSpPr>
-          <p:cNvPr id="2" name="TextBox 1"/>
-          <p:cNvSpPr txBox="1"/>
+      <p:pic>
+        <p:nvPicPr>
+          <p:cNvPr id="2" name="Picture 1" descr="s04.png"/>
+          <p:cNvPicPr>
+            <a:picLocks noChangeAspect="1"/>
+          </p:cNvPicPr>
           <p:nvPr/>
-        </p:nvSpPr>
+        </p:nvPicPr>
+        <p:blipFill>
+          <a:blip r:embed="rId2"/>
+          <a:stretch>
+            <a:fillRect/>
+          </a:stretch>
+        </p:blipFill>
         <p:spPr>
           <a:xfrm>
-            <a:off x="640080" y="365760"/>
-            <a:ext cx="10972800" cy="822960"/>
+            <a:off x="0" y="0"/>
+            <a:ext cx="12191695" cy="6858000"/>
           </a:xfrm>
           <a:prstGeom prst="rect">
             <a:avLst/>
           </a:prstGeom>
-          <a:noFill/>
         </p:spPr>
-        <p:txBody>
-          <a:bodyPr wrap="none">
-            <a:spAutoFit/>
-          </a:bodyPr>
-          <a:lstStyle/>
-          <a:p>
-            <a:pPr>
-              <a:defRPr sz="2800" b="1">
-                <a:solidFill>
-                  <a:srgbClr val="0F172A"/>
-                </a:solidFill>
-              </a:defRPr>
-            </a:pPr>
-            <a:r>
-              <a:t>Слайд 4. Индекс описывает одну частицу</a:t>
-            </a:r>
-          </a:p>
-        </p:txBody>
-      </p:sp>
-      <p:sp>
-        <p:nvSpPr>
-          <p:cNvPr id="3" name="TextBox 2"/>
-          <p:cNvSpPr txBox="1"/>
-          <p:nvPr/>
-        </p:nvSpPr>
-        <p:spPr>
-          <a:xfrm>
-            <a:off x="731520" y="1417320"/>
-            <a:ext cx="10789920" cy="4709160"/>
-          </a:xfrm>
-          <a:prstGeom prst="rect">
-            <a:avLst/>
-          </a:prstGeom>
-          <a:noFill/>
-        </p:spPr>
-        <p:txBody>
-          <a:bodyPr wrap="square">
-            <a:spAutoFit/>
-          </a:bodyPr>
-          <a:lstStyle/>
-          <a:p>
-            <a:pPr>
-              <a:spcAft>
-                <a:spcPts val="300"/>
-              </a:spcAft>
-              <a:defRPr sz="2200">
-                <a:solidFill>
-                  <a:srgbClr val="1E293B"/>
-                </a:solidFill>
-                <a:latin typeface="DejaVu Sans"/>
-              </a:defRPr>
-            </a:pPr>
-            <a:r>
-              <a:t>H₂O</a:t>
-            </a:r>
-          </a:p>
-          <a:p>
-            <a:pPr>
-              <a:spcAft>
-                <a:spcPts val="300"/>
-              </a:spcAft>
-              <a:defRPr sz="2200">
-                <a:solidFill>
-                  <a:srgbClr val="1E293B"/>
-                </a:solidFill>
-                <a:latin typeface="DejaVu Sans"/>
-              </a:defRPr>
-            </a:pPr>
-            <a:r>
-              <a:t>₂ справа снизу после H — индекс: 2 атома H.</a:t>
-            </a:r>
-          </a:p>
-          <a:p>
-            <a:pPr>
-              <a:spcAft>
-                <a:spcPts val="300"/>
-              </a:spcAft>
-              <a:defRPr sz="2200">
-                <a:solidFill>
-                  <a:srgbClr val="1E293B"/>
-                </a:solidFill>
-                <a:latin typeface="DejaVu Sans"/>
-              </a:defRPr>
-            </a:pPr>
-            <a:r>
-              <a:t>После O цифры нет: индекс равен 1, значит 1 атом O.</a:t>
-            </a:r>
-          </a:p>
-          <a:p>
-            <a:pPr>
-              <a:spcAft>
-                <a:spcPts val="300"/>
-              </a:spcAft>
-              <a:defRPr sz="2200">
-                <a:solidFill>
-                  <a:srgbClr val="1E293B"/>
-                </a:solidFill>
-                <a:latin typeface="DejaVu Sans"/>
-              </a:defRPr>
-            </a:pPr>
-            <a:r>
-              <a:t>В одной молекуле: 2 + 1 = 3 атома.</a:t>
-            </a:r>
-          </a:p>
-          <a:p>
-            <a:pPr>
-              <a:spcAft>
-                <a:spcPts val="300"/>
-              </a:spcAft>
-              <a:defRPr sz="2200">
-                <a:solidFill>
-                  <a:srgbClr val="1E293B"/>
-                </a:solidFill>
-                <a:latin typeface="DejaVu Sans"/>
-              </a:defRPr>
-            </a:pPr>
-            <a:r>
-              <a:t>Индекс относится к символу перед ним.</a:t>
-            </a:r>
-          </a:p>
-          <a:p>
-            <a:pPr>
-              <a:spcAft>
-                <a:spcPts val="300"/>
-              </a:spcAft>
-              <a:defRPr sz="2200">
-                <a:solidFill>
-                  <a:srgbClr val="1E293B"/>
-                </a:solidFill>
-                <a:latin typeface="DejaVu Sans"/>
-              </a:defRPr>
-            </a:pPr>
-            <a:r>
-              <a:t>H₂O и H₂O₂ — разные составы. Формулу сохраняем как дана.</a:t>
-            </a:r>
-          </a:p>
-        </p:txBody>
-      </p:sp>
-      <p:sp>
-        <p:nvSpPr>
-          <p:cNvPr id="4" name="TextBox 3"/>
-          <p:cNvSpPr txBox="1"/>
-          <p:nvPr/>
-        </p:nvSpPr>
-        <p:spPr>
-          <a:xfrm>
-            <a:off x="731520" y="6400800"/>
-            <a:ext cx="10789920" cy="274320"/>
-          </a:xfrm>
-          <a:prstGeom prst="rect">
-            <a:avLst/>
-          </a:prstGeom>
-          <a:noFill/>
-        </p:spPr>
-        <p:txBody>
-          <a:bodyPr wrap="none">
-            <a:spAutoFit/>
-          </a:bodyPr>
-          <a:lstStyle/>
-          <a:p>
-            <a:pPr>
-              <a:defRPr sz="1200"/>
-            </a:pPr>
-            <a:r>
-              <a:t>Черновик для проверки преподавателем • 4</a:t>
-            </a:r>
-          </a:p>
-        </p:txBody>
-      </p:sp>
+      </p:pic>
     </p:spTree>
   </p:cSld>
   <p:clrMapOvr>
@@ -7884,14 +7297,6 @@
 <file path=ppt/slides/slide5.xml><?xml version="1.0" encoding="utf-8"?>
 <p:sld xmlns:a="http://schemas.openxmlformats.org/drawingml/2006/main" xmlns:p="http://schemas.openxmlformats.org/presentationml/2006/main" xmlns:r="http://schemas.openxmlformats.org/officeDocument/2006/relationships">
   <p:cSld>
-    <p:bg>
-      <p:bgPr>
-        <a:solidFill>
-          <a:srgbClr val="F8FAFC"/>
-        </a:solidFill>
-        <a:effectLst/>
-      </p:bgPr>
-    </p:bg>
     <p:spTree>
       <p:nvGrpSpPr>
         <p:cNvPr id="1" name=""/>
@@ -7899,207 +7304,30 @@
         <p:nvPr/>
       </p:nvGrpSpPr>
       <p:grpSpPr/>
-      <p:sp>
-        <p:nvSpPr>
-          <p:cNvPr id="2" name="TextBox 1"/>
-          <p:cNvSpPr txBox="1"/>
+      <p:pic>
+        <p:nvPicPr>
+          <p:cNvPr id="2" name="Picture 1" descr="s05.png"/>
+          <p:cNvPicPr>
+            <a:picLocks noChangeAspect="1"/>
+          </p:cNvPicPr>
           <p:nvPr/>
-        </p:nvSpPr>
+        </p:nvPicPr>
+        <p:blipFill>
+          <a:blip r:embed="rId2"/>
+          <a:stretch>
+            <a:fillRect/>
+          </a:stretch>
+        </p:blipFill>
         <p:spPr>
           <a:xfrm>
-            <a:off x="640080" y="365760"/>
-            <a:ext cx="10972800" cy="822960"/>
+            <a:off x="0" y="0"/>
+            <a:ext cx="12191695" cy="6858000"/>
           </a:xfrm>
           <a:prstGeom prst="rect">
             <a:avLst/>
           </a:prstGeom>
-          <a:noFill/>
         </p:spPr>
-        <p:txBody>
-          <a:bodyPr wrap="none">
-            <a:spAutoFit/>
-          </a:bodyPr>
-          <a:lstStyle/>
-          <a:p>
-            <a:pPr>
-              <a:defRPr sz="2800" b="1">
-                <a:solidFill>
-                  <a:srgbClr val="0F172A"/>
-                </a:solidFill>
-              </a:defRPr>
-            </a:pPr>
-            <a:r>
-              <a:t>Слайд 5. Коэффициент умножает весь состав</a:t>
-            </a:r>
-          </a:p>
-        </p:txBody>
-      </p:sp>
-      <p:sp>
-        <p:nvSpPr>
-          <p:cNvPr id="3" name="TextBox 2"/>
-          <p:cNvSpPr txBox="1"/>
-          <p:nvPr/>
-        </p:nvSpPr>
-        <p:spPr>
-          <a:xfrm>
-            <a:off x="731520" y="1417320"/>
-            <a:ext cx="10789920" cy="4709160"/>
-          </a:xfrm>
-          <a:prstGeom prst="rect">
-            <a:avLst/>
-          </a:prstGeom>
-          <a:noFill/>
-        </p:spPr>
-        <p:txBody>
-          <a:bodyPr wrap="square">
-            <a:spAutoFit/>
-          </a:bodyPr>
-          <a:lstStyle/>
-          <a:p>
-            <a:pPr>
-              <a:spcAft>
-                <a:spcPts val="300"/>
-              </a:spcAft>
-              <a:defRPr sz="2200">
-                <a:solidFill>
-                  <a:srgbClr val="1E293B"/>
-                </a:solidFill>
-                <a:latin typeface="DejaVu Sans"/>
-              </a:defRPr>
-            </a:pPr>
-            <a:r>
-              <a:t>3H₂O — три молекулы воды.</a:t>
-            </a:r>
-          </a:p>
-          <a:p>
-            <a:pPr>
-              <a:spcAft>
-                <a:spcPts val="300"/>
-              </a:spcAft>
-              <a:defRPr sz="2200">
-                <a:solidFill>
-                  <a:srgbClr val="1E293B"/>
-                </a:solidFill>
-                <a:latin typeface="DejaVu Sans"/>
-              </a:defRPr>
-            </a:pPr>
-            <a:r>
-              <a:t>Элемент  ·  В одной молекуле  ·  В трёх молекулах</a:t>
-            </a:r>
-          </a:p>
-          <a:p>
-            <a:pPr>
-              <a:spcAft>
-                <a:spcPts val="300"/>
-              </a:spcAft>
-              <a:defRPr sz="2200">
-                <a:solidFill>
-                  <a:srgbClr val="1E293B"/>
-                </a:solidFill>
-                <a:latin typeface="DejaVu Sans"/>
-              </a:defRPr>
-            </a:pPr>
-            <a:r>
-              <a:t>H  ·  2  ·  3 × 2 = 6</a:t>
-            </a:r>
-          </a:p>
-          <a:p>
-            <a:pPr>
-              <a:spcAft>
-                <a:spcPts val="300"/>
-              </a:spcAft>
-              <a:defRPr sz="2200">
-                <a:solidFill>
-                  <a:srgbClr val="1E293B"/>
-                </a:solidFill>
-                <a:latin typeface="DejaVu Sans"/>
-              </a:defRPr>
-            </a:pPr>
-            <a:r>
-              <a:t>O  ·  1  ·  3 × 1 = 3</a:t>
-            </a:r>
-          </a:p>
-          <a:p>
-            <a:pPr>
-              <a:spcAft>
-                <a:spcPts val="300"/>
-              </a:spcAft>
-              <a:defRPr sz="2200">
-                <a:solidFill>
-                  <a:srgbClr val="1E293B"/>
-                </a:solidFill>
-                <a:latin typeface="DejaVu Sans"/>
-              </a:defRPr>
-            </a:pPr>
-            <a:r>
-              <a:t>Всего  ·  3  ·  9</a:t>
-            </a:r>
-          </a:p>
-          <a:p>
-            <a:pPr>
-              <a:spcAft>
-                <a:spcPts val="300"/>
-              </a:spcAft>
-              <a:defRPr sz="2200">
-                <a:solidFill>
-                  <a:srgbClr val="1E293B"/>
-                </a:solidFill>
-                <a:latin typeface="DejaVu Sans"/>
-              </a:defRPr>
-            </a:pPr>
-            <a:r>
-              <a:t>3 перед формулой — коэффициент. Если его нет, коэффициент равен 1. Коэффициент умножает количество каждого элемента.</a:t>
-            </a:r>
-          </a:p>
-          <a:p>
-            <a:pPr>
-              <a:spcAft>
-                <a:spcPts val="300"/>
-              </a:spcAft>
-              <a:defRPr sz="2200">
-                <a:solidFill>
-                  <a:srgbClr val="1E293B"/>
-                </a:solidFill>
-                <a:latin typeface="DejaVu Sans"/>
-              </a:defRPr>
-            </a:pPr>
-            <a:r>
-              <a:t>Вопрос: сколько атомов O в 2CO₂?</a:t>
-            </a:r>
-          </a:p>
-        </p:txBody>
-      </p:sp>
-      <p:sp>
-        <p:nvSpPr>
-          <p:cNvPr id="4" name="TextBox 3"/>
-          <p:cNvSpPr txBox="1"/>
-          <p:nvPr/>
-        </p:nvSpPr>
-        <p:spPr>
-          <a:xfrm>
-            <a:off x="731520" y="6400800"/>
-            <a:ext cx="10789920" cy="274320"/>
-          </a:xfrm>
-          <a:prstGeom prst="rect">
-            <a:avLst/>
-          </a:prstGeom>
-          <a:noFill/>
-        </p:spPr>
-        <p:txBody>
-          <a:bodyPr wrap="none">
-            <a:spAutoFit/>
-          </a:bodyPr>
-          <a:lstStyle/>
-          <a:p>
-            <a:pPr>
-              <a:defRPr sz="1200"/>
-            </a:pPr>
-            <a:r>
-              <a:t>Черновик для проверки преподавателем • 5</a:t>
-            </a:r>
-          </a:p>
-        </p:txBody>
-      </p:sp>
+      </p:pic>
     </p:spTree>
   </p:cSld>
   <p:clrMapOvr>
@@ -8111,14 +7339,6 @@
 <file path=ppt/slides/slide6.xml><?xml version="1.0" encoding="utf-8"?>
 <p:sld xmlns:a="http://schemas.openxmlformats.org/drawingml/2006/main" xmlns:p="http://schemas.openxmlformats.org/presentationml/2006/main" xmlns:r="http://schemas.openxmlformats.org/officeDocument/2006/relationships">
   <p:cSld>
-    <p:bg>
-      <p:bgPr>
-        <a:solidFill>
-          <a:srgbClr val="F8FAFC"/>
-        </a:solidFill>
-        <a:effectLst/>
-      </p:bgPr>
-    </p:bg>
     <p:spTree>
       <p:nvGrpSpPr>
         <p:cNvPr id="1" name=""/>
@@ -8126,207 +7346,30 @@
         <p:nvPr/>
       </p:nvGrpSpPr>
       <p:grpSpPr/>
-      <p:sp>
-        <p:nvSpPr>
-          <p:cNvPr id="2" name="TextBox 1"/>
-          <p:cNvSpPr txBox="1"/>
+      <p:pic>
+        <p:nvPicPr>
+          <p:cNvPr id="2" name="Picture 1" descr="s06.png"/>
+          <p:cNvPicPr>
+            <a:picLocks noChangeAspect="1"/>
+          </p:cNvPicPr>
           <p:nvPr/>
-        </p:nvSpPr>
+        </p:nvPicPr>
+        <p:blipFill>
+          <a:blip r:embed="rId2"/>
+          <a:stretch>
+            <a:fillRect/>
+          </a:stretch>
+        </p:blipFill>
         <p:spPr>
           <a:xfrm>
-            <a:off x="640080" y="365760"/>
-            <a:ext cx="10972800" cy="822960"/>
+            <a:off x="0" y="0"/>
+            <a:ext cx="12191695" cy="6858000"/>
           </a:xfrm>
           <a:prstGeom prst="rect">
             <a:avLst/>
           </a:prstGeom>
-          <a:noFill/>
         </p:spPr>
-        <p:txBody>
-          <a:bodyPr wrap="none">
-            <a:spAutoFit/>
-          </a:bodyPr>
-          <a:lstStyle/>
-          <a:p>
-            <a:pPr>
-              <a:defRPr sz="2800" b="1">
-                <a:solidFill>
-                  <a:srgbClr val="0F172A"/>
-                </a:solidFill>
-              </a:defRPr>
-            </a:pPr>
-            <a:r>
-              <a:t>Слайд 6. Скобки собирают группу</a:t>
-            </a:r>
-          </a:p>
-        </p:txBody>
-      </p:sp>
-      <p:sp>
-        <p:nvSpPr>
-          <p:cNvPr id="3" name="TextBox 2"/>
-          <p:cNvSpPr txBox="1"/>
-          <p:nvPr/>
-        </p:nvSpPr>
-        <p:spPr>
-          <a:xfrm>
-            <a:off x="731520" y="1417320"/>
-            <a:ext cx="10789920" cy="4709160"/>
-          </a:xfrm>
-          <a:prstGeom prst="rect">
-            <a:avLst/>
-          </a:prstGeom>
-          <a:noFill/>
-        </p:spPr>
-        <p:txBody>
-          <a:bodyPr wrap="square">
-            <a:spAutoFit/>
-          </a:bodyPr>
-          <a:lstStyle/>
-          <a:p>
-            <a:pPr>
-              <a:spcAft>
-                <a:spcPts val="300"/>
-              </a:spcAft>
-              <a:defRPr sz="2200">
-                <a:solidFill>
-                  <a:srgbClr val="1E293B"/>
-                </a:solidFill>
-                <a:latin typeface="DejaVu Sans"/>
-              </a:defRPr>
-            </a:pPr>
-            <a:r>
-              <a:t>В Ca(OH)₂ индекс ₂ после скобок относится ко всему OH.</a:t>
-            </a:r>
-          </a:p>
-          <a:p>
-            <a:pPr>
-              <a:spcAft>
-                <a:spcPts val="300"/>
-              </a:spcAft>
-              <a:defRPr sz="2200">
-                <a:solidFill>
-                  <a:srgbClr val="1E293B"/>
-                </a:solidFill>
-                <a:latin typeface="DejaVu Sans"/>
-              </a:defRPr>
-            </a:pPr>
-            <a:r>
-              <a:t>Элемент  ·  В Ca(OH)₂  ·  В 2Ca(OH)₂</a:t>
-            </a:r>
-          </a:p>
-          <a:p>
-            <a:pPr>
-              <a:spcAft>
-                <a:spcPts val="300"/>
-              </a:spcAft>
-              <a:defRPr sz="2200">
-                <a:solidFill>
-                  <a:srgbClr val="1E293B"/>
-                </a:solidFill>
-                <a:latin typeface="DejaVu Sans"/>
-              </a:defRPr>
-            </a:pPr>
-            <a:r>
-              <a:t>Ca  ·  1  ·  2</a:t>
-            </a:r>
-          </a:p>
-          <a:p>
-            <a:pPr>
-              <a:spcAft>
-                <a:spcPts val="300"/>
-              </a:spcAft>
-              <a:defRPr sz="2200">
-                <a:solidFill>
-                  <a:srgbClr val="1E293B"/>
-                </a:solidFill>
-                <a:latin typeface="DejaVu Sans"/>
-              </a:defRPr>
-            </a:pPr>
-            <a:r>
-              <a:t>O  ·  1 × 2 = 2  ·  4</a:t>
-            </a:r>
-          </a:p>
-          <a:p>
-            <a:pPr>
-              <a:spcAft>
-                <a:spcPts val="300"/>
-              </a:spcAft>
-              <a:defRPr sz="2200">
-                <a:solidFill>
-                  <a:srgbClr val="1E293B"/>
-                </a:solidFill>
-                <a:latin typeface="DejaVu Sans"/>
-              </a:defRPr>
-            </a:pPr>
-            <a:r>
-              <a:t>H  ·  1 × 2 = 2  ·  4</a:t>
-            </a:r>
-          </a:p>
-          <a:p>
-            <a:pPr>
-              <a:spcAft>
-                <a:spcPts val="300"/>
-              </a:spcAft>
-              <a:defRPr sz="2200">
-                <a:solidFill>
-                  <a:srgbClr val="1E293B"/>
-                </a:solidFill>
-                <a:latin typeface="DejaVu Sans"/>
-              </a:defRPr>
-            </a:pPr>
-            <a:r>
-              <a:t>Всего  ·  5  ·  10</a:t>
-            </a:r>
-          </a:p>
-          <a:p>
-            <a:pPr>
-              <a:spcAft>
-                <a:spcPts val="300"/>
-              </a:spcAft>
-              <a:defRPr sz="2200">
-                <a:solidFill>
-                  <a:srgbClr val="1E293B"/>
-                </a:solidFill>
-                <a:latin typeface="DejaVu Sans"/>
-              </a:defRPr>
-            </a:pPr>
-            <a:r>
-              <a:t>Порядок: индексы внутри → индекс после скобок → коэффициент перед формулой. Здесь считаем состав формульных единиц.</a:t>
-            </a:r>
-          </a:p>
-        </p:txBody>
-      </p:sp>
-      <p:sp>
-        <p:nvSpPr>
-          <p:cNvPr id="4" name="TextBox 3"/>
-          <p:cNvSpPr txBox="1"/>
-          <p:nvPr/>
-        </p:nvSpPr>
-        <p:spPr>
-          <a:xfrm>
-            <a:off x="731520" y="6400800"/>
-            <a:ext cx="10789920" cy="274320"/>
-          </a:xfrm>
-          <a:prstGeom prst="rect">
-            <a:avLst/>
-          </a:prstGeom>
-          <a:noFill/>
-        </p:spPr>
-        <p:txBody>
-          <a:bodyPr wrap="none">
-            <a:spAutoFit/>
-          </a:bodyPr>
-          <a:lstStyle/>
-          <a:p>
-            <a:pPr>
-              <a:defRPr sz="1200"/>
-            </a:pPr>
-            <a:r>
-              <a:t>Черновик для проверки преподавателем • 6</a:t>
-            </a:r>
-          </a:p>
-        </p:txBody>
-      </p:sp>
+      </p:pic>
     </p:spTree>
   </p:cSld>
   <p:clrMapOvr>
@@ -8338,14 +7381,6 @@
 <file path=ppt/slides/slide7.xml><?xml version="1.0" encoding="utf-8"?>
 <p:sld xmlns:a="http://schemas.openxmlformats.org/drawingml/2006/main" xmlns:p="http://schemas.openxmlformats.org/presentationml/2006/main" xmlns:r="http://schemas.openxmlformats.org/officeDocument/2006/relationships">
   <p:cSld>
-    <p:bg>
-      <p:bgPr>
-        <a:solidFill>
-          <a:srgbClr val="F8FAFC"/>
-        </a:solidFill>
-        <a:effectLst/>
-      </p:bgPr>
-    </p:bg>
     <p:spTree>
       <p:nvGrpSpPr>
         <p:cNvPr id="1" name=""/>
@@ -8353,223 +7388,30 @@
         <p:nvPr/>
       </p:nvGrpSpPr>
       <p:grpSpPr/>
-      <p:sp>
-        <p:nvSpPr>
-          <p:cNvPr id="2" name="TextBox 1"/>
-          <p:cNvSpPr txBox="1"/>
+      <p:pic>
+        <p:nvPicPr>
+          <p:cNvPr id="2" name="Picture 1" descr="s07.png"/>
+          <p:cNvPicPr>
+            <a:picLocks noChangeAspect="1"/>
+          </p:cNvPicPr>
           <p:nvPr/>
-        </p:nvSpPr>
+        </p:nvPicPr>
+        <p:blipFill>
+          <a:blip r:embed="rId2"/>
+          <a:stretch>
+            <a:fillRect/>
+          </a:stretch>
+        </p:blipFill>
         <p:spPr>
           <a:xfrm>
-            <a:off x="640080" y="365760"/>
-            <a:ext cx="10972800" cy="822960"/>
+            <a:off x="0" y="0"/>
+            <a:ext cx="12191695" cy="6858000"/>
           </a:xfrm>
           <a:prstGeom prst="rect">
             <a:avLst/>
           </a:prstGeom>
-          <a:noFill/>
         </p:spPr>
-        <p:txBody>
-          <a:bodyPr wrap="none">
-            <a:spAutoFit/>
-          </a:bodyPr>
-          <a:lstStyle/>
-          <a:p>
-            <a:pPr>
-              <a:defRPr sz="2800" b="1">
-                <a:solidFill>
-                  <a:srgbClr val="0F172A"/>
-                </a:solidFill>
-              </a:defRPr>
-            </a:pPr>
-            <a:r>
-              <a:t>Слайд 7. Заряд читаем отдельно</a:t>
-            </a:r>
-          </a:p>
-        </p:txBody>
-      </p:sp>
-      <p:sp>
-        <p:nvSpPr>
-          <p:cNvPr id="3" name="TextBox 2"/>
-          <p:cNvSpPr txBox="1"/>
-          <p:nvPr/>
-        </p:nvSpPr>
-        <p:spPr>
-          <a:xfrm>
-            <a:off x="731520" y="1417320"/>
-            <a:ext cx="10789920" cy="4709160"/>
-          </a:xfrm>
-          <a:prstGeom prst="rect">
-            <a:avLst/>
-          </a:prstGeom>
-          <a:noFill/>
-        </p:spPr>
-        <p:txBody>
-          <a:bodyPr wrap="square">
-            <a:spAutoFit/>
-          </a:bodyPr>
-          <a:lstStyle/>
-          <a:p>
-            <a:pPr>
-              <a:spcAft>
-                <a:spcPts val="300"/>
-              </a:spcAft>
-              <a:defRPr sz="2200">
-                <a:solidFill>
-                  <a:srgbClr val="1E293B"/>
-                </a:solidFill>
-                <a:latin typeface="DejaVu Sans"/>
-              </a:defRPr>
-            </a:pPr>
-            <a:r>
-              <a:t>Заряд стоит справа сверху, после величины записан знак.</a:t>
-            </a:r>
-          </a:p>
-          <a:p>
-            <a:pPr>
-              <a:spcAft>
-                <a:spcPts val="300"/>
-              </a:spcAft>
-              <a:defRPr sz="2200">
-                <a:solidFill>
-                  <a:srgbClr val="1E293B"/>
-                </a:solidFill>
-                <a:latin typeface="DejaVu Sans"/>
-              </a:defRPr>
-            </a:pPr>
-            <a:r>
-              <a:t>Запись  ·  Что представлено  ·  Заряд одного иона</a:t>
-            </a:r>
-          </a:p>
-          <a:p>
-            <a:pPr>
-              <a:spcAft>
-                <a:spcPts val="300"/>
-              </a:spcAft>
-              <a:defRPr sz="2200">
-                <a:solidFill>
-                  <a:srgbClr val="1E293B"/>
-                </a:solidFill>
-                <a:latin typeface="DejaVu Sans"/>
-              </a:defRPr>
-            </a:pPr>
-            <a:r>
-              <a:t>Na⁺  ·  один ион Na  ·  +1</a:t>
-            </a:r>
-          </a:p>
-          <a:p>
-            <a:pPr>
-              <a:spcAft>
-                <a:spcPts val="300"/>
-              </a:spcAft>
-              <a:defRPr sz="2200">
-                <a:solidFill>
-                  <a:srgbClr val="1E293B"/>
-                </a:solidFill>
-                <a:latin typeface="DejaVu Sans"/>
-              </a:defRPr>
-            </a:pPr>
-            <a:r>
-              <a:t>Ca²⁺  ·  один ион Ca  ·  +2</a:t>
-            </a:r>
-          </a:p>
-          <a:p>
-            <a:pPr>
-              <a:spcAft>
-                <a:spcPts val="300"/>
-              </a:spcAft>
-              <a:defRPr sz="2200">
-                <a:solidFill>
-                  <a:srgbClr val="1E293B"/>
-                </a:solidFill>
-                <a:latin typeface="DejaVu Sans"/>
-              </a:defRPr>
-            </a:pPr>
-            <a:r>
-              <a:t>Cl⁻  ·  один ион Cl  ·  −1</a:t>
-            </a:r>
-          </a:p>
-          <a:p>
-            <a:pPr>
-              <a:spcAft>
-                <a:spcPts val="300"/>
-              </a:spcAft>
-              <a:defRPr sz="2200">
-                <a:solidFill>
-                  <a:srgbClr val="1E293B"/>
-                </a:solidFill>
-                <a:latin typeface="DejaVu Sans"/>
-              </a:defRPr>
-            </a:pPr>
-            <a:r>
-              <a:t>SO₄²⁻  ·  один ион: 1 S и 4 O  ·  −2</a:t>
-            </a:r>
-          </a:p>
-          <a:p>
-            <a:pPr>
-              <a:spcAft>
-                <a:spcPts val="300"/>
-              </a:spcAft>
-              <a:defRPr sz="2200">
-                <a:solidFill>
-                  <a:srgbClr val="1E293B"/>
-                </a:solidFill>
-                <a:latin typeface="DejaVu Sans"/>
-              </a:defRPr>
-            </a:pPr>
-            <a:r>
-              <a:t>В 3SO₄²⁻ — три иона; заряд каждого −2. ₄ — индекс O, ²⁻ — заряд всей группы SO₄.</a:t>
-            </a:r>
-          </a:p>
-          <a:p>
-            <a:pPr>
-              <a:spcAft>
-                <a:spcPts val="300"/>
-              </a:spcAft>
-              <a:defRPr sz="2200">
-                <a:solidFill>
-                  <a:srgbClr val="1E293B"/>
-                </a:solidFill>
-                <a:latin typeface="DejaVu Sans"/>
-              </a:defRPr>
-            </a:pPr>
-            <a:r>
-              <a:t>Для условной группы «два Na⁺ и один Cl⁻» найдите число ионов и суммарный заряд.</a:t>
-            </a:r>
-          </a:p>
-        </p:txBody>
-      </p:sp>
-      <p:sp>
-        <p:nvSpPr>
-          <p:cNvPr id="4" name="TextBox 3"/>
-          <p:cNvSpPr txBox="1"/>
-          <p:nvPr/>
-        </p:nvSpPr>
-        <p:spPr>
-          <a:xfrm>
-            <a:off x="731520" y="6400800"/>
-            <a:ext cx="10789920" cy="274320"/>
-          </a:xfrm>
-          <a:prstGeom prst="rect">
-            <a:avLst/>
-          </a:prstGeom>
-          <a:noFill/>
-        </p:spPr>
-        <p:txBody>
-          <a:bodyPr wrap="none">
-            <a:spAutoFit/>
-          </a:bodyPr>
-          <a:lstStyle/>
-          <a:p>
-            <a:pPr>
-              <a:defRPr sz="1200"/>
-            </a:pPr>
-            <a:r>
-              <a:t>Черновик для проверки преподавателем • 7</a:t>
-            </a:r>
-          </a:p>
-        </p:txBody>
-      </p:sp>
+      </p:pic>
     </p:spTree>
   </p:cSld>
   <p:clrMapOvr>
@@ -8581,14 +7423,6 @@
 <file path=ppt/slides/slide8.xml><?xml version="1.0" encoding="utf-8"?>
 <p:sld xmlns:a="http://schemas.openxmlformats.org/drawingml/2006/main" xmlns:p="http://schemas.openxmlformats.org/presentationml/2006/main" xmlns:r="http://schemas.openxmlformats.org/officeDocument/2006/relationships">
   <p:cSld>
-    <p:bg>
-      <p:bgPr>
-        <a:solidFill>
-          <a:srgbClr val="F8FAFC"/>
-        </a:solidFill>
-        <a:effectLst/>
-      </p:bgPr>
-    </p:bg>
     <p:spTree>
       <p:nvGrpSpPr>
         <p:cNvPr id="1" name=""/>
@@ -8596,191 +7430,30 @@
         <p:nvPr/>
       </p:nvGrpSpPr>
       <p:grpSpPr/>
-      <p:sp>
-        <p:nvSpPr>
-          <p:cNvPr id="2" name="TextBox 1"/>
-          <p:cNvSpPr txBox="1"/>
+      <p:pic>
+        <p:nvPicPr>
+          <p:cNvPr id="2" name="Picture 1" descr="s08.png"/>
+          <p:cNvPicPr>
+            <a:picLocks noChangeAspect="1"/>
+          </p:cNvPicPr>
           <p:nvPr/>
-        </p:nvSpPr>
+        </p:nvPicPr>
+        <p:blipFill>
+          <a:blip r:embed="rId2"/>
+          <a:stretch>
+            <a:fillRect/>
+          </a:stretch>
+        </p:blipFill>
         <p:spPr>
           <a:xfrm>
-            <a:off x="640080" y="365760"/>
-            <a:ext cx="10972800" cy="822960"/>
+            <a:off x="0" y="0"/>
+            <a:ext cx="12191695" cy="6858000"/>
           </a:xfrm>
           <a:prstGeom prst="rect">
             <a:avLst/>
           </a:prstGeom>
-          <a:noFill/>
         </p:spPr>
-        <p:txBody>
-          <a:bodyPr wrap="none">
-            <a:spAutoFit/>
-          </a:bodyPr>
-          <a:lstStyle/>
-          <a:p>
-            <a:pPr>
-              <a:defRPr sz="2800" b="1">
-                <a:solidFill>
-                  <a:srgbClr val="0F172A"/>
-                </a:solidFill>
-              </a:defRPr>
-            </a:pPr>
-            <a:r>
-              <a:t>Слайд 8. У NaCl — формульная единица</a:t>
-            </a:r>
-          </a:p>
-        </p:txBody>
-      </p:sp>
-      <p:sp>
-        <p:nvSpPr>
-          <p:cNvPr id="3" name="TextBox 2"/>
-          <p:cNvSpPr txBox="1"/>
-          <p:nvPr/>
-        </p:nvSpPr>
-        <p:spPr>
-          <a:xfrm>
-            <a:off x="731520" y="1417320"/>
-            <a:ext cx="10789920" cy="4709160"/>
-          </a:xfrm>
-          <a:prstGeom prst="rect">
-            <a:avLst/>
-          </a:prstGeom>
-          <a:noFill/>
-        </p:spPr>
-        <p:txBody>
-          <a:bodyPr wrap="square">
-            <a:spAutoFit/>
-          </a:bodyPr>
-          <a:lstStyle/>
-          <a:p>
-            <a:pPr>
-              <a:spcAft>
-                <a:spcPts val="300"/>
-              </a:spcAft>
-              <a:defRPr sz="2200">
-                <a:solidFill>
-                  <a:srgbClr val="1E293B"/>
-                </a:solidFill>
-                <a:latin typeface="DejaVu Sans"/>
-              </a:defRPr>
-            </a:pPr>
-            <a:r>
-              <a:t>Не у всех веществ есть отдельные молекулы.</a:t>
-            </a:r>
-          </a:p>
-          <a:p>
-            <a:pPr>
-              <a:spcAft>
-                <a:spcPts val="300"/>
-              </a:spcAft>
-              <a:defRPr sz="2200">
-                <a:solidFill>
-                  <a:srgbClr val="1E293B"/>
-                </a:solidFill>
-                <a:latin typeface="DejaVu Sans"/>
-              </a:defRPr>
-            </a:pPr>
-            <a:r>
-              <a:t>NaCl показывает соотношение Na : Cl = 1 : 1.</a:t>
-            </a:r>
-          </a:p>
-          <a:p>
-            <a:pPr>
-              <a:spcAft>
-                <a:spcPts val="300"/>
-              </a:spcAft>
-              <a:defRPr sz="2200">
-                <a:solidFill>
-                  <a:srgbClr val="1E293B"/>
-                </a:solidFill>
-                <a:latin typeface="DejaVu Sans"/>
-              </a:defRPr>
-            </a:pPr>
-            <a:r>
-              <a:t>Одна формульная единица NaCl содержит в записи один ион Na⁺ и один Cl⁻.</a:t>
-            </a:r>
-          </a:p>
-          <a:p>
-            <a:pPr>
-              <a:spcAft>
-                <a:spcPts val="300"/>
-              </a:spcAft>
-              <a:defRPr sz="2200">
-                <a:solidFill>
-                  <a:srgbClr val="1E293B"/>
-                </a:solidFill>
-                <a:latin typeface="DejaVu Sans"/>
-              </a:defRPr>
-            </a:pPr>
-            <a:r>
-              <a:t>2NaCl — две формульные единицы: по два иона каждого вида.</a:t>
-            </a:r>
-          </a:p>
-          <a:p>
-            <a:pPr>
-              <a:spcAft>
-                <a:spcPts val="300"/>
-              </a:spcAft>
-              <a:defRPr sz="2200">
-                <a:solidFill>
-                  <a:srgbClr val="1E293B"/>
-                </a:solidFill>
-                <a:latin typeface="DejaVu Sans"/>
-              </a:defRPr>
-            </a:pPr>
-            <a:r>
-              <a:t>Формула NaCl в целом нейтральна.</a:t>
-            </a:r>
-          </a:p>
-          <a:p>
-            <a:pPr>
-              <a:spcAft>
-                <a:spcPts val="300"/>
-              </a:spcAft>
-              <a:defRPr sz="2200">
-                <a:solidFill>
-                  <a:srgbClr val="1E293B"/>
-                </a:solidFill>
-                <a:latin typeface="DejaVu Sans"/>
-              </a:defRPr>
-            </a:pPr>
-            <a:r>
-              <a:t>На этой неделе готовые формулы читаем, правила их составления не изучаем.</a:t>
-            </a:r>
-          </a:p>
-        </p:txBody>
-      </p:sp>
-      <p:sp>
-        <p:nvSpPr>
-          <p:cNvPr id="4" name="TextBox 3"/>
-          <p:cNvSpPr txBox="1"/>
-          <p:nvPr/>
-        </p:nvSpPr>
-        <p:spPr>
-          <a:xfrm>
-            <a:off x="731520" y="6400800"/>
-            <a:ext cx="10789920" cy="274320"/>
-          </a:xfrm>
-          <a:prstGeom prst="rect">
-            <a:avLst/>
-          </a:prstGeom>
-          <a:noFill/>
-        </p:spPr>
-        <p:txBody>
-          <a:bodyPr wrap="none">
-            <a:spAutoFit/>
-          </a:bodyPr>
-          <a:lstStyle/>
-          <a:p>
-            <a:pPr>
-              <a:defRPr sz="1200"/>
-            </a:pPr>
-            <a:r>
-              <a:t>Черновик для проверки преподавателем • 8</a:t>
-            </a:r>
-          </a:p>
-        </p:txBody>
-      </p:sp>
+      </p:pic>
     </p:spTree>
   </p:cSld>
   <p:clrMapOvr>
@@ -8792,14 +7465,6 @@
 <file path=ppt/slides/slide9.xml><?xml version="1.0" encoding="utf-8"?>
 <p:sld xmlns:a="http://schemas.openxmlformats.org/drawingml/2006/main" xmlns:p="http://schemas.openxmlformats.org/presentationml/2006/main" xmlns:r="http://schemas.openxmlformats.org/officeDocument/2006/relationships">
   <p:cSld>
-    <p:bg>
-      <p:bgPr>
-        <a:solidFill>
-          <a:srgbClr val="F8FAFC"/>
-        </a:solidFill>
-        <a:effectLst/>
-      </p:bgPr>
-    </p:bg>
     <p:spTree>
       <p:nvGrpSpPr>
         <p:cNvPr id="1" name=""/>
@@ -8807,191 +7472,30 @@
         <p:nvPr/>
       </p:nvGrpSpPr>
       <p:grpSpPr/>
-      <p:sp>
-        <p:nvSpPr>
-          <p:cNvPr id="2" name="TextBox 1"/>
-          <p:cNvSpPr txBox="1"/>
+      <p:pic>
+        <p:nvPicPr>
+          <p:cNvPr id="2" name="Picture 1" descr="s09.png"/>
+          <p:cNvPicPr>
+            <a:picLocks noChangeAspect="1"/>
+          </p:cNvPicPr>
           <p:nvPr/>
-        </p:nvSpPr>
+        </p:nvPicPr>
+        <p:blipFill>
+          <a:blip r:embed="rId2"/>
+          <a:stretch>
+            <a:fillRect/>
+          </a:stretch>
+        </p:blipFill>
         <p:spPr>
           <a:xfrm>
-            <a:off x="640080" y="365760"/>
-            <a:ext cx="10972800" cy="822960"/>
+            <a:off x="0" y="0"/>
+            <a:ext cx="12191695" cy="6858000"/>
           </a:xfrm>
           <a:prstGeom prst="rect">
             <a:avLst/>
           </a:prstGeom>
-          <a:noFill/>
         </p:spPr>
-        <p:txBody>
-          <a:bodyPr wrap="none">
-            <a:spAutoFit/>
-          </a:bodyPr>
-          <a:lstStyle/>
-          <a:p>
-            <a:pPr>
-              <a:defRPr sz="2800" b="1">
-                <a:solidFill>
-                  <a:srgbClr val="0F172A"/>
-                </a:solidFill>
-              </a:defRPr>
-            </a:pPr>
-            <a:r>
-              <a:t>Слайд 9. Пять шагов чтения</a:t>
-            </a:r>
-          </a:p>
-        </p:txBody>
-      </p:sp>
-      <p:sp>
-        <p:nvSpPr>
-          <p:cNvPr id="3" name="TextBox 2"/>
-          <p:cNvSpPr txBox="1"/>
-          <p:nvPr/>
-        </p:nvSpPr>
-        <p:spPr>
-          <a:xfrm>
-            <a:off x="731520" y="1417320"/>
-            <a:ext cx="10789920" cy="4709160"/>
-          </a:xfrm>
-          <a:prstGeom prst="rect">
-            <a:avLst/>
-          </a:prstGeom>
-          <a:noFill/>
-        </p:spPr>
-        <p:txBody>
-          <a:bodyPr wrap="square">
-            <a:spAutoFit/>
-          </a:bodyPr>
-          <a:lstStyle/>
-          <a:p>
-            <a:pPr>
-              <a:spcAft>
-                <a:spcPts val="300"/>
-              </a:spcAft>
-              <a:defRPr sz="2200">
-                <a:solidFill>
-                  <a:srgbClr val="1E293B"/>
-                </a:solidFill>
-                <a:latin typeface="DejaVu Sans"/>
-              </a:defRPr>
-            </a:pPr>
-            <a:r>
-              <a:t>1. Найди символы элементов.</a:t>
-            </a:r>
-          </a:p>
-          <a:p>
-            <a:pPr>
-              <a:spcAft>
-                <a:spcPts val="300"/>
-              </a:spcAft>
-              <a:defRPr sz="2200">
-                <a:solidFill>
-                  <a:srgbClr val="1E293B"/>
-                </a:solidFill>
-                <a:latin typeface="DejaVu Sans"/>
-              </a:defRPr>
-            </a:pPr>
-            <a:r>
-              <a:t>2. Учти индексы после символов; отсутствующий индекс — 1.</a:t>
-            </a:r>
-          </a:p>
-          <a:p>
-            <a:pPr>
-              <a:spcAft>
-                <a:spcPts val="300"/>
-              </a:spcAft>
-              <a:defRPr sz="2200">
-                <a:solidFill>
-                  <a:srgbClr val="1E293B"/>
-                </a:solidFill>
-                <a:latin typeface="DejaVu Sans"/>
-              </a:defRPr>
-            </a:pPr>
-            <a:r>
-              <a:t>3. Умножь состав скобок на индекс после скобок.</a:t>
-            </a:r>
-          </a:p>
-          <a:p>
-            <a:pPr>
-              <a:spcAft>
-                <a:spcPts val="300"/>
-              </a:spcAft>
-              <a:defRPr sz="2200">
-                <a:solidFill>
-                  <a:srgbClr val="1E293B"/>
-                </a:solidFill>
-                <a:latin typeface="DejaVu Sans"/>
-              </a:defRPr>
-            </a:pPr>
-            <a:r>
-              <a:t>4. Умножь весь состав на коэффициент; отсутствующий — 1.</a:t>
-            </a:r>
-          </a:p>
-          <a:p>
-            <a:pPr>
-              <a:spcAft>
-                <a:spcPts val="300"/>
-              </a:spcAft>
-              <a:defRPr sz="2200">
-                <a:solidFill>
-                  <a:srgbClr val="1E293B"/>
-                </a:solidFill>
-                <a:latin typeface="DejaVu Sans"/>
-              </a:defRPr>
-            </a:pPr>
-            <a:r>
-              <a:t>5. Прочитай заряд отдельно. Он не множитель для числа атомов.</a:t>
-            </a:r>
-          </a:p>
-          <a:p>
-            <a:pPr>
-              <a:spcAft>
-                <a:spcPts val="300"/>
-              </a:spcAft>
-              <a:defRPr sz="2200">
-                <a:solidFill>
-                  <a:srgbClr val="1E293B"/>
-                </a:solidFill>
-                <a:latin typeface="DejaVu Sans"/>
-              </a:defRPr>
-            </a:pPr>
-            <a:r>
-              <a:t>Проверка ловушек: 3H₂O, Ca²⁺, 2Ca(OH)₂. У какого числа какая роль?</a:t>
-            </a:r>
-          </a:p>
-        </p:txBody>
-      </p:sp>
-      <p:sp>
-        <p:nvSpPr>
-          <p:cNvPr id="4" name="TextBox 3"/>
-          <p:cNvSpPr txBox="1"/>
-          <p:nvPr/>
-        </p:nvSpPr>
-        <p:spPr>
-          <a:xfrm>
-            <a:off x="731520" y="6400800"/>
-            <a:ext cx="10789920" cy="274320"/>
-          </a:xfrm>
-          <a:prstGeom prst="rect">
-            <a:avLst/>
-          </a:prstGeom>
-          <a:noFill/>
-        </p:spPr>
-        <p:txBody>
-          <a:bodyPr wrap="none">
-            <a:spAutoFit/>
-          </a:bodyPr>
-          <a:lstStyle/>
-          <a:p>
-            <a:pPr>
-              <a:defRPr sz="1200"/>
-            </a:pPr>
-            <a:r>
-              <a:t>Черновик для проверки преподавателем • 9</a:t>
-            </a:r>
-          </a:p>
-        </p:txBody>
-      </p:sp>
+      </p:pic>
     </p:spTree>
   </p:cSld>
   <p:clrMapOvr>
